--- a/Prospect_Assist_AI_Submission_Deck.pptx
+++ b/Prospect_Assist_AI_Submission_Deck.pptx
@@ -4,24 +4,25 @@
   <p:sldMasterIdLst>
     <p:sldMasterId id="2147483648" r:id="rId1"/>
   </p:sldMasterIdLst>
+  <p:notesMasterIdLst>
+    <p:notesMasterId r:id="rId16"/>
+  </p:notesMasterIdLst>
   <p:sldIdLst>
-    <p:sldId id="256" r:id="rId2"/>
-    <p:sldId id="257" r:id="rId3"/>
-    <p:sldId id="258" r:id="rId4"/>
-    <p:sldId id="259" r:id="rId5"/>
-    <p:sldId id="260" r:id="rId6"/>
-    <p:sldId id="261" r:id="rId7"/>
-    <p:sldId id="262" r:id="rId8"/>
-    <p:sldId id="263" r:id="rId9"/>
-    <p:sldId id="264" r:id="rId10"/>
-    <p:sldId id="265" r:id="rId11"/>
-    <p:sldId id="266" r:id="rId12"/>
-    <p:sldId id="267" r:id="rId13"/>
-    <p:sldId id="268" r:id="rId14"/>
+    <p:sldId id="269" r:id="rId2"/>
+    <p:sldId id="256" r:id="rId3"/>
+    <p:sldId id="257" r:id="rId4"/>
+    <p:sldId id="258" r:id="rId5"/>
+    <p:sldId id="259" r:id="rId6"/>
+    <p:sldId id="260" r:id="rId7"/>
+    <p:sldId id="261" r:id="rId8"/>
+    <p:sldId id="262" r:id="rId9"/>
+    <p:sldId id="263" r:id="rId10"/>
+    <p:sldId id="264" r:id="rId11"/>
+    <p:sldId id="265" r:id="rId12"/>
+    <p:sldId id="266" r:id="rId13"/>
+    <p:sldId id="267" r:id="rId14"/>
+    <p:sldId id="268" r:id="rId15"/>
   </p:sldIdLst>
-  <p:notesMasterIdLst>
-    <p:notesMasterId r:id="rId15"/>
-  </p:notesMasterIdLst>
   <p:sldSz cx="12192000" cy="6858000"/>
   <p:notesSz cx="6858000" cy="12192000"/>
   <p:defaultTextStyle>
@@ -116,13 +117,20 @@
       </a:defRPr>
     </a:lvl9pPr>
   </p:defaultTextStyle>
+  <p:extLst>
+    <p:ext uri="{EFAFB233-063F-42B5-8137-9DF3F51BA10A}">
+      <p15:sldGuideLst xmlns:p15="http://schemas.microsoft.com/office/powerpoint/2012/main"/>
+    </p:ext>
+  </p:extLst>
 </p:presentation>
 </file>
 
 <file path=ppt/charts/chart1.xml><?xml version="1.0" encoding="utf-8"?>
-<c:chartSpace xmlns:c="http://schemas.openxmlformats.org/drawingml/2006/chart" xmlns:a="http://schemas.openxmlformats.org/drawingml/2006/main" xmlns:r="http://schemas.openxmlformats.org/officeDocument/2006/relationships">
+<c:chartSpace xmlns:c="http://schemas.openxmlformats.org/drawingml/2006/chart" xmlns:a="http://schemas.openxmlformats.org/drawingml/2006/main" xmlns:r="http://schemas.openxmlformats.org/officeDocument/2006/relationships" xmlns:c16r2="http://schemas.microsoft.com/office/drawing/2015/06/chart">
   <c:date1904 val="0"/>
+  <c:lang val="en-US"/>
   <c:roundedCorners val="1"/>
+  <c:style val="2"/>
   <c:chart>
     <c:title>
       <c:tx>
@@ -139,7 +147,7 @@
               </a:defRPr>
             </a:pPr>
             <a:r>
-              <a:rPr sz="1200" b="0" i="0" u="none" strike="noStrike">
+              <a:rPr lang="en-IN" sz="1200" b="0" i="0" u="none" strike="noStrike">
                 <a:solidFill>
                   <a:srgbClr val="0E201B"/>
                 </a:solidFill>
@@ -150,7 +158,6 @@
           </a:p>
         </c:rich>
       </c:tx>
-      <c:layout/>
       <c:overlay val="0"/>
     </c:title>
     <c:autoTitleDeleted val="0"/>
@@ -183,18 +190,26 @@
           <c:invertIfNegative val="0"/>
           <c:dLbls>
             <c:numFmt formatCode="#,##0" sourceLinked="0"/>
+            <c:spPr>
+              <a:noFill/>
+              <a:ln>
+                <a:noFill/>
+              </a:ln>
+              <a:effectLst/>
+            </c:spPr>
             <c:txPr>
               <a:bodyPr/>
               <a:lstStyle/>
               <a:p>
                 <a:pPr>
-                  <a:defRPr b="0" i="0" strike="noStrike" sz="1000" u="none">
+                  <a:defRPr sz="1000" b="0" i="0" u="none" strike="noStrike">
                     <a:solidFill>
                       <a:srgbClr val="0E201B"/>
                     </a:solidFill>
                     <a:latin typeface="Calibri"/>
                   </a:defRPr>
                 </a:pPr>
+                <a:endParaRPr lang="en-US"/>
               </a:p>
             </c:txPr>
             <c:showLegendKey val="0"/>
@@ -204,31 +219,34 @@
             <c:showPercent val="0"/>
             <c:showBubbleSize val="0"/>
             <c:showLeaderLines val="0"/>
+            <c:extLst>
+              <c:ext xmlns:c15="http://schemas.microsoft.com/office/drawing/2012/chart" uri="{CE6537A1-D6FC-4f65-9D91-7224C49458BB}">
+                <c15:showLeaderLines val="0"/>
+              </c:ext>
+            </c:extLst>
           </c:dLbls>
           <c:cat>
-            <c:multiLvlStrRef>
+            <c:strRef>
               <c:f>Sheet1!$A$2:$A$6</c:f>
-              <c:multiLvlStrCache>
+              <c:strCache>
                 <c:ptCount val="5"/>
-                <c:lvl>
-                  <c:pt idx="0">
-                    <c:v>Serious</c:v>
-                  </c:pt>
-                  <c:pt idx="1">
-                    <c:v>Interested</c:v>
-                  </c:pt>
-                  <c:pt idx="2">
-                    <c:v>Quality watch</c:v>
-                  </c:pt>
-                  <c:pt idx="3">
-                    <c:v>Manual review</c:v>
-                  </c:pt>
-                  <c:pt idx="4">
-                    <c:v>Not ready</c:v>
-                  </c:pt>
-                </c:lvl>
-              </c:multiLvlStrCache>
-            </c:multiLvlStrRef>
+                <c:pt idx="0">
+                  <c:v>Serious</c:v>
+                </c:pt>
+                <c:pt idx="1">
+                  <c:v>Interested</c:v>
+                </c:pt>
+                <c:pt idx="2">
+                  <c:v>Quality watch</c:v>
+                </c:pt>
+                <c:pt idx="3">
+                  <c:v>Manual review</c:v>
+                </c:pt>
+                <c:pt idx="4">
+                  <c:v>Not ready</c:v>
+                </c:pt>
+              </c:strCache>
+            </c:strRef>
           </c:cat>
           <c:val>
             <c:numRef>
@@ -254,36 +272,23 @@
               </c:numCache>
             </c:numRef>
           </c:val>
+          <c:extLst>
+            <c:ext xmlns:c16="http://schemas.microsoft.com/office/drawing/2014/chart" uri="{C3380CC4-5D6E-409C-BE32-E72D297353CC}">
+              <c16:uniqueId val="{00000000-4FC4-4D77-928A-00523C2CE06D}"/>
+            </c:ext>
+          </c:extLst>
         </c:ser>
         <c:dLbls>
-          <c:numFmt formatCode="#,##0" sourceLinked="0"/>
-          <c:txPr>
-            <a:bodyPr/>
-            <a:lstStyle/>
-            <a:p>
-              <a:pPr>
-                <a:defRPr b="0" i="0" strike="noStrike" sz="1000" u="none">
-                  <a:solidFill>
-                    <a:srgbClr val="0E201B"/>
-                  </a:solidFill>
-                  <a:latin typeface="Calibri"/>
-                </a:defRPr>
-              </a:pPr>
-            </a:p>
-          </c:txPr>
           <c:showLegendKey val="0"/>
           <c:showVal val="1"/>
           <c:showCatName val="0"/>
           <c:showSerName val="0"/>
           <c:showPercent val="0"/>
           <c:showBubbleSize val="0"/>
-          <c:showLeaderLines val="0"/>
         </c:dLbls>
         <c:gapWidth val="150"/>
-        <c:overlap val="0"/>
         <c:axId val="2094734554"/>
         <c:axId val="2094734552"/>
-        <c:axId val="2094734556"/>
       </c:barChart>
       <c:catAx>
         <c:axId val="2094734554"/>
@@ -324,6 +329,7 @@
         <c:crosses val="autoZero"/>
         <c:auto val="1"/>
         <c:lblAlgn val="ctr"/>
+        <c:lblOffset val="100"/>
         <c:noMultiLvlLbl val="1"/>
       </c:catAx>
       <c:valAx>
@@ -386,6 +392,7 @@
     </c:plotArea>
     <c:plotVisOnly val="1"/>
     <c:dispBlanksAs val="span"/>
+    <c:showDLblsOverMax val="1"/>
   </c:chart>
   <c:spPr>
     <a:noFill/>
@@ -422,234 +429,10 @@
           <a:chExt cx="0" cy="0"/>
         </a:xfrm>
       </p:grpSpPr>
-      <p:sp>
-        <p:nvSpPr>
-          <p:cNvPr id="2" name="Header Placeholder 1"/>
-          <p:cNvSpPr>
-            <a:spLocks noGrp="1"/>
-          </p:cNvSpPr>
-          <p:nvPr>
-            <p:ph type="hdr" sz="quarter"/>
-          </p:nvPr>
-        </p:nvSpPr>
-        <p:spPr>
-          <a:xfrm>
-            <a:off x="0" y="0"/>
-            <a:ext cx="2971800" cy="458788"/>
-          </a:xfrm>
-          <a:prstGeom prst="rect">
-            <a:avLst/>
-          </a:prstGeom>
-        </p:spPr>
-        <p:txBody>
-          <a:bodyPr vert="horz" lIns="91440" tIns="45720" rIns="91440" bIns="45720" rtlCol="0"/>
-          <a:lstStyle>
-            <a:lvl1pPr algn="l">
-              <a:defRPr sz="1200"/>
-            </a:lvl1pPr>
-          </a:lstStyle>
-          <a:p>
-            <a:endParaRPr lang="en-US"/>
-          </a:p>
-        </p:txBody>
-      </p:sp>
-      <p:sp>
-        <p:nvSpPr>
-          <p:cNvPr id="3" name="Date Placeholder 2"/>
-          <p:cNvSpPr>
-            <a:spLocks noGrp="1"/>
-          </p:cNvSpPr>
-          <p:nvPr>
-            <p:ph type="dt" idx="1"/>
-          </p:nvPr>
-        </p:nvSpPr>
-        <p:spPr>
-          <a:xfrm>
-            <a:off x="3884613" y="0"/>
-            <a:ext cx="2971800" cy="458788"/>
-          </a:xfrm>
-          <a:prstGeom prst="rect">
-            <a:avLst/>
-          </a:prstGeom>
-        </p:spPr>
-        <p:txBody>
-          <a:bodyPr vert="horz" lIns="91440" tIns="45720" rIns="91440" bIns="45720" rtlCol="0"/>
-          <a:lstStyle>
-            <a:lvl1pPr algn="r">
-              <a:defRPr sz="1200"/>
-            </a:lvl1pPr>
-          </a:lstStyle>
-          <a:p>
-            <a:fld id="{5282F153-3F37-0F45-9E97-73ACFA13230C}" type="datetimeFigureOut">
-              <a:rPr lang="en-US"/>
-              <a:t>7/23/19</a:t>
-            </a:fld>
-            <a:endParaRPr lang="en-US"/>
-          </a:p>
-        </p:txBody>
-      </p:sp>
-      <p:sp>
-        <p:nvSpPr>
-          <p:cNvPr id="4" name="Slide Image Placeholder 3"/>
-          <p:cNvSpPr>
-            <a:spLocks noGrp="1" noRot="1" noChangeAspect="1"/>
-          </p:cNvSpPr>
-          <p:nvPr>
-            <p:ph type="sldImg" idx="2"/>
-          </p:nvPr>
-        </p:nvSpPr>
-        <p:spPr>
-          <a:xfrm>
-            <a:off x="685800" y="1143000"/>
-            <a:ext cx="5486400" cy="3086100"/>
-          </a:xfrm>
-          <a:prstGeom prst="rect">
-            <a:avLst/>
-          </a:prstGeom>
-          <a:noFill/>
-          <a:ln w="12700">
-            <a:solidFill>
-              <a:prstClr val="black"/>
-            </a:solidFill>
-          </a:ln>
-        </p:spPr>
-        <p:txBody>
-          <a:bodyPr vert="horz" lIns="91440" tIns="45720" rIns="91440" bIns="45720" rtlCol="0" anchor="ctr"/>
-          <a:lstStyle/>
-          <a:p>
-            <a:endParaRPr lang="en-US"/>
-          </a:p>
-        </p:txBody>
-      </p:sp>
-      <p:sp>
-        <p:nvSpPr>
-          <p:cNvPr id="5" name="Notes Placeholder 4"/>
-          <p:cNvSpPr>
-            <a:spLocks noGrp="1"/>
-          </p:cNvSpPr>
-          <p:nvPr>
-            <p:ph type="body" sz="quarter" idx="3"/>
-          </p:nvPr>
-        </p:nvSpPr>
-        <p:spPr>
-          <a:xfrm>
-            <a:off x="685800" y="4400550"/>
-            <a:ext cx="5486400" cy="3600450"/>
-          </a:xfrm>
-          <a:prstGeom prst="rect">
-            <a:avLst/>
-          </a:prstGeom>
-        </p:spPr>
-        <p:txBody>
-          <a:bodyPr vert="horz" lIns="91440" tIns="45720" rIns="91440" bIns="45720" rtlCol="0"/>
-          <a:lstStyle/>
-          <a:p>
-            <a:pPr lvl="0"/>
-            <a:r>
-              <a:rPr lang="en-US"/>
-              <a:t>Click to edit Master text styles</a:t>
-            </a:r>
-          </a:p>
-          <a:p>
-            <a:pPr lvl="1"/>
-            <a:r>
-              <a:rPr lang="en-US"/>
-              <a:t>Second level</a:t>
-            </a:r>
-          </a:p>
-          <a:p>
-            <a:pPr lvl="2"/>
-            <a:r>
-              <a:rPr lang="en-US"/>
-              <a:t>Third level</a:t>
-            </a:r>
-          </a:p>
-          <a:p>
-            <a:pPr lvl="3"/>
-            <a:r>
-              <a:rPr lang="en-US"/>
-              <a:t>Fourth level</a:t>
-            </a:r>
-          </a:p>
-          <a:p>
-            <a:pPr lvl="4"/>
-            <a:r>
-              <a:rPr lang="en-US"/>
-              <a:t>Fifth level</a:t>
-            </a:r>
-          </a:p>
-        </p:txBody>
-      </p:sp>
-      <p:sp>
-        <p:nvSpPr>
-          <p:cNvPr id="6" name="Footer Placeholder 5"/>
-          <p:cNvSpPr>
-            <a:spLocks noGrp="1"/>
-          </p:cNvSpPr>
-          <p:nvPr>
-            <p:ph type="ftr" sz="quarter" idx="4"/>
-          </p:nvPr>
-        </p:nvSpPr>
-        <p:spPr>
-          <a:xfrm>
-            <a:off x="0" y="8685213"/>
-            <a:ext cx="2971800" cy="458787"/>
-          </a:xfrm>
-          <a:prstGeom prst="rect">
-            <a:avLst/>
-          </a:prstGeom>
-        </p:spPr>
-        <p:txBody>
-          <a:bodyPr vert="horz" lIns="91440" tIns="45720" rIns="91440" bIns="45720" rtlCol="0" anchor="b"/>
-          <a:lstStyle>
-            <a:lvl1pPr algn="l">
-              <a:defRPr sz="1200"/>
-            </a:lvl1pPr>
-          </a:lstStyle>
-          <a:p>
-            <a:endParaRPr lang="en-US"/>
-          </a:p>
-        </p:txBody>
-      </p:sp>
-      <p:sp>
-        <p:nvSpPr>
-          <p:cNvPr id="7" name="Slide Number Placeholder 6"/>
-          <p:cNvSpPr>
-            <a:spLocks noGrp="1"/>
-          </p:cNvSpPr>
-          <p:nvPr>
-            <p:ph type="sldNum" sz="quarter" idx="5"/>
-          </p:nvPr>
-        </p:nvSpPr>
-        <p:spPr>
-          <a:xfrm>
-            <a:off x="3884613" y="8685213"/>
-            <a:ext cx="2971800" cy="458787"/>
-          </a:xfrm>
-          <a:prstGeom prst="rect">
-            <a:avLst/>
-          </a:prstGeom>
-        </p:spPr>
-        <p:txBody>
-          <a:bodyPr vert="horz" lIns="91440" tIns="45720" rIns="91440" bIns="45720" rtlCol="0" anchor="b"/>
-          <a:lstStyle>
-            <a:lvl1pPr algn="r">
-              <a:defRPr sz="1200"/>
-            </a:lvl1pPr>
-          </a:lstStyle>
-          <a:p>
-            <a:fld id="{CE5E9CC1-C706-0F49-92D6-E571CC5EEA8F}" type="slidenum">
-              <a:rPr lang="en-US"/>
-              <a:t>‹#›</a:t>
-            </a:fld>
-            <a:endParaRPr lang="en-US"/>
-          </a:p>
-        </p:txBody>
-      </p:sp>
     </p:spTree>
     <p:extLst>
       <p:ext uri="{BB962C8B-B14F-4D97-AF65-F5344CB8AC3E}">
-        <p14:creationId xmlns:p14="http://schemas.microsoft.com/office/powerpoint/2010/main" val="1024086991"/>
+        <p14:creationId xmlns:p14="http://schemas.microsoft.com/office/powerpoint/2010/main" val="3888564424"/>
       </p:ext>
     </p:extLst>
   </p:cSld>
@@ -793,10 +576,6 @@
           <a:bodyPr/>
           <a:lstStyle/>
           <a:p>
-            <a:r>
-              <a:rPr lang="en-US" dirty="0"/>
-              <a:t/>
-            </a:r>
             <a:endParaRPr lang="en-US" dirty="0"/>
           </a:p>
         </p:txBody>
@@ -818,7 +597,7 @@
           <a:p>
             <a:fld id="{F7021451-1387-4CA6-816F-3879F97B5CBC}" type="slidenum">
               <a:rPr lang="en-US"/>
-              <a:t>1</a:t>
+              <a:t>2</a:t>
             </a:fld>
             <a:endParaRPr lang="en-US"/>
           </a:p>
@@ -881,10 +660,6 @@
           <a:bodyPr/>
           <a:lstStyle/>
           <a:p>
-            <a:r>
-              <a:rPr lang="en-US" dirty="0"/>
-              <a:t/>
-            </a:r>
             <a:endParaRPr lang="en-US" dirty="0"/>
           </a:p>
         </p:txBody>
@@ -906,7 +681,7 @@
           <a:p>
             <a:fld id="{F7021451-1387-4CA6-816F-3879F97B5CBC}" type="slidenum">
               <a:rPr lang="en-US"/>
-              <a:t>10</a:t>
+              <a:t>11</a:t>
             </a:fld>
             <a:endParaRPr lang="en-US"/>
           </a:p>
@@ -969,10 +744,6 @@
           <a:bodyPr/>
           <a:lstStyle/>
           <a:p>
-            <a:r>
-              <a:rPr lang="en-US" dirty="0"/>
-              <a:t/>
-            </a:r>
             <a:endParaRPr lang="en-US" dirty="0"/>
           </a:p>
         </p:txBody>
@@ -994,7 +765,7 @@
           <a:p>
             <a:fld id="{F7021451-1387-4CA6-816F-3879F97B5CBC}" type="slidenum">
               <a:rPr lang="en-US"/>
-              <a:t>11</a:t>
+              <a:t>12</a:t>
             </a:fld>
             <a:endParaRPr lang="en-US"/>
           </a:p>
@@ -1057,10 +828,6 @@
           <a:bodyPr/>
           <a:lstStyle/>
           <a:p>
-            <a:r>
-              <a:rPr lang="en-US" dirty="0"/>
-              <a:t/>
-            </a:r>
             <a:endParaRPr lang="en-US" dirty="0"/>
           </a:p>
         </p:txBody>
@@ -1082,7 +849,7 @@
           <a:p>
             <a:fld id="{F7021451-1387-4CA6-816F-3879F97B5CBC}" type="slidenum">
               <a:rPr lang="en-US"/>
-              <a:t>12</a:t>
+              <a:t>13</a:t>
             </a:fld>
             <a:endParaRPr lang="en-US"/>
           </a:p>
@@ -1145,10 +912,6 @@
           <a:bodyPr/>
           <a:lstStyle/>
           <a:p>
-            <a:r>
-              <a:rPr lang="en-US" dirty="0"/>
-              <a:t/>
-            </a:r>
             <a:endParaRPr lang="en-US" dirty="0"/>
           </a:p>
         </p:txBody>
@@ -1170,7 +933,7 @@
           <a:p>
             <a:fld id="{F7021451-1387-4CA6-816F-3879F97B5CBC}" type="slidenum">
               <a:rPr lang="en-US"/>
-              <a:t>13</a:t>
+              <a:t>14</a:t>
             </a:fld>
             <a:endParaRPr lang="en-US"/>
           </a:p>
@@ -1233,10 +996,6 @@
           <a:bodyPr/>
           <a:lstStyle/>
           <a:p>
-            <a:r>
-              <a:rPr lang="en-US" dirty="0"/>
-              <a:t/>
-            </a:r>
             <a:endParaRPr lang="en-US" dirty="0"/>
           </a:p>
         </p:txBody>
@@ -1258,7 +1017,7 @@
           <a:p>
             <a:fld id="{F7021451-1387-4CA6-816F-3879F97B5CBC}" type="slidenum">
               <a:rPr lang="en-US"/>
-              <a:t>2</a:t>
+              <a:t>3</a:t>
             </a:fld>
             <a:endParaRPr lang="en-US"/>
           </a:p>
@@ -1321,10 +1080,6 @@
           <a:bodyPr/>
           <a:lstStyle/>
           <a:p>
-            <a:r>
-              <a:rPr lang="en-US" dirty="0"/>
-              <a:t/>
-            </a:r>
             <a:endParaRPr lang="en-US" dirty="0"/>
           </a:p>
         </p:txBody>
@@ -1346,7 +1101,7 @@
           <a:p>
             <a:fld id="{F7021451-1387-4CA6-816F-3879F97B5CBC}" type="slidenum">
               <a:rPr lang="en-US"/>
-              <a:t>3</a:t>
+              <a:t>4</a:t>
             </a:fld>
             <a:endParaRPr lang="en-US"/>
           </a:p>
@@ -1409,10 +1164,6 @@
           <a:bodyPr/>
           <a:lstStyle/>
           <a:p>
-            <a:r>
-              <a:rPr lang="en-US" dirty="0"/>
-              <a:t/>
-            </a:r>
             <a:endParaRPr lang="en-US" dirty="0"/>
           </a:p>
         </p:txBody>
@@ -1434,7 +1185,7 @@
           <a:p>
             <a:fld id="{F7021451-1387-4CA6-816F-3879F97B5CBC}" type="slidenum">
               <a:rPr lang="en-US"/>
-              <a:t>4</a:t>
+              <a:t>5</a:t>
             </a:fld>
             <a:endParaRPr lang="en-US"/>
           </a:p>
@@ -1497,10 +1248,6 @@
           <a:bodyPr/>
           <a:lstStyle/>
           <a:p>
-            <a:r>
-              <a:rPr lang="en-US" dirty="0"/>
-              <a:t/>
-            </a:r>
             <a:endParaRPr lang="en-US" dirty="0"/>
           </a:p>
         </p:txBody>
@@ -1522,7 +1269,7 @@
           <a:p>
             <a:fld id="{F7021451-1387-4CA6-816F-3879F97B5CBC}" type="slidenum">
               <a:rPr lang="en-US"/>
-              <a:t>5</a:t>
+              <a:t>6</a:t>
             </a:fld>
             <a:endParaRPr lang="en-US"/>
           </a:p>
@@ -1585,10 +1332,6 @@
           <a:bodyPr/>
           <a:lstStyle/>
           <a:p>
-            <a:r>
-              <a:rPr lang="en-US" dirty="0"/>
-              <a:t/>
-            </a:r>
             <a:endParaRPr lang="en-US" dirty="0"/>
           </a:p>
         </p:txBody>
@@ -1610,7 +1353,7 @@
           <a:p>
             <a:fld id="{F7021451-1387-4CA6-816F-3879F97B5CBC}" type="slidenum">
               <a:rPr lang="en-US"/>
-              <a:t>6</a:t>
+              <a:t>7</a:t>
             </a:fld>
             <a:endParaRPr lang="en-US"/>
           </a:p>
@@ -1673,10 +1416,6 @@
           <a:bodyPr/>
           <a:lstStyle/>
           <a:p>
-            <a:r>
-              <a:rPr lang="en-US" dirty="0"/>
-              <a:t/>
-            </a:r>
             <a:endParaRPr lang="en-US" dirty="0"/>
           </a:p>
         </p:txBody>
@@ -1698,7 +1437,7 @@
           <a:p>
             <a:fld id="{F7021451-1387-4CA6-816F-3879F97B5CBC}" type="slidenum">
               <a:rPr lang="en-US"/>
-              <a:t>7</a:t>
+              <a:t>8</a:t>
             </a:fld>
             <a:endParaRPr lang="en-US"/>
           </a:p>
@@ -1761,10 +1500,6 @@
           <a:bodyPr/>
           <a:lstStyle/>
           <a:p>
-            <a:r>
-              <a:rPr lang="en-US" dirty="0"/>
-              <a:t/>
-            </a:r>
             <a:endParaRPr lang="en-US" dirty="0"/>
           </a:p>
         </p:txBody>
@@ -1786,7 +1521,7 @@
           <a:p>
             <a:fld id="{F7021451-1387-4CA6-816F-3879F97B5CBC}" type="slidenum">
               <a:rPr lang="en-US"/>
-              <a:t>8</a:t>
+              <a:t>9</a:t>
             </a:fld>
             <a:endParaRPr lang="en-US"/>
           </a:p>
@@ -1849,10 +1584,6 @@
           <a:bodyPr/>
           <a:lstStyle/>
           <a:p>
-            <a:r>
-              <a:rPr lang="en-US" dirty="0"/>
-              <a:t/>
-            </a:r>
             <a:endParaRPr lang="en-US" dirty="0"/>
           </a:p>
         </p:txBody>
@@ -1874,7 +1605,7 @@
           <a:p>
             <a:fld id="{F7021451-1387-4CA6-816F-3879F97B5CBC}" type="slidenum">
               <a:rPr lang="en-US"/>
-              <a:t>9</a:t>
+              <a:t>10</a:t>
             </a:fld>
             <a:endParaRPr lang="en-US"/>
           </a:p>
@@ -1926,6 +1657,11 @@
 <file path=ppt/slideMasters/slideMaster1.xml><?xml version="1.0" encoding="utf-8"?>
 <p:sldMaster xmlns:a="http://schemas.openxmlformats.org/drawingml/2006/main" xmlns:r="http://schemas.openxmlformats.org/officeDocument/2006/relationships" xmlns:p="http://schemas.openxmlformats.org/presentationml/2006/main">
   <p:cSld>
+    <p:bg>
+      <p:bgRef idx="1001">
+        <a:schemeClr val="bg1"/>
+      </p:bgRef>
+    </p:bg>
     <p:spTree>
       <p:nvGrpSpPr>
         <p:cNvPr id="1" name=""/>
@@ -2202,14 +1938,7 @@
 
 <file path=ppt/slides/slide1.xml><?xml version="1.0" encoding="utf-8"?>
 <p:sld xmlns:a="http://schemas.openxmlformats.org/drawingml/2006/main" xmlns:r="http://schemas.openxmlformats.org/officeDocument/2006/relationships" xmlns:p="http://schemas.openxmlformats.org/presentationml/2006/main">
-  <p:cSld name="Slide 1">
-    <p:bg>
-      <p:bgPr>
-        <a:solidFill>
-          <a:srgbClr val="00584C"/>
-        </a:solidFill>
-      </p:bgPr>
-    </p:bg>
+  <p:cSld>
     <p:spTree>
       <p:nvGrpSpPr>
         <p:cNvPr id="1" name=""/>
@@ -2226,14 +1955,420 @@
       </p:grpSpPr>
       <p:sp>
         <p:nvSpPr>
+          <p:cNvPr id="3" name="TextBox 2">
+            <a:extLst>
+              <a:ext uri="{FF2B5EF4-FFF2-40B4-BE49-F238E27FC236}">
+                <a16:creationId xmlns:a16="http://schemas.microsoft.com/office/drawing/2014/main" id="{140C2516-9096-C989-D044-3537C56CC28E}"/>
+              </a:ext>
+            </a:extLst>
+          </p:cNvPr>
+          <p:cNvSpPr txBox="1"/>
+          <p:nvPr/>
+        </p:nvSpPr>
+        <p:spPr>
+          <a:xfrm>
+            <a:off x="1524000" y="1140588"/>
+            <a:ext cx="8128000" cy="2862322"/>
+          </a:xfrm>
+          <a:prstGeom prst="rect">
+            <a:avLst/>
+          </a:prstGeom>
+          <a:noFill/>
+        </p:spPr>
+        <p:txBody>
+          <a:bodyPr wrap="square">
+            <a:spAutoFit/>
+          </a:bodyPr>
+          <a:lstStyle/>
+          <a:p>
+            <a:pPr>
+              <a:buNone/>
+            </a:pPr>
+            <a:br>
+              <a:rPr lang="en-IN" b="0">
+                <a:effectLst/>
+              </a:rPr>
+            </a:br>
+            <a:endParaRPr lang="en-IN" b="0">
+              <a:effectLst/>
+            </a:endParaRPr>
+          </a:p>
+          <a:p>
+            <a:pPr rtl="0">
+              <a:buNone/>
+            </a:pPr>
+            <a:r>
+              <a:rPr lang="en-IN" sz="1800" b="1" i="0" u="none" strike="noStrike">
+                <a:solidFill>
+                  <a:srgbClr val="000000"/>
+                </a:solidFill>
+                <a:effectLst/>
+                <a:latin typeface="Arial" panose="020B0604020202020204" pitchFamily="34" charset="0"/>
+              </a:rPr>
+              <a:t>Team Details</a:t>
+            </a:r>
+            <a:endParaRPr lang="en-IN" b="0">
+              <a:effectLst/>
+            </a:endParaRPr>
+          </a:p>
+          <a:p>
+            <a:pPr marL="457200" rtl="0" fontAlgn="base">
+              <a:buFont typeface="+mj-lt"/>
+              <a:buAutoNum type="arabicPeriod"/>
+            </a:pPr>
+            <a:br>
+              <a:rPr lang="en-IN" b="0">
+                <a:effectLst/>
+              </a:rPr>
+            </a:br>
+            <a:endParaRPr lang="en-IN" sz="1800" b="1" i="0" u="none" strike="noStrike">
+              <a:solidFill>
+                <a:srgbClr val="000000"/>
+              </a:solidFill>
+              <a:effectLst/>
+              <a:latin typeface="Arial" panose="020B0604020202020204" pitchFamily="34" charset="0"/>
+            </a:endParaRPr>
+          </a:p>
+          <a:p>
+            <a:pPr marL="457200" rtl="0" fontAlgn="base">
+              <a:buFont typeface="+mj-lt"/>
+              <a:buAutoNum type="arabicPeriod"/>
+            </a:pPr>
+            <a:r>
+              <a:rPr lang="en-IN" sz="1800" b="1" i="0" u="none" strike="noStrike">
+                <a:solidFill>
+                  <a:srgbClr val="000000"/>
+                </a:solidFill>
+                <a:effectLst/>
+                <a:latin typeface="Arial" panose="020B0604020202020204" pitchFamily="34" charset="0"/>
+              </a:rPr>
+              <a:t>Team name: </a:t>
+            </a:r>
+          </a:p>
+          <a:p>
+            <a:pPr marL="457200" rtl="0" fontAlgn="base">
+              <a:buFont typeface="+mj-lt"/>
+              <a:buAutoNum type="arabicPeriod"/>
+            </a:pPr>
+            <a:r>
+              <a:rPr lang="en-IN" sz="1800" b="1" i="0" u="none" strike="noStrike">
+                <a:solidFill>
+                  <a:srgbClr val="000000"/>
+                </a:solidFill>
+                <a:effectLst/>
+                <a:latin typeface="Arial" panose="020B0604020202020204" pitchFamily="34" charset="0"/>
+              </a:rPr>
+              <a:t>Team leader name: </a:t>
+            </a:r>
+          </a:p>
+          <a:p>
+            <a:pPr marL="457200" rtl="0" fontAlgn="base">
+              <a:buFont typeface="+mj-lt"/>
+              <a:buAutoNum type="arabicPeriod"/>
+            </a:pPr>
+            <a:r>
+              <a:rPr lang="en-IN" sz="1800" b="1" i="0" u="none" strike="noStrike">
+                <a:solidFill>
+                  <a:srgbClr val="000000"/>
+                </a:solidFill>
+                <a:effectLst/>
+                <a:latin typeface="Arial" panose="020B0604020202020204" pitchFamily="34" charset="0"/>
+              </a:rPr>
+              <a:t>Problem Statement: </a:t>
+            </a:r>
+          </a:p>
+          <a:p>
+            <a:pPr>
+              <a:buNone/>
+            </a:pPr>
+            <a:br>
+              <a:rPr lang="en-IN" b="0">
+                <a:effectLst/>
+              </a:rPr>
+            </a:br>
+            <a:endParaRPr lang="en-IN"/>
+          </a:p>
+        </p:txBody>
+      </p:sp>
+      <p:pic>
+        <p:nvPicPr>
+          <p:cNvPr id="4" name="Picture 3">
+            <a:extLst>
+              <a:ext uri="{FF2B5EF4-FFF2-40B4-BE49-F238E27FC236}">
+                <a16:creationId xmlns:a16="http://schemas.microsoft.com/office/drawing/2014/main" id="{03454462-88AA-8F6D-E285-889446783D7D}"/>
+              </a:ext>
+            </a:extLst>
+          </p:cNvPr>
+          <p:cNvPicPr>
+            <a:picLocks noChangeAspect="1"/>
+          </p:cNvPicPr>
+          <p:nvPr/>
+        </p:nvPicPr>
+        <p:blipFill>
+          <a:blip r:embed="rId2"/>
+          <a:stretch>
+            <a:fillRect/>
+          </a:stretch>
+        </p:blipFill>
+        <p:spPr>
+          <a:xfrm>
+            <a:off x="0" y="0"/>
+            <a:ext cx="12192000" cy="6858000"/>
+          </a:xfrm>
+          <a:prstGeom prst="rect">
+            <a:avLst/>
+          </a:prstGeom>
+        </p:spPr>
+      </p:pic>
+      <p:sp>
+        <p:nvSpPr>
+          <p:cNvPr id="8" name="TextBox 7">
+            <a:extLst>
+              <a:ext uri="{FF2B5EF4-FFF2-40B4-BE49-F238E27FC236}">
+                <a16:creationId xmlns:a16="http://schemas.microsoft.com/office/drawing/2014/main" id="{0659C207-27C2-00CF-24C9-ECF448DA787A}"/>
+              </a:ext>
+            </a:extLst>
+          </p:cNvPr>
+          <p:cNvSpPr txBox="1"/>
+          <p:nvPr/>
+        </p:nvSpPr>
+        <p:spPr>
+          <a:xfrm>
+            <a:off x="489283" y="4491769"/>
+            <a:ext cx="10996863" cy="2062103"/>
+          </a:xfrm>
+          <a:prstGeom prst="rect">
+            <a:avLst/>
+          </a:prstGeom>
+          <a:noFill/>
+        </p:spPr>
+        <p:txBody>
+          <a:bodyPr wrap="square">
+            <a:spAutoFit/>
+          </a:bodyPr>
+          <a:lstStyle/>
+          <a:p>
+            <a:pPr rtl="0">
+              <a:buNone/>
+            </a:pPr>
+            <a:r>
+              <a:rPr lang="en-IN" sz="1500" b="1" i="0" u="none" strike="noStrike" dirty="0">
+                <a:solidFill>
+                  <a:srgbClr val="000000"/>
+                </a:solidFill>
+                <a:effectLst/>
+                <a:latin typeface="Arial" panose="020B0604020202020204" pitchFamily="34" charset="0"/>
+              </a:rPr>
+              <a:t>Team Details</a:t>
+            </a:r>
+            <a:br>
+              <a:rPr lang="en-IN" b="0" dirty="0">
+                <a:effectLst/>
+              </a:rPr>
+            </a:br>
+            <a:endParaRPr lang="en-IN" sz="1500" b="1" i="0" u="none" strike="noStrike" dirty="0">
+              <a:solidFill>
+                <a:srgbClr val="000000"/>
+              </a:solidFill>
+              <a:effectLst/>
+              <a:latin typeface="Arial" panose="020B0604020202020204" pitchFamily="34" charset="0"/>
+            </a:endParaRPr>
+          </a:p>
+          <a:p>
+            <a:pPr marL="800100" indent="-342900" rtl="0" fontAlgn="base">
+              <a:buFont typeface="+mj-lt"/>
+              <a:buAutoNum type="alphaLcPeriod"/>
+            </a:pPr>
+            <a:r>
+              <a:rPr lang="en-IN" sz="1500" b="1" i="0" u="none" strike="noStrike" dirty="0">
+                <a:solidFill>
+                  <a:srgbClr val="000000"/>
+                </a:solidFill>
+                <a:effectLst/>
+                <a:latin typeface="Arial" panose="020B0604020202020204" pitchFamily="34" charset="0"/>
+              </a:rPr>
+              <a:t>Team name: </a:t>
+            </a:r>
+            <a:r>
+              <a:rPr lang="en-IN" sz="1500" i="0" u="none" strike="noStrike" dirty="0" err="1">
+                <a:solidFill>
+                  <a:srgbClr val="000000"/>
+                </a:solidFill>
+                <a:effectLst/>
+                <a:latin typeface="Arial" panose="020B0604020202020204" pitchFamily="34" charset="0"/>
+              </a:rPr>
+              <a:t>Kali_innov</a:t>
+            </a:r>
+            <a:endParaRPr lang="en-IN" sz="1500" i="0" u="none" strike="noStrike" dirty="0">
+              <a:solidFill>
+                <a:srgbClr val="000000"/>
+              </a:solidFill>
+              <a:effectLst/>
+              <a:latin typeface="Arial" panose="020B0604020202020204" pitchFamily="34" charset="0"/>
+            </a:endParaRPr>
+          </a:p>
+          <a:p>
+            <a:pPr marL="800100" indent="-342900" rtl="0" fontAlgn="base">
+              <a:buFont typeface="+mj-lt"/>
+              <a:buAutoNum type="alphaLcPeriod"/>
+            </a:pPr>
+            <a:r>
+              <a:rPr lang="en-IN" sz="1500" b="1" i="0" u="none" strike="noStrike" dirty="0">
+                <a:solidFill>
+                  <a:srgbClr val="000000"/>
+                </a:solidFill>
+                <a:effectLst/>
+                <a:latin typeface="Arial" panose="020B0604020202020204" pitchFamily="34" charset="0"/>
+              </a:rPr>
+              <a:t>Team leader name: </a:t>
+            </a:r>
+            <a:r>
+              <a:rPr lang="en-IN" sz="1500" dirty="0">
+                <a:solidFill>
+                  <a:srgbClr val="000000"/>
+                </a:solidFill>
+                <a:latin typeface="Arial" panose="020B0604020202020204" pitchFamily="34" charset="0"/>
+              </a:rPr>
+              <a:t>Kalithas G</a:t>
+            </a:r>
+            <a:endParaRPr lang="en-IN" sz="1500" i="0" u="none" strike="noStrike" dirty="0">
+              <a:solidFill>
+                <a:srgbClr val="000000"/>
+              </a:solidFill>
+              <a:effectLst/>
+              <a:latin typeface="Arial" panose="020B0604020202020204" pitchFamily="34" charset="0"/>
+            </a:endParaRPr>
+          </a:p>
+          <a:p>
+            <a:pPr marL="800100" indent="-342900" fontAlgn="base">
+              <a:buFont typeface="+mj-lt"/>
+              <a:buAutoNum type="alphaLcPeriod"/>
+            </a:pPr>
+            <a:r>
+              <a:rPr lang="en-IN" sz="1500" b="1" i="0" u="none" strike="noStrike" dirty="0">
+                <a:solidFill>
+                  <a:srgbClr val="000000"/>
+                </a:solidFill>
+                <a:effectLst/>
+                <a:latin typeface="Arial" panose="020B0604020202020204" pitchFamily="34" charset="0"/>
+              </a:rPr>
+              <a:t>Problem Statement: </a:t>
+            </a:r>
+            <a:r>
+              <a:rPr lang="en-US" sz="1600" dirty="0">
+                <a:solidFill>
+                  <a:srgbClr val="0E201B"/>
+                </a:solidFill>
+                <a:latin typeface="Calibri" pitchFamily="34" charset="0"/>
+                <a:ea typeface="Calibri" pitchFamily="34" charset="-122"/>
+                <a:cs typeface="Calibri" pitchFamily="34" charset="-120"/>
+              </a:rPr>
+              <a:t>Track 2 — Prospect Assist AI: data-driven identification of eligible, repayment-capable, genuinely interested retail-loan prospects from transaction &amp; behavioral insights (Personal · Home · Mortgage/LAP · Auto)</a:t>
+            </a:r>
+            <a:endParaRPr lang="en-IN" sz="1500" b="1" i="0" u="none" strike="noStrike" dirty="0">
+              <a:solidFill>
+                <a:srgbClr val="000000"/>
+              </a:solidFill>
+              <a:effectLst/>
+              <a:latin typeface="Arial" panose="020B0604020202020204" pitchFamily="34" charset="0"/>
+            </a:endParaRPr>
+          </a:p>
+          <a:p>
+            <a:pPr>
+              <a:buNone/>
+            </a:pPr>
+            <a:br>
+              <a:rPr lang="en-IN" b="0" dirty="0">
+                <a:effectLst/>
+              </a:rPr>
+            </a:br>
+            <a:endParaRPr lang="en-IN" dirty="0"/>
+          </a:p>
+        </p:txBody>
+      </p:sp>
+    </p:spTree>
+    <p:extLst>
+      <p:ext uri="{BB962C8B-B14F-4D97-AF65-F5344CB8AC3E}">
+        <p14:creationId xmlns:p14="http://schemas.microsoft.com/office/powerpoint/2010/main" val="2191417399"/>
+      </p:ext>
+    </p:extLst>
+  </p:cSld>
+  <p:clrMapOvr>
+    <a:masterClrMapping/>
+  </p:clrMapOvr>
+</p:sld>
+</file>
+
+<file path=ppt/slides/slide10.xml><?xml version="1.0" encoding="utf-8"?>
+<p:sld xmlns:a="http://schemas.openxmlformats.org/drawingml/2006/main" xmlns:r="http://schemas.openxmlformats.org/officeDocument/2006/relationships" xmlns:p="http://schemas.openxmlformats.org/presentationml/2006/main">
+  <p:cSld name="Slide 9">
+    <p:spTree>
+      <p:nvGrpSpPr>
+        <p:cNvPr id="1" name=""/>
+        <p:cNvGrpSpPr/>
+        <p:nvPr/>
+      </p:nvGrpSpPr>
+      <p:grpSpPr>
+        <a:xfrm>
+          <a:off x="0" y="0"/>
+          <a:ext cx="0" cy="0"/>
+          <a:chOff x="0" y="0"/>
+          <a:chExt cx="0" cy="0"/>
+        </a:xfrm>
+      </p:grpSpPr>
+      <p:sp>
+        <p:nvSpPr>
           <p:cNvPr id="2" name="Text 0"/>
           <p:cNvSpPr/>
           <p:nvPr/>
         </p:nvSpPr>
         <p:spPr>
           <a:xfrm>
-            <a:off x="502920" y="960120"/>
-            <a:ext cx="11155680" cy="868680"/>
+            <a:off x="502920" y="347472"/>
+            <a:ext cx="1417320" cy="292608"/>
+          </a:xfrm>
+          <a:prstGeom prst="roundRect">
+            <a:avLst>
+              <a:gd name="adj" fmla="val 50000"/>
+            </a:avLst>
+          </a:prstGeom>
+          <a:solidFill>
+            <a:srgbClr val="00584C"/>
+          </a:solidFill>
+          <a:ln/>
+        </p:spPr>
+        <p:txBody>
+          <a:bodyPr wrap="square" lIns="0" tIns="0" rIns="0" bIns="0" rtlCol="0" anchor="ctr"/>
+          <a:lstStyle/>
+          <a:p>
+            <a:pPr marL="0" indent="0" algn="ctr">
+              <a:buNone/>
+            </a:pPr>
+            <a:r>
+              <a:rPr lang="en-US" sz="1100" b="1" dirty="0">
+                <a:solidFill>
+                  <a:srgbClr val="FFFFFF"/>
+                </a:solidFill>
+                <a:latin typeface="Calibri" pitchFamily="34" charset="0"/>
+                <a:ea typeface="Calibri" pitchFamily="34" charset="-122"/>
+                <a:cs typeface="Calibri" pitchFamily="34" charset="-120"/>
+              </a:rPr>
+              <a:t>09 · COST</a:t>
+            </a:r>
+            <a:endParaRPr lang="en-US" sz="1100" dirty="0"/>
+          </a:p>
+        </p:txBody>
+      </p:sp>
+      <p:sp>
+        <p:nvSpPr>
+          <p:cNvPr id="3" name="Text 1"/>
+          <p:cNvSpPr/>
+          <p:nvPr/>
+        </p:nvSpPr>
+        <p:spPr>
+          <a:xfrm>
+            <a:off x="502920" y="713232"/>
+            <a:ext cx="11183112" cy="566928"/>
           </a:xfrm>
           <a:prstGeom prst="rect">
             <a:avLst/>
@@ -2245,34 +2380,68 @@
           <a:bodyPr wrap="square" lIns="0" tIns="0" rIns="0" bIns="0" rtlCol="0" anchor="ctr"/>
           <a:lstStyle/>
           <a:p>
-            <a:pPr indent="0" marL="0">
-              <a:buNone/>
-            </a:pPr>
-            <a:r>
-              <a:rPr lang="en-US" sz="4800" b="1" dirty="0">
-                <a:solidFill>
-                  <a:srgbClr val="FFFFFF"/>
+            <a:pPr marL="0" indent="0">
+              <a:buNone/>
+            </a:pPr>
+            <a:r>
+              <a:rPr lang="en-US" sz="2800" b="1" dirty="0">
+                <a:solidFill>
+                  <a:srgbClr val="0E201B"/>
                 </a:solidFill>
                 <a:latin typeface="Arial" pitchFamily="34" charset="0"/>
                 <a:ea typeface="Arial" pitchFamily="34" charset="-122"/>
                 <a:cs typeface="Arial" pitchFamily="34" charset="-120"/>
               </a:rPr>
-              <a:t>Prospect Assist AI</a:t>
-            </a:r>
-            <a:endParaRPr lang="en-US" sz="4800" dirty="0"/>
-          </a:p>
-        </p:txBody>
-      </p:sp>
-      <p:sp>
-        <p:nvSpPr>
-          <p:cNvPr id="3" name="Text 1"/>
-          <p:cNvSpPr/>
-          <p:nvPr/>
-        </p:nvSpPr>
-        <p:spPr>
-          <a:xfrm>
-            <a:off x="502920" y="1828800"/>
-            <a:ext cx="10424160" cy="411480"/>
+              <a:t>Estimated implementation cost (indicative)</a:t>
+            </a:r>
+            <a:endParaRPr lang="en-US" sz="2800" dirty="0"/>
+          </a:p>
+        </p:txBody>
+      </p:sp>
+      <p:sp>
+        <p:nvSpPr>
+          <p:cNvPr id="4" name="Shape 2"/>
+          <p:cNvSpPr/>
+          <p:nvPr/>
+        </p:nvSpPr>
+        <p:spPr>
+          <a:xfrm>
+            <a:off x="502920" y="1600200"/>
+            <a:ext cx="11183112" cy="1389888"/>
+          </a:xfrm>
+          <a:prstGeom prst="roundRect">
+            <a:avLst>
+              <a:gd name="adj" fmla="val 5921"/>
+            </a:avLst>
+          </a:prstGeom>
+          <a:solidFill>
+            <a:srgbClr val="EAF4F1"/>
+          </a:solidFill>
+          <a:ln w="12700">
+            <a:solidFill>
+              <a:srgbClr val="EAF4F1"/>
+            </a:solidFill>
+            <a:prstDash val="solid"/>
+          </a:ln>
+        </p:spPr>
+        <p:txBody>
+          <a:bodyPr/>
+          <a:lstStyle/>
+          <a:p>
+            <a:endParaRPr lang="en-IN"/>
+          </a:p>
+        </p:txBody>
+      </p:sp>
+      <p:sp>
+        <p:nvSpPr>
+          <p:cNvPr id="5" name="Text 3"/>
+          <p:cNvSpPr/>
+          <p:nvPr/>
+        </p:nvSpPr>
+        <p:spPr>
+          <a:xfrm>
+            <a:off x="777240" y="1746504"/>
+            <a:ext cx="3291840" cy="365760"/>
           </a:xfrm>
           <a:prstGeom prst="rect">
             <a:avLst/>
@@ -2284,34 +2453,149 @@
           <a:bodyPr wrap="square" lIns="0" tIns="0" rIns="0" bIns="0" rtlCol="0" anchor="ctr"/>
           <a:lstStyle/>
           <a:p>
-            <a:pPr indent="0" marL="0">
-              <a:buNone/>
-            </a:pPr>
-            <a:r>
-              <a:rPr lang="en-US" sz="1700" dirty="0">
-                <a:solidFill>
-                  <a:srgbClr val="CDE8E0"/>
+            <a:pPr marL="0" indent="0">
+              <a:buNone/>
+            </a:pPr>
+            <a:r>
+              <a:rPr lang="en-US" sz="1400" b="1" dirty="0">
+                <a:solidFill>
+                  <a:srgbClr val="0E201B"/>
+                </a:solidFill>
+                <a:latin typeface="Arial" pitchFamily="34" charset="0"/>
+                <a:ea typeface="Arial" pitchFamily="34" charset="-122"/>
+                <a:cs typeface="Arial" pitchFamily="34" charset="-120"/>
+              </a:rPr>
+              <a:t>Phase 1 — Prototype</a:t>
+            </a:r>
+            <a:endParaRPr lang="en-US" sz="1400" dirty="0"/>
+          </a:p>
+        </p:txBody>
+      </p:sp>
+      <p:sp>
+        <p:nvSpPr>
+          <p:cNvPr id="6" name="Text 4"/>
+          <p:cNvSpPr/>
+          <p:nvPr/>
+        </p:nvSpPr>
+        <p:spPr>
+          <a:xfrm>
+            <a:off x="777240" y="2148840"/>
+            <a:ext cx="3291840" cy="502920"/>
+          </a:xfrm>
+          <a:prstGeom prst="rect">
+            <a:avLst/>
+          </a:prstGeom>
+          <a:noFill/>
+          <a:ln/>
+        </p:spPr>
+        <p:txBody>
+          <a:bodyPr wrap="square" lIns="0" tIns="0" rIns="0" bIns="0" rtlCol="0" anchor="ctr"/>
+          <a:lstStyle/>
+          <a:p>
+            <a:pPr marL="0" indent="0">
+              <a:buNone/>
+            </a:pPr>
+            <a:r>
+              <a:rPr lang="en-US" sz="1900" b="1" dirty="0">
+                <a:solidFill>
+                  <a:srgbClr val="00584C"/>
+                </a:solidFill>
+                <a:latin typeface="Arial" pitchFamily="34" charset="0"/>
+                <a:ea typeface="Arial" pitchFamily="34" charset="-122"/>
+                <a:cs typeface="Arial" pitchFamily="34" charset="-120"/>
+              </a:rPr>
+              <a:t>₹0 infrastructure</a:t>
+            </a:r>
+            <a:endParaRPr lang="en-US" sz="1900" dirty="0"/>
+          </a:p>
+        </p:txBody>
+      </p:sp>
+      <p:sp>
+        <p:nvSpPr>
+          <p:cNvPr id="7" name="Text 5"/>
+          <p:cNvSpPr/>
+          <p:nvPr/>
+        </p:nvSpPr>
+        <p:spPr>
+          <a:xfrm>
+            <a:off x="4343400" y="1746504"/>
+            <a:ext cx="7223760" cy="1097280"/>
+          </a:xfrm>
+          <a:prstGeom prst="rect">
+            <a:avLst/>
+          </a:prstGeom>
+          <a:noFill/>
+          <a:ln/>
+        </p:spPr>
+        <p:txBody>
+          <a:bodyPr wrap="square" lIns="0" tIns="0" rIns="0" bIns="0" rtlCol="0" anchor="ctr"/>
+          <a:lstStyle/>
+          <a:p>
+            <a:pPr marL="0" indent="0">
+              <a:lnSpc>
+                <a:spcPct val="108000"/>
+              </a:lnSpc>
+              <a:buNone/>
+            </a:pPr>
+            <a:r>
+              <a:rPr lang="en-US" sz="1200" dirty="0">
+                <a:solidFill>
+                  <a:srgbClr val="55645F"/>
                 </a:solidFill>
                 <a:latin typeface="Calibri" pitchFamily="34" charset="0"/>
                 <a:ea typeface="Calibri" pitchFamily="34" charset="-122"/>
                 <a:cs typeface="Calibri" pitchFamily="34" charset="-120"/>
               </a:rPr>
-              <a:t>Behavior-driven lead generation &amp; underwriting support for IDBI retail lending</a:t>
-            </a:r>
-            <a:endParaRPr lang="en-US" sz="1700" dirty="0"/>
-          </a:p>
-        </p:txBody>
-      </p:sp>
-      <p:sp>
-        <p:nvSpPr>
-          <p:cNvPr id="4" name="Text 2"/>
-          <p:cNvSpPr/>
-          <p:nvPr/>
-        </p:nvSpPr>
-        <p:spPr>
-          <a:xfrm>
-            <a:off x="502920" y="2249424"/>
-            <a:ext cx="10424160" cy="365760"/>
+              <a:t>Runs locally against the synthetic sandbox; no cloud spend, no licensed data. Already built.</a:t>
+            </a:r>
+            <a:endParaRPr lang="en-US" sz="1200" dirty="0"/>
+          </a:p>
+        </p:txBody>
+      </p:sp>
+      <p:sp>
+        <p:nvSpPr>
+          <p:cNvPr id="8" name="Shape 6"/>
+          <p:cNvSpPr/>
+          <p:nvPr/>
+        </p:nvSpPr>
+        <p:spPr>
+          <a:xfrm>
+            <a:off x="502920" y="3136392"/>
+            <a:ext cx="11183112" cy="1389888"/>
+          </a:xfrm>
+          <a:prstGeom prst="roundRect">
+            <a:avLst>
+              <a:gd name="adj" fmla="val 5921"/>
+            </a:avLst>
+          </a:prstGeom>
+          <a:solidFill>
+            <a:srgbClr val="EAF4F1"/>
+          </a:solidFill>
+          <a:ln w="12700">
+            <a:solidFill>
+              <a:srgbClr val="EAF4F1"/>
+            </a:solidFill>
+            <a:prstDash val="solid"/>
+          </a:ln>
+        </p:spPr>
+        <p:txBody>
+          <a:bodyPr/>
+          <a:lstStyle/>
+          <a:p>
+            <a:endParaRPr lang="en-IN"/>
+          </a:p>
+        </p:txBody>
+      </p:sp>
+      <p:sp>
+        <p:nvSpPr>
+          <p:cNvPr id="9" name="Text 7"/>
+          <p:cNvSpPr/>
+          <p:nvPr/>
+        </p:nvSpPr>
+        <p:spPr>
+          <a:xfrm>
+            <a:off x="777240" y="3282696"/>
+            <a:ext cx="3291840" cy="365760"/>
           </a:xfrm>
           <a:prstGeom prst="rect">
             <a:avLst/>
@@ -2323,61 +2607,149 @@
           <a:bodyPr wrap="square" lIns="0" tIns="0" rIns="0" bIns="0" rtlCol="0" anchor="ctr"/>
           <a:lstStyle/>
           <a:p>
-            <a:pPr indent="0" marL="0">
-              <a:buNone/>
-            </a:pPr>
-            <a:r>
-              <a:rPr lang="en-US" sz="1300" i="1" dirty="0">
-                <a:solidFill>
-                  <a:srgbClr val="9EC9BE"/>
+            <a:pPr marL="0" indent="0">
+              <a:buNone/>
+            </a:pPr>
+            <a:r>
+              <a:rPr lang="en-US" sz="1400" b="1" dirty="0">
+                <a:solidFill>
+                  <a:srgbClr val="0E201B"/>
+                </a:solidFill>
+                <a:latin typeface="Arial" pitchFamily="34" charset="0"/>
+                <a:ea typeface="Arial" pitchFamily="34" charset="-122"/>
+                <a:cs typeface="Arial" pitchFamily="34" charset="-120"/>
+              </a:rPr>
+              <a:t>Phase 2 — Bank-sandbox pilot</a:t>
+            </a:r>
+            <a:endParaRPr lang="en-US" sz="1400" dirty="0"/>
+          </a:p>
+        </p:txBody>
+      </p:sp>
+      <p:sp>
+        <p:nvSpPr>
+          <p:cNvPr id="10" name="Text 8"/>
+          <p:cNvSpPr/>
+          <p:nvPr/>
+        </p:nvSpPr>
+        <p:spPr>
+          <a:xfrm>
+            <a:off x="777240" y="3685032"/>
+            <a:ext cx="3291840" cy="502920"/>
+          </a:xfrm>
+          <a:prstGeom prst="rect">
+            <a:avLst/>
+          </a:prstGeom>
+          <a:noFill/>
+          <a:ln/>
+        </p:spPr>
+        <p:txBody>
+          <a:bodyPr wrap="square" lIns="0" tIns="0" rIns="0" bIns="0" rtlCol="0" anchor="ctr"/>
+          <a:lstStyle/>
+          <a:p>
+            <a:pPr marL="0" indent="0">
+              <a:buNone/>
+            </a:pPr>
+            <a:r>
+              <a:rPr lang="en-US" sz="1900" b="1" dirty="0">
+                <a:solidFill>
+                  <a:srgbClr val="C77700"/>
+                </a:solidFill>
+                <a:latin typeface="Arial" pitchFamily="34" charset="0"/>
+                <a:ea typeface="Arial" pitchFamily="34" charset="-122"/>
+                <a:cs typeface="Arial" pitchFamily="34" charset="-120"/>
+              </a:rPr>
+              <a:t>≈ ₹40k–60k / month</a:t>
+            </a:r>
+            <a:endParaRPr lang="en-US" sz="1900" dirty="0"/>
+          </a:p>
+        </p:txBody>
+      </p:sp>
+      <p:sp>
+        <p:nvSpPr>
+          <p:cNvPr id="11" name="Text 9"/>
+          <p:cNvSpPr/>
+          <p:nvPr/>
+        </p:nvSpPr>
+        <p:spPr>
+          <a:xfrm>
+            <a:off x="4343400" y="3282696"/>
+            <a:ext cx="7223760" cy="1097280"/>
+          </a:xfrm>
+          <a:prstGeom prst="rect">
+            <a:avLst/>
+          </a:prstGeom>
+          <a:noFill/>
+          <a:ln/>
+        </p:spPr>
+        <p:txBody>
+          <a:bodyPr wrap="square" lIns="0" tIns="0" rIns="0" bIns="0" rtlCol="0" anchor="ctr"/>
+          <a:lstStyle/>
+          <a:p>
+            <a:pPr marL="0" indent="0">
+              <a:lnSpc>
+                <a:spcPct val="108000"/>
+              </a:lnSpc>
+              <a:buNone/>
+            </a:pPr>
+            <a:r>
+              <a:rPr lang="en-US" sz="1200" dirty="0">
+                <a:solidFill>
+                  <a:srgbClr val="55645F"/>
                 </a:solidFill>
                 <a:latin typeface="Calibri" pitchFamily="34" charset="0"/>
                 <a:ea typeface="Calibri" pitchFamily="34" charset="-122"/>
                 <a:cs typeface="Calibri" pitchFamily="34" charset="-120"/>
               </a:rPr>
-              <a:t>IDBI Innovate 2026 · Track 2 · Prototype Submission</a:t>
-            </a:r>
-            <a:endParaRPr lang="en-US" sz="1300" dirty="0"/>
-          </a:p>
-        </p:txBody>
-      </p:sp>
-      <p:sp>
-        <p:nvSpPr>
-          <p:cNvPr id="5" name="Shape 3"/>
-          <p:cNvSpPr/>
-          <p:nvPr/>
-        </p:nvSpPr>
-        <p:spPr>
-          <a:xfrm>
-            <a:off x="502920" y="3017520"/>
-            <a:ext cx="11183112" cy="2926080"/>
+              <a:t>Containerized API + dashboard on AWS (ECS/Fargate, RDS PostgreSQL, ElastiCache, monitoring); IDBI sandbox data via connector swap.</a:t>
+            </a:r>
+            <a:endParaRPr lang="en-US" sz="1200" dirty="0"/>
+          </a:p>
+        </p:txBody>
+      </p:sp>
+      <p:sp>
+        <p:nvSpPr>
+          <p:cNvPr id="12" name="Shape 10"/>
+          <p:cNvSpPr/>
+          <p:nvPr/>
+        </p:nvSpPr>
+        <p:spPr>
+          <a:xfrm>
+            <a:off x="502920" y="4672584"/>
+            <a:ext cx="11183112" cy="1389888"/>
           </a:xfrm>
           <a:prstGeom prst="roundRect">
             <a:avLst>
-              <a:gd name="adj" fmla="val 2813"/>
+              <a:gd name="adj" fmla="val 5921"/>
             </a:avLst>
           </a:prstGeom>
           <a:solidFill>
-            <a:srgbClr val="FFFFFF"/>
+            <a:srgbClr val="EAF4F1"/>
           </a:solidFill>
           <a:ln w="12700">
             <a:solidFill>
-              <a:srgbClr val="FFFFFF"/>
+              <a:srgbClr val="EAF4F1"/>
             </a:solidFill>
             <a:prstDash val="solid"/>
           </a:ln>
         </p:spPr>
-      </p:sp>
-      <p:sp>
-        <p:nvSpPr>
-          <p:cNvPr id="6" name="Text 4"/>
-          <p:cNvSpPr/>
-          <p:nvPr/>
-        </p:nvSpPr>
-        <p:spPr>
-          <a:xfrm>
-            <a:off x="868680" y="3246120"/>
-            <a:ext cx="5486400" cy="365760"/>
+        <p:txBody>
+          <a:bodyPr/>
+          <a:lstStyle/>
+          <a:p>
+            <a:endParaRPr lang="en-IN"/>
+          </a:p>
+        </p:txBody>
+      </p:sp>
+      <p:sp>
+        <p:nvSpPr>
+          <p:cNvPr id="13" name="Text 11"/>
+          <p:cNvSpPr/>
+          <p:nvPr/>
+        </p:nvSpPr>
+        <p:spPr>
+          <a:xfrm>
+            <a:off x="777240" y="4818888"/>
+            <a:ext cx="3291840" cy="365760"/>
           </a:xfrm>
           <a:prstGeom prst="rect">
             <a:avLst/>
@@ -2389,11 +2761,11 @@
           <a:bodyPr wrap="square" lIns="0" tIns="0" rIns="0" bIns="0" rtlCol="0" anchor="ctr"/>
           <a:lstStyle/>
           <a:p>
-            <a:pPr indent="0" marL="0">
-              <a:buNone/>
-            </a:pPr>
-            <a:r>
-              <a:rPr lang="en-US" sz="1600" b="1" dirty="0">
+            <a:pPr marL="0" indent="0">
+              <a:buNone/>
+            </a:pPr>
+            <a:r>
+              <a:rPr lang="en-US" sz="1400" b="1" dirty="0">
                 <a:solidFill>
                   <a:srgbClr val="0E201B"/>
                 </a:solidFill>
@@ -2401,22 +2773,22 @@
                 <a:ea typeface="Arial" pitchFamily="34" charset="-122"/>
                 <a:cs typeface="Arial" pitchFamily="34" charset="-120"/>
               </a:rPr>
-              <a:t>Team Details</a:t>
-            </a:r>
-            <a:endParaRPr lang="en-US" sz="1600" dirty="0"/>
-          </a:p>
-        </p:txBody>
-      </p:sp>
-      <p:sp>
-        <p:nvSpPr>
-          <p:cNvPr id="7" name="Text 5"/>
-          <p:cNvSpPr/>
-          <p:nvPr/>
-        </p:nvSpPr>
-        <p:spPr>
-          <a:xfrm>
-            <a:off x="868680" y="3703320"/>
-            <a:ext cx="2651760" cy="685800"/>
+              <a:t>Phase 3 — Production</a:t>
+            </a:r>
+            <a:endParaRPr lang="en-US" sz="1400" dirty="0"/>
+          </a:p>
+        </p:txBody>
+      </p:sp>
+      <p:sp>
+        <p:nvSpPr>
+          <p:cNvPr id="14" name="Text 12"/>
+          <p:cNvSpPr/>
+          <p:nvPr/>
+        </p:nvSpPr>
+        <p:spPr>
+          <a:xfrm>
+            <a:off x="777240" y="5221224"/>
+            <a:ext cx="3291840" cy="502920"/>
           </a:xfrm>
           <a:prstGeom prst="rect">
             <a:avLst/>
@@ -2425,37 +2797,79 @@
           <a:ln/>
         </p:spPr>
         <p:txBody>
-          <a:bodyPr wrap="square" lIns="0" tIns="0" rIns="0" bIns="0" rtlCol="0" anchor="t"/>
-          <a:lstStyle/>
-          <a:p>
-            <a:pPr indent="0" marL="0">
-              <a:buNone/>
-            </a:pPr>
-            <a:r>
-              <a:rPr lang="en-US" sz="1350" b="1" dirty="0">
-                <a:solidFill>
-                  <a:srgbClr val="00584C"/>
+          <a:bodyPr wrap="square" lIns="0" tIns="0" rIns="0" bIns="0" rtlCol="0" anchor="ctr"/>
+          <a:lstStyle/>
+          <a:p>
+            <a:pPr marL="0" indent="0">
+              <a:buNone/>
+            </a:pPr>
+            <a:r>
+              <a:rPr lang="en-US" sz="1900" b="1" dirty="0">
+                <a:solidFill>
+                  <a:srgbClr val="2E7D6B"/>
+                </a:solidFill>
+                <a:latin typeface="Arial" pitchFamily="34" charset="0"/>
+                <a:ea typeface="Arial" pitchFamily="34" charset="-122"/>
+                <a:cs typeface="Arial" pitchFamily="34" charset="-120"/>
+              </a:rPr>
+              <a:t>Usage-based</a:t>
+            </a:r>
+            <a:endParaRPr lang="en-US" sz="1900" dirty="0"/>
+          </a:p>
+        </p:txBody>
+      </p:sp>
+      <p:sp>
+        <p:nvSpPr>
+          <p:cNvPr id="15" name="Text 13"/>
+          <p:cNvSpPr/>
+          <p:nvPr/>
+        </p:nvSpPr>
+        <p:spPr>
+          <a:xfrm>
+            <a:off x="4343400" y="4818888"/>
+            <a:ext cx="7223760" cy="1097280"/>
+          </a:xfrm>
+          <a:prstGeom prst="rect">
+            <a:avLst/>
+          </a:prstGeom>
+          <a:noFill/>
+          <a:ln/>
+        </p:spPr>
+        <p:txBody>
+          <a:bodyPr wrap="square" lIns="0" tIns="0" rIns="0" bIns="0" rtlCol="0" anchor="ctr"/>
+          <a:lstStyle/>
+          <a:p>
+            <a:pPr marL="0" indent="0">
+              <a:lnSpc>
+                <a:spcPct val="108000"/>
+              </a:lnSpc>
+              <a:buNone/>
+            </a:pPr>
+            <a:r>
+              <a:rPr lang="en-US" sz="1200" dirty="0">
+                <a:solidFill>
+                  <a:srgbClr val="55645F"/>
                 </a:solidFill>
                 <a:latin typeface="Calibri" pitchFamily="34" charset="0"/>
                 <a:ea typeface="Calibri" pitchFamily="34" charset="-122"/>
                 <a:cs typeface="Calibri" pitchFamily="34" charset="-120"/>
               </a:rPr>
-              <a:t>a.  Team name</a:t>
-            </a:r>
-            <a:endParaRPr lang="en-US" sz="1350" dirty="0"/>
-          </a:p>
-        </p:txBody>
-      </p:sp>
-      <p:sp>
-        <p:nvSpPr>
-          <p:cNvPr id="8" name="Text 6"/>
-          <p:cNvSpPr/>
-          <p:nvPr/>
-        </p:nvSpPr>
-        <p:spPr>
-          <a:xfrm>
-            <a:off x="3657600" y="3703320"/>
-            <a:ext cx="7680960" cy="685800"/>
+              <a:t>Scales with scored-prospect volume; main drivers are model serving, AA/GST/bureau API calls and data retention. Detailed TCO after pilot benchmarking.</a:t>
+            </a:r>
+            <a:endParaRPr lang="en-US" sz="1200" dirty="0"/>
+          </a:p>
+        </p:txBody>
+      </p:sp>
+      <p:sp>
+        <p:nvSpPr>
+          <p:cNvPr id="16" name="Text 14"/>
+          <p:cNvSpPr/>
+          <p:nvPr/>
+        </p:nvSpPr>
+        <p:spPr>
+          <a:xfrm>
+            <a:off x="502920" y="6263640"/>
+            <a:ext cx="11155680" cy="274320"/>
           </a:xfrm>
           <a:prstGeom prst="rect">
             <a:avLst/>
@@ -2464,40 +2878,37 @@
           <a:ln/>
         </p:spPr>
         <p:txBody>
-          <a:bodyPr wrap="square" lIns="0" tIns="0" rIns="0" bIns="0" rtlCol="0" anchor="t"/>
-          <a:lstStyle/>
-          <a:p>
-            <a:pPr indent="0" marL="0">
-              <a:lnSpc>
-                <a:spcPct val="105000"/>
-              </a:lnSpc>
-              <a:buNone/>
-            </a:pPr>
-            <a:r>
-              <a:rPr lang="en-US" sz="1250" dirty="0">
-                <a:solidFill>
-                  <a:srgbClr val="0E201B"/>
+          <a:bodyPr wrap="square" lIns="0" tIns="0" rIns="0" bIns="0" rtlCol="0" anchor="ctr"/>
+          <a:lstStyle/>
+          <a:p>
+            <a:pPr marL="0" indent="0">
+              <a:buNone/>
+            </a:pPr>
+            <a:r>
+              <a:rPr lang="en-US" sz="1050" i="1" dirty="0">
+                <a:solidFill>
+                  <a:srgbClr val="55645F"/>
                 </a:solidFill>
                 <a:latin typeface="Calibri" pitchFamily="34" charset="0"/>
                 <a:ea typeface="Calibri" pitchFamily="34" charset="-122"/>
                 <a:cs typeface="Calibri" pitchFamily="34" charset="-120"/>
               </a:rPr>
-              <a:t>____________________________</a:t>
-            </a:r>
-            <a:endParaRPr lang="en-US" sz="1250" dirty="0"/>
-          </a:p>
-        </p:txBody>
-      </p:sp>
-      <p:sp>
-        <p:nvSpPr>
-          <p:cNvPr id="9" name="Text 7"/>
-          <p:cNvSpPr/>
-          <p:nvPr/>
-        </p:nvSpPr>
-        <p:spPr>
-          <a:xfrm>
-            <a:off x="868680" y="4416552"/>
-            <a:ext cx="2651760" cy="685800"/>
+              <a:t>Figures are indicative estimates for planning only; the prototype's data-source seam keeps re-platforming cost near zero between phases.</a:t>
+            </a:r>
+            <a:endParaRPr lang="en-US" sz="1050" dirty="0"/>
+          </a:p>
+        </p:txBody>
+      </p:sp>
+      <p:sp>
+        <p:nvSpPr>
+          <p:cNvPr id="17" name="Text 15"/>
+          <p:cNvSpPr/>
+          <p:nvPr/>
+        </p:nvSpPr>
+        <p:spPr>
+          <a:xfrm>
+            <a:off x="502920" y="6473952"/>
+            <a:ext cx="5486400" cy="274320"/>
           </a:xfrm>
           <a:prstGeom prst="rect">
             <a:avLst/>
@@ -2506,147 +2917,24 @@
           <a:ln/>
         </p:spPr>
         <p:txBody>
-          <a:bodyPr wrap="square" lIns="0" tIns="0" rIns="0" bIns="0" rtlCol="0" anchor="t"/>
-          <a:lstStyle/>
-          <a:p>
-            <a:pPr indent="0" marL="0">
-              <a:buNone/>
-            </a:pPr>
-            <a:r>
-              <a:rPr lang="en-US" sz="1350" b="1" dirty="0">
-                <a:solidFill>
-                  <a:srgbClr val="00584C"/>
+          <a:bodyPr wrap="square" lIns="0" tIns="0" rIns="0" bIns="0" rtlCol="0" anchor="ctr"/>
+          <a:lstStyle/>
+          <a:p>
+            <a:pPr marL="0" indent="0">
+              <a:buNone/>
+            </a:pPr>
+            <a:r>
+              <a:rPr lang="en-US" sz="900" dirty="0">
+                <a:solidFill>
+                  <a:srgbClr val="55645F"/>
                 </a:solidFill>
                 <a:latin typeface="Calibri" pitchFamily="34" charset="0"/>
                 <a:ea typeface="Calibri" pitchFamily="34" charset="-122"/>
                 <a:cs typeface="Calibri" pitchFamily="34" charset="-120"/>
               </a:rPr>
-              <a:t>b.  Team leader name</a:t>
-            </a:r>
-            <a:endParaRPr lang="en-US" sz="1350" dirty="0"/>
-          </a:p>
-        </p:txBody>
-      </p:sp>
-      <p:sp>
-        <p:nvSpPr>
-          <p:cNvPr id="10" name="Text 8"/>
-          <p:cNvSpPr/>
-          <p:nvPr/>
-        </p:nvSpPr>
-        <p:spPr>
-          <a:xfrm>
-            <a:off x="3657600" y="4416552"/>
-            <a:ext cx="7680960" cy="685800"/>
-          </a:xfrm>
-          <a:prstGeom prst="rect">
-            <a:avLst/>
-          </a:prstGeom>
-          <a:noFill/>
-          <a:ln/>
-        </p:spPr>
-        <p:txBody>
-          <a:bodyPr wrap="square" lIns="0" tIns="0" rIns="0" bIns="0" rtlCol="0" anchor="t"/>
-          <a:lstStyle/>
-          <a:p>
-            <a:pPr indent="0" marL="0">
-              <a:lnSpc>
-                <a:spcPct val="105000"/>
-              </a:lnSpc>
-              <a:buNone/>
-            </a:pPr>
-            <a:r>
-              <a:rPr lang="en-US" sz="1250" dirty="0">
-                <a:solidFill>
-                  <a:srgbClr val="0E201B"/>
-                </a:solidFill>
-                <a:latin typeface="Calibri" pitchFamily="34" charset="0"/>
-                <a:ea typeface="Calibri" pitchFamily="34" charset="-122"/>
-                <a:cs typeface="Calibri" pitchFamily="34" charset="-120"/>
-              </a:rPr>
-              <a:t>____________________________</a:t>
-            </a:r>
-            <a:endParaRPr lang="en-US" sz="1250" dirty="0"/>
-          </a:p>
-        </p:txBody>
-      </p:sp>
-      <p:sp>
-        <p:nvSpPr>
-          <p:cNvPr id="11" name="Text 9"/>
-          <p:cNvSpPr/>
-          <p:nvPr/>
-        </p:nvSpPr>
-        <p:spPr>
-          <a:xfrm>
-            <a:off x="868680" y="5129784"/>
-            <a:ext cx="2651760" cy="685800"/>
-          </a:xfrm>
-          <a:prstGeom prst="rect">
-            <a:avLst/>
-          </a:prstGeom>
-          <a:noFill/>
-          <a:ln/>
-        </p:spPr>
-        <p:txBody>
-          <a:bodyPr wrap="square" lIns="0" tIns="0" rIns="0" bIns="0" rtlCol="0" anchor="t"/>
-          <a:lstStyle/>
-          <a:p>
-            <a:pPr indent="0" marL="0">
-              <a:buNone/>
-            </a:pPr>
-            <a:r>
-              <a:rPr lang="en-US" sz="1350" b="1" dirty="0">
-                <a:solidFill>
-                  <a:srgbClr val="00584C"/>
-                </a:solidFill>
-                <a:latin typeface="Calibri" pitchFamily="34" charset="0"/>
-                <a:ea typeface="Calibri" pitchFamily="34" charset="-122"/>
-                <a:cs typeface="Calibri" pitchFamily="34" charset="-120"/>
-              </a:rPr>
-              <a:t>c.  Problem statement</a:t>
-            </a:r>
-            <a:endParaRPr lang="en-US" sz="1350" dirty="0"/>
-          </a:p>
-        </p:txBody>
-      </p:sp>
-      <p:sp>
-        <p:nvSpPr>
-          <p:cNvPr id="12" name="Text 10"/>
-          <p:cNvSpPr/>
-          <p:nvPr/>
-        </p:nvSpPr>
-        <p:spPr>
-          <a:xfrm>
-            <a:off x="3657600" y="5129784"/>
-            <a:ext cx="7680960" cy="685800"/>
-          </a:xfrm>
-          <a:prstGeom prst="rect">
-            <a:avLst/>
-          </a:prstGeom>
-          <a:noFill/>
-          <a:ln/>
-        </p:spPr>
-        <p:txBody>
-          <a:bodyPr wrap="square" lIns="0" tIns="0" rIns="0" bIns="0" rtlCol="0" anchor="t"/>
-          <a:lstStyle/>
-          <a:p>
-            <a:pPr indent="0" marL="0">
-              <a:lnSpc>
-                <a:spcPct val="105000"/>
-              </a:lnSpc>
-              <a:buNone/>
-            </a:pPr>
-            <a:r>
-              <a:rPr lang="en-US" sz="1250" dirty="0">
-                <a:solidFill>
-                  <a:srgbClr val="0E201B"/>
-                </a:solidFill>
-                <a:latin typeface="Calibri" pitchFamily="34" charset="0"/>
-                <a:ea typeface="Calibri" pitchFamily="34" charset="-122"/>
-                <a:cs typeface="Calibri" pitchFamily="34" charset="-120"/>
-              </a:rPr>
-              <a:t>Track 2 — Prospect Assist AI: data-driven identification of eligible, repayment-capable, genuinely interested retail-loan prospects from transaction &amp; behavioral insights (Personal · Home · Mortgage/LAP · Auto)</a:t>
-            </a:r>
-            <a:endParaRPr lang="en-US" sz="1250" dirty="0"/>
+              <a:t>Prospect Assist AI · IDBI Innovate 2026 · Track 2</a:t>
+            </a:r>
+            <a:endParaRPr lang="en-US" sz="900" dirty="0"/>
           </a:p>
         </p:txBody>
       </p:sp>
@@ -2658,7 +2946,7 @@
 </p:sld>
 </file>
 
-<file path=ppt/slides/slide10.xml><?xml version="1.0" encoding="utf-8"?>
+<file path=ppt/slides/slide11.xml><?xml version="1.0" encoding="utf-8"?>
 <p:sld xmlns:a="http://schemas.openxmlformats.org/drawingml/2006/main" xmlns:r="http://schemas.openxmlformats.org/officeDocument/2006/relationships" xmlns:p="http://schemas.openxmlformats.org/presentationml/2006/main">
   <p:cSld name="Slide 10">
     <p:spTree>
@@ -2700,7 +2988,7 @@
           <a:bodyPr wrap="square" lIns="0" tIns="0" rIns="0" bIns="0" rtlCol="0" anchor="ctr"/>
           <a:lstStyle/>
           <a:p>
-            <a:pPr algn="ctr" indent="0" marL="0">
+            <a:pPr marL="0" indent="0" algn="ctr">
               <a:buNone/>
             </a:pPr>
             <a:r>
@@ -2739,7 +3027,7 @@
           <a:bodyPr wrap="square" lIns="0" tIns="0" rIns="0" bIns="0" rtlCol="0" anchor="ctr"/>
           <a:lstStyle/>
           <a:p>
-            <a:pPr indent="0" marL="0">
+            <a:pPr marL="0" indent="0">
               <a:buNone/>
             </a:pPr>
             <a:r>
@@ -2759,14 +3047,14 @@
       </p:sp>
       <p:pic>
         <p:nvPicPr>
-          <p:cNvPr id="4" name="Image 0" descr="C:/Users/gokuls/Downloads/prospect-assist-ai/dashboard/snapshots/dashboard_overview.png">    </p:cNvPr>
+          <p:cNvPr id="4" name="Image 0" descr="C:/Users/gokuls/Downloads/prospect-assist-ai/dashboard/snapshots/dashboard_overview.png"/>
           <p:cNvPicPr>
             <a:picLocks noChangeAspect="1"/>
           </p:cNvPicPr>
           <p:nvPr/>
         </p:nvPicPr>
         <p:blipFill>
-          <a:blip r:embed="rId1"/>
+          <a:blip r:embed="rId3"/>
           <a:stretch>
             <a:fillRect/>
           </a:stretch>
@@ -2780,7 +3068,7 @@
             <a:avLst/>
           </a:prstGeom>
           <a:effectLst>
-            <a:outerShdw sx="100000" sy="100000" kx="0" ky="0" algn="bl" rotWithShape="0" blurRad="101600" dist="25400" dir="5400000">
+            <a:outerShdw blurRad="101600" dist="25400" dir="5400000" algn="bl" rotWithShape="0">
               <a:srgbClr val="9AACA6">
                 <a:alpha val="40000"/>
               </a:srgbClr>
@@ -2809,7 +3097,7 @@
           <a:bodyPr wrap="square" lIns="0" tIns="0" rIns="0" bIns="0" rtlCol="0" anchor="ctr"/>
           <a:lstStyle/>
           <a:p>
-            <a:pPr indent="0" marL="0">
+            <a:pPr marL="0" indent="0">
               <a:buNone/>
             </a:pPr>
             <a:r>
@@ -2829,14 +3117,14 @@
       </p:sp>
       <p:pic>
         <p:nvPicPr>
-          <p:cNvPr id="6" name="Image 1" descr="C:/Users/gokuls/Downloads/prospect-assist-ai/dashboard/snapshots/dashboard_explainability.png">    </p:cNvPr>
+          <p:cNvPr id="6" name="Image 1" descr="C:/Users/gokuls/Downloads/prospect-assist-ai/dashboard/snapshots/dashboard_explainability.png"/>
           <p:cNvPicPr>
             <a:picLocks noChangeAspect="1"/>
           </p:cNvPicPr>
           <p:nvPr/>
         </p:nvPicPr>
         <p:blipFill>
-          <a:blip r:embed="rId2"/>
+          <a:blip r:embed="rId4"/>
           <a:stretch>
             <a:fillRect/>
           </a:stretch>
@@ -2850,7 +3138,7 @@
             <a:avLst/>
           </a:prstGeom>
           <a:effectLst>
-            <a:outerShdw sx="100000" sy="100000" kx="0" ky="0" algn="bl" rotWithShape="0" blurRad="101600" dist="25400" dir="5400000">
+            <a:outerShdw blurRad="101600" dist="25400" dir="5400000" algn="bl" rotWithShape="0">
               <a:srgbClr val="9AACA6">
                 <a:alpha val="40000"/>
               </a:srgbClr>
@@ -2879,7 +3167,7 @@
           <a:bodyPr wrap="square" lIns="0" tIns="0" rIns="0" bIns="0" rtlCol="0" anchor="ctr"/>
           <a:lstStyle/>
           <a:p>
-            <a:pPr indent="0" marL="0">
+            <a:pPr marL="0" indent="0">
               <a:buNone/>
             </a:pPr>
             <a:r>
@@ -2918,7 +3206,7 @@
           <a:bodyPr wrap="square" lIns="0" tIns="0" rIns="0" bIns="0" rtlCol="0" anchor="ctr"/>
           <a:lstStyle/>
           <a:p>
-            <a:pPr indent="0" marL="0">
+            <a:pPr marL="0" indent="0">
               <a:buNone/>
             </a:pPr>
             <a:r>
@@ -2944,7 +3232,7 @@
 </p:sld>
 </file>
 
-<file path=ppt/slides/slide11.xml><?xml version="1.0" encoding="utf-8"?>
+<file path=ppt/slides/slide12.xml><?xml version="1.0" encoding="utf-8"?>
 <p:sld xmlns:a="http://schemas.openxmlformats.org/drawingml/2006/main" xmlns:r="http://schemas.openxmlformats.org/officeDocument/2006/relationships" xmlns:p="http://schemas.openxmlformats.org/presentationml/2006/main">
   <p:cSld name="Slide 11">
     <p:spTree>
@@ -2986,7 +3274,7 @@
           <a:bodyPr wrap="square" lIns="0" tIns="0" rIns="0" bIns="0" rtlCol="0" anchor="ctr"/>
           <a:lstStyle/>
           <a:p>
-            <a:pPr algn="ctr" indent="0" marL="0">
+            <a:pPr marL="0" indent="0" algn="ctr">
               <a:buNone/>
             </a:pPr>
             <a:r>
@@ -3025,7 +3313,7 @@
           <a:bodyPr wrap="square" lIns="0" tIns="0" rIns="0" bIns="0" rtlCol="0" anchor="ctr"/>
           <a:lstStyle/>
           <a:p>
-            <a:pPr indent="0" marL="0">
+            <a:pPr marL="0" indent="0">
               <a:buNone/>
             </a:pPr>
             <a:r>
@@ -3059,16 +3347,34 @@
         </p:nvGraphicFramePr>
         <p:xfrm>
           <a:off x="502920" y="1554480"/>
-          <a:ext cx="6126480" cy="914400"/>
+          <a:ext cx="6126480" cy="2816352"/>
         </p:xfrm>
         <a:graphic>
           <a:graphicData uri="http://schemas.openxmlformats.org/drawingml/2006/table">
             <a:tbl>
               <a:tblPr/>
               <a:tblGrid>
-                <a:gridCol w="3749040"/>
-                <a:gridCol w="1005840"/>
-                <a:gridCol w="1371600"/>
+                <a:gridCol w="3749040">
+                  <a:extLst>
+                    <a:ext uri="{9D8B030D-6E8A-4147-A177-3AD203B41FA5}">
+                      <a16:colId xmlns:a16="http://schemas.microsoft.com/office/drawing/2014/main" val="20000"/>
+                    </a:ext>
+                  </a:extLst>
+                </a:gridCol>
+                <a:gridCol w="1005840">
+                  <a:extLst>
+                    <a:ext uri="{9D8B030D-6E8A-4147-A177-3AD203B41FA5}">
+                      <a16:colId xmlns:a16="http://schemas.microsoft.com/office/drawing/2014/main" val="20001"/>
+                    </a:ext>
+                  </a:extLst>
+                </a:gridCol>
+                <a:gridCol w="1371600">
+                  <a:extLst>
+                    <a:ext uri="{9D8B030D-6E8A-4147-A177-3AD203B41FA5}">
+                      <a16:colId xmlns:a16="http://schemas.microsoft.com/office/drawing/2014/main" val="20002"/>
+                    </a:ext>
+                  </a:extLst>
+                </a:gridCol>
               </a:tblGrid>
               <a:tr h="402336">
                 <a:tc>
@@ -3076,7 +3382,7 @@
                     <a:bodyPr/>
                     <a:lstStyle/>
                     <a:p>
-                      <a:pPr indent="0" marL="0">
+                      <a:pPr marL="0" indent="0">
                         <a:buNone/>
                       </a:pPr>
                       <a:r>
@@ -3144,7 +3450,7 @@
                     <a:bodyPr/>
                     <a:lstStyle/>
                     <a:p>
-                      <a:pPr indent="0" marL="0">
+                      <a:pPr marL="0" indent="0">
                         <a:buNone/>
                       </a:pPr>
                       <a:r>
@@ -3212,7 +3518,7 @@
                     <a:bodyPr/>
                     <a:lstStyle/>
                     <a:p>
-                      <a:pPr indent="0" marL="0">
+                      <a:pPr marL="0" indent="0">
                         <a:buNone/>
                       </a:pPr>
                       <a:r>
@@ -3275,6 +3581,11 @@
                     </a:solidFill>
                   </a:tcPr>
                 </a:tc>
+                <a:extLst>
+                  <a:ext uri="{0D108BD9-81ED-4DB2-BD59-A6C34878D82A}">
+                    <a16:rowId xmlns:a16="http://schemas.microsoft.com/office/drawing/2014/main" val="10000"/>
+                  </a:ext>
+                </a:extLst>
               </a:tr>
               <a:tr h="402336">
                 <a:tc>
@@ -3282,7 +3593,7 @@
                     <a:bodyPr/>
                     <a:lstStyle/>
                     <a:p>
-                      <a:pPr indent="0" marL="0">
+                      <a:pPr marL="0" indent="0">
                         <a:buNone/>
                       </a:pPr>
                       <a:r>
@@ -3350,7 +3661,7 @@
                     <a:bodyPr/>
                     <a:lstStyle/>
                     <a:p>
-                      <a:pPr indent="0" marL="0">
+                      <a:pPr marL="0" indent="0">
                         <a:buNone/>
                       </a:pPr>
                       <a:r>
@@ -3418,7 +3729,7 @@
                     <a:bodyPr/>
                     <a:lstStyle/>
                     <a:p>
-                      <a:pPr indent="0" marL="0">
+                      <a:pPr marL="0" indent="0">
                         <a:buNone/>
                       </a:pPr>
                       <a:r>
@@ -3481,6 +3792,11 @@
                     </a:solidFill>
                   </a:tcPr>
                 </a:tc>
+                <a:extLst>
+                  <a:ext uri="{0D108BD9-81ED-4DB2-BD59-A6C34878D82A}">
+                    <a16:rowId xmlns:a16="http://schemas.microsoft.com/office/drawing/2014/main" val="10001"/>
+                  </a:ext>
+                </a:extLst>
               </a:tr>
               <a:tr h="402336">
                 <a:tc>
@@ -3488,7 +3804,7 @@
                     <a:bodyPr/>
                     <a:lstStyle/>
                     <a:p>
-                      <a:pPr indent="0" marL="0">
+                      <a:pPr marL="0" indent="0">
                         <a:buNone/>
                       </a:pPr>
                       <a:r>
@@ -3556,7 +3872,7 @@
                     <a:bodyPr/>
                     <a:lstStyle/>
                     <a:p>
-                      <a:pPr indent="0" marL="0">
+                      <a:pPr marL="0" indent="0">
                         <a:buNone/>
                       </a:pPr>
                       <a:r>
@@ -3624,7 +3940,7 @@
                     <a:bodyPr/>
                     <a:lstStyle/>
                     <a:p>
-                      <a:pPr indent="0" marL="0">
+                      <a:pPr marL="0" indent="0">
                         <a:buNone/>
                       </a:pPr>
                       <a:r>
@@ -3687,6 +4003,11 @@
                     </a:solidFill>
                   </a:tcPr>
                 </a:tc>
+                <a:extLst>
+                  <a:ext uri="{0D108BD9-81ED-4DB2-BD59-A6C34878D82A}">
+                    <a16:rowId xmlns:a16="http://schemas.microsoft.com/office/drawing/2014/main" val="10002"/>
+                  </a:ext>
+                </a:extLst>
               </a:tr>
               <a:tr h="402336">
                 <a:tc>
@@ -3694,7 +4015,7 @@
                     <a:bodyPr/>
                     <a:lstStyle/>
                     <a:p>
-                      <a:pPr indent="0" marL="0">
+                      <a:pPr marL="0" indent="0">
                         <a:buNone/>
                       </a:pPr>
                       <a:r>
@@ -3762,7 +4083,7 @@
                     <a:bodyPr/>
                     <a:lstStyle/>
                     <a:p>
-                      <a:pPr indent="0" marL="0">
+                      <a:pPr marL="0" indent="0">
                         <a:buNone/>
                       </a:pPr>
                       <a:r>
@@ -3830,7 +4151,7 @@
                     <a:bodyPr/>
                     <a:lstStyle/>
                     <a:p>
-                      <a:pPr indent="0" marL="0">
+                      <a:pPr marL="0" indent="0">
                         <a:buNone/>
                       </a:pPr>
                       <a:r>
@@ -3893,6 +4214,11 @@
                     </a:solidFill>
                   </a:tcPr>
                 </a:tc>
+                <a:extLst>
+                  <a:ext uri="{0D108BD9-81ED-4DB2-BD59-A6C34878D82A}">
+                    <a16:rowId xmlns:a16="http://schemas.microsoft.com/office/drawing/2014/main" val="10003"/>
+                  </a:ext>
+                </a:extLst>
               </a:tr>
               <a:tr h="402336">
                 <a:tc>
@@ -3900,7 +4226,7 @@
                     <a:bodyPr/>
                     <a:lstStyle/>
                     <a:p>
-                      <a:pPr indent="0" marL="0">
+                      <a:pPr marL="0" indent="0">
                         <a:buNone/>
                       </a:pPr>
                       <a:r>
@@ -3968,7 +4294,7 @@
                     <a:bodyPr/>
                     <a:lstStyle/>
                     <a:p>
-                      <a:pPr indent="0" marL="0">
+                      <a:pPr marL="0" indent="0">
                         <a:buNone/>
                       </a:pPr>
                       <a:r>
@@ -4036,7 +4362,7 @@
                     <a:bodyPr/>
                     <a:lstStyle/>
                     <a:p>
-                      <a:pPr indent="0" marL="0">
+                      <a:pPr marL="0" indent="0">
                         <a:buNone/>
                       </a:pPr>
                       <a:r>
@@ -4099,6 +4425,11 @@
                     </a:solidFill>
                   </a:tcPr>
                 </a:tc>
+                <a:extLst>
+                  <a:ext uri="{0D108BD9-81ED-4DB2-BD59-A6C34878D82A}">
+                    <a16:rowId xmlns:a16="http://schemas.microsoft.com/office/drawing/2014/main" val="10004"/>
+                  </a:ext>
+                </a:extLst>
               </a:tr>
               <a:tr h="402336">
                 <a:tc>
@@ -4106,7 +4437,7 @@
                     <a:bodyPr/>
                     <a:lstStyle/>
                     <a:p>
-                      <a:pPr indent="0" marL="0">
+                      <a:pPr marL="0" indent="0">
                         <a:buNone/>
                       </a:pPr>
                       <a:r>
@@ -4174,7 +4505,7 @@
                     <a:bodyPr/>
                     <a:lstStyle/>
                     <a:p>
-                      <a:pPr indent="0" marL="0">
+                      <a:pPr marL="0" indent="0">
                         <a:buNone/>
                       </a:pPr>
                       <a:r>
@@ -4242,7 +4573,7 @@
                     <a:bodyPr/>
                     <a:lstStyle/>
                     <a:p>
-                      <a:pPr indent="0" marL="0">
+                      <a:pPr marL="0" indent="0">
                         <a:buNone/>
                       </a:pPr>
                       <a:r>
@@ -4305,6 +4636,11 @@
                     </a:solidFill>
                   </a:tcPr>
                 </a:tc>
+                <a:extLst>
+                  <a:ext uri="{0D108BD9-81ED-4DB2-BD59-A6C34878D82A}">
+                    <a16:rowId xmlns:a16="http://schemas.microsoft.com/office/drawing/2014/main" val="10005"/>
+                  </a:ext>
+                </a:extLst>
               </a:tr>
               <a:tr h="402336">
                 <a:tc>
@@ -4312,7 +4648,7 @@
                     <a:bodyPr/>
                     <a:lstStyle/>
                     <a:p>
-                      <a:pPr indent="0" marL="0">
+                      <a:pPr marL="0" indent="0">
                         <a:buNone/>
                       </a:pPr>
                       <a:r>
@@ -4380,7 +4716,7 @@
                     <a:bodyPr/>
                     <a:lstStyle/>
                     <a:p>
-                      <a:pPr indent="0" marL="0">
+                      <a:pPr marL="0" indent="0">
                         <a:buNone/>
                       </a:pPr>
                       <a:r>
@@ -4448,7 +4784,7 @@
                     <a:bodyPr/>
                     <a:lstStyle/>
                     <a:p>
-                      <a:pPr indent="0" marL="0">
+                      <a:pPr marL="0" indent="0">
                         <a:buNone/>
                       </a:pPr>
                       <a:r>
@@ -4511,6 +4847,11 @@
                     </a:solidFill>
                   </a:tcPr>
                 </a:tc>
+                <a:extLst>
+                  <a:ext uri="{0D108BD9-81ED-4DB2-BD59-A6C34878D82A}">
+                    <a16:rowId xmlns:a16="http://schemas.microsoft.com/office/drawing/2014/main" val="10006"/>
+                  </a:ext>
+                </a:extLst>
               </a:tr>
             </a:tbl>
           </a:graphicData>
@@ -4542,6 +4883,13 @@
             <a:prstDash val="solid"/>
           </a:ln>
         </p:spPr>
+        <p:txBody>
+          <a:bodyPr/>
+          <a:lstStyle/>
+          <a:p>
+            <a:endParaRPr lang="en-IN"/>
+          </a:p>
+        </p:txBody>
       </p:sp>
       <p:sp>
         <p:nvSpPr>
@@ -4564,7 +4912,7 @@
           <a:bodyPr wrap="square" lIns="0" tIns="0" rIns="0" bIns="0" rtlCol="0" anchor="ctr"/>
           <a:lstStyle/>
           <a:p>
-            <a:pPr indent="0" marL="0">
+            <a:pPr marL="0" indent="0">
               <a:buNone/>
             </a:pPr>
             <a:r>
@@ -4578,9 +4926,6 @@
               </a:rPr>
               <a:t>16 / 16</a:t>
             </a:r>
-            <a:pPr indent="0" marL="0">
-              <a:buNone/>
-            </a:pPr>
             <a:r>
               <a:rPr lang="en-US" sz="1150" dirty="0">
                 <a:solidFill>
@@ -4617,7 +4962,7 @@
           <a:bodyPr wrap="square" lIns="0" tIns="0" rIns="0" bIns="0" rtlCol="0" anchor="t"/>
           <a:lstStyle/>
           <a:p>
-            <a:pPr indent="0" marL="0">
+            <a:pPr marL="0" indent="0">
               <a:buNone/>
             </a:pPr>
             <a:r>
@@ -4637,7 +4982,7 @@
       </p:sp>
       <p:graphicFrame>
         <p:nvGraphicFramePr>
-          <p:cNvPr id="8" name="Chart 0" descr=""/>
+          <p:cNvPr id="8" name="Chart 0"/>
           <p:cNvGraphicFramePr/>
           <p:nvPr/>
         </p:nvGraphicFramePr>
@@ -4645,9 +4990,9 @@
           <a:off x="6949440" y="1554480"/>
           <a:ext cx="4754880" cy="4480560"/>
         </p:xfrm>
-        <a:graphic xmlns:a="http://schemas.openxmlformats.org/drawingml/2006/main">
+        <a:graphic>
           <a:graphicData uri="http://schemas.openxmlformats.org/drawingml/2006/chart">
-            <c:chart xmlns:c="http://schemas.openxmlformats.org/drawingml/2006/chart" r:id="rId1"/>
+            <c:chart xmlns:c="http://schemas.openxmlformats.org/drawingml/2006/chart" xmlns:r="http://schemas.openxmlformats.org/officeDocument/2006/relationships" r:id="rId3"/>
           </a:graphicData>
         </a:graphic>
       </p:graphicFrame>
@@ -4672,7 +5017,7 @@
           <a:bodyPr wrap="square" lIns="0" tIns="0" rIns="0" bIns="0" rtlCol="0" anchor="ctr"/>
           <a:lstStyle/>
           <a:p>
-            <a:pPr indent="0" marL="0">
+            <a:pPr marL="0" indent="0">
               <a:buNone/>
             </a:pPr>
             <a:r>
@@ -4698,7 +5043,7 @@
 </p:sld>
 </file>
 
-<file path=ppt/slides/slide12.xml><?xml version="1.0" encoding="utf-8"?>
+<file path=ppt/slides/slide13.xml><?xml version="1.0" encoding="utf-8"?>
 <p:sld xmlns:a="http://schemas.openxmlformats.org/drawingml/2006/main" xmlns:r="http://schemas.openxmlformats.org/officeDocument/2006/relationships" xmlns:p="http://schemas.openxmlformats.org/presentationml/2006/main">
   <p:cSld name="Slide 12">
     <p:spTree>
@@ -4740,7 +5085,7 @@
           <a:bodyPr wrap="square" lIns="0" tIns="0" rIns="0" bIns="0" rtlCol="0" anchor="ctr"/>
           <a:lstStyle/>
           <a:p>
-            <a:pPr algn="ctr" indent="0" marL="0">
+            <a:pPr marL="0" indent="0" algn="ctr">
               <a:buNone/>
             </a:pPr>
             <a:r>
@@ -4779,7 +5124,7 @@
           <a:bodyPr wrap="square" lIns="0" tIns="0" rIns="0" bIns="0" rtlCol="0" anchor="ctr"/>
           <a:lstStyle/>
           <a:p>
-            <a:pPr indent="0" marL="0">
+            <a:pPr marL="0" indent="0">
               <a:buNone/>
             </a:pPr>
             <a:r>
@@ -4823,6 +5168,13 @@
             <a:prstDash val="solid"/>
           </a:ln>
         </p:spPr>
+        <p:txBody>
+          <a:bodyPr/>
+          <a:lstStyle/>
+          <a:p>
+            <a:endParaRPr lang="en-IN"/>
+          </a:p>
+        </p:txBody>
       </p:sp>
       <p:sp>
         <p:nvSpPr>
@@ -4845,7 +5197,7 @@
           <a:bodyPr wrap="square" lIns="0" tIns="0" rIns="0" bIns="0" rtlCol="0" anchor="ctr"/>
           <a:lstStyle/>
           <a:p>
-            <a:pPr indent="0" marL="0">
+            <a:pPr marL="0" indent="0">
               <a:buNone/>
             </a:pPr>
             <a:r>
@@ -4983,6 +5335,13 @@
             <a:prstDash val="solid"/>
           </a:ln>
         </p:spPr>
+        <p:txBody>
+          <a:bodyPr/>
+          <a:lstStyle/>
+          <a:p>
+            <a:endParaRPr lang="en-IN"/>
+          </a:p>
+        </p:txBody>
       </p:sp>
       <p:sp>
         <p:nvSpPr>
@@ -5005,7 +5364,7 @@
           <a:bodyPr wrap="square" lIns="0" tIns="0" rIns="0" bIns="0" rtlCol="0" anchor="ctr"/>
           <a:lstStyle/>
           <a:p>
-            <a:pPr indent="0" marL="0">
+            <a:pPr marL="0" indent="0">
               <a:buNone/>
             </a:pPr>
             <a:r>
@@ -5167,6 +5526,13 @@
             <a:prstDash val="solid"/>
           </a:ln>
         </p:spPr>
+        <p:txBody>
+          <a:bodyPr/>
+          <a:lstStyle/>
+          <a:p>
+            <a:endParaRPr lang="en-IN"/>
+          </a:p>
+        </p:txBody>
       </p:sp>
       <p:sp>
         <p:nvSpPr>
@@ -5189,7 +5555,7 @@
           <a:bodyPr wrap="square" lIns="0" tIns="0" rIns="0" bIns="0" rtlCol="0" anchor="ctr"/>
           <a:lstStyle/>
           <a:p>
-            <a:pPr indent="0" marL="0">
+            <a:pPr marL="0" indent="0">
               <a:buNone/>
             </a:pPr>
             <a:r>
@@ -5346,7 +5712,7 @@
           <a:bodyPr wrap="square" lIns="0" tIns="0" rIns="0" bIns="0" rtlCol="0" anchor="ctr"/>
           <a:lstStyle/>
           <a:p>
-            <a:pPr indent="0" marL="0">
+            <a:pPr marL="0" indent="0">
               <a:buNone/>
             </a:pPr>
             <a:r>
@@ -5372,7 +5738,7 @@
 </p:sld>
 </file>
 
-<file path=ppt/slides/slide13.xml><?xml version="1.0" encoding="utf-8"?>
+<file path=ppt/slides/slide14.xml><?xml version="1.0" encoding="utf-8"?>
 <p:sld xmlns:a="http://schemas.openxmlformats.org/drawingml/2006/main" xmlns:r="http://schemas.openxmlformats.org/officeDocument/2006/relationships" xmlns:p="http://schemas.openxmlformats.org/presentationml/2006/main">
   <p:cSld name="Slide 13">
     <p:bg>
@@ -5380,6 +5746,7 @@
         <a:solidFill>
           <a:srgbClr val="00584C"/>
         </a:solidFill>
+        <a:effectLst/>
       </p:bgPr>
     </p:bg>
     <p:spTree>
@@ -5417,7 +5784,7 @@
           <a:bodyPr wrap="square" lIns="0" tIns="0" rIns="0" bIns="0" rtlCol="0" anchor="ctr"/>
           <a:lstStyle/>
           <a:p>
-            <a:pPr indent="0" marL="0">
+            <a:pPr marL="0" indent="0">
               <a:buNone/>
             </a:pPr>
             <a:r>
@@ -5461,6 +5828,13 @@
             <a:prstDash val="solid"/>
           </a:ln>
         </p:spPr>
+        <p:txBody>
+          <a:bodyPr/>
+          <a:lstStyle/>
+          <a:p>
+            <a:endParaRPr lang="en-IN"/>
+          </a:p>
+        </p:txBody>
       </p:sp>
       <p:sp>
         <p:nvSpPr>
@@ -5483,7 +5857,7 @@
           <a:bodyPr wrap="square" lIns="0" tIns="0" rIns="0" bIns="0" rtlCol="0" anchor="ctr"/>
           <a:lstStyle/>
           <a:p>
-            <a:pPr indent="0" marL="0">
+            <a:pPr marL="0" indent="0">
               <a:buNone/>
             </a:pPr>
             <a:r>
@@ -5522,7 +5896,7 @@
           <a:bodyPr wrap="square" lIns="0" tIns="0" rIns="0" bIns="0" rtlCol="0" anchor="ctr"/>
           <a:lstStyle/>
           <a:p>
-            <a:pPr indent="0" marL="0">
+            <a:pPr marL="0" indent="0">
               <a:buNone/>
             </a:pPr>
             <a:r>
@@ -5566,6 +5940,13 @@
             <a:prstDash val="solid"/>
           </a:ln>
         </p:spPr>
+        <p:txBody>
+          <a:bodyPr/>
+          <a:lstStyle/>
+          <a:p>
+            <a:endParaRPr lang="en-IN"/>
+          </a:p>
+        </p:txBody>
       </p:sp>
       <p:sp>
         <p:nvSpPr>
@@ -5588,7 +5969,7 @@
           <a:bodyPr wrap="square" lIns="0" tIns="0" rIns="0" bIns="0" rtlCol="0" anchor="ctr"/>
           <a:lstStyle/>
           <a:p>
-            <a:pPr indent="0" marL="0">
+            <a:pPr marL="0" indent="0">
               <a:buNone/>
             </a:pPr>
             <a:r>
@@ -5627,7 +6008,7 @@
           <a:bodyPr wrap="square" lIns="0" tIns="0" rIns="0" bIns="0" rtlCol="0" anchor="ctr"/>
           <a:lstStyle/>
           <a:p>
-            <a:pPr indent="0" marL="0">
+            <a:pPr marL="0" indent="0">
               <a:buNone/>
             </a:pPr>
             <a:r>
@@ -5671,6 +6052,13 @@
             <a:prstDash val="solid"/>
           </a:ln>
         </p:spPr>
+        <p:txBody>
+          <a:bodyPr/>
+          <a:lstStyle/>
+          <a:p>
+            <a:endParaRPr lang="en-IN"/>
+          </a:p>
+        </p:txBody>
       </p:sp>
       <p:sp>
         <p:nvSpPr>
@@ -5693,7 +6081,7 @@
           <a:bodyPr wrap="square" lIns="0" tIns="0" rIns="0" bIns="0" rtlCol="0" anchor="ctr"/>
           <a:lstStyle/>
           <a:p>
-            <a:pPr indent="0" marL="0">
+            <a:pPr marL="0" indent="0">
               <a:buNone/>
             </a:pPr>
             <a:r>
@@ -5732,7 +6120,7 @@
           <a:bodyPr wrap="square" lIns="0" tIns="0" rIns="0" bIns="0" rtlCol="0" anchor="ctr"/>
           <a:lstStyle/>
           <a:p>
-            <a:pPr indent="0" marL="0">
+            <a:pPr marL="0" indent="0">
               <a:buNone/>
             </a:pPr>
             <a:r>
@@ -5771,7 +6159,7 @@
           <a:bodyPr wrap="square" lIns="0" tIns="0" rIns="0" bIns="0" rtlCol="0" anchor="ctr"/>
           <a:lstStyle/>
           <a:p>
-            <a:pPr indent="0" marL="0">
+            <a:pPr marL="0" indent="0">
               <a:buNone/>
             </a:pPr>
             <a:r>
@@ -5798,6 +6186,472 @@
 </file>
 
 <file path=ppt/slides/slide2.xml><?xml version="1.0" encoding="utf-8"?>
+<p:sld xmlns:a="http://schemas.openxmlformats.org/drawingml/2006/main" xmlns:r="http://schemas.openxmlformats.org/officeDocument/2006/relationships" xmlns:p="http://schemas.openxmlformats.org/presentationml/2006/main">
+  <p:cSld name="Slide 1">
+    <p:bg>
+      <p:bgPr>
+        <a:solidFill>
+          <a:srgbClr val="00584C"/>
+        </a:solidFill>
+        <a:effectLst/>
+      </p:bgPr>
+    </p:bg>
+    <p:spTree>
+      <p:nvGrpSpPr>
+        <p:cNvPr id="1" name=""/>
+        <p:cNvGrpSpPr/>
+        <p:nvPr/>
+      </p:nvGrpSpPr>
+      <p:grpSpPr>
+        <a:xfrm>
+          <a:off x="0" y="0"/>
+          <a:ext cx="0" cy="0"/>
+          <a:chOff x="0" y="0"/>
+          <a:chExt cx="0" cy="0"/>
+        </a:xfrm>
+      </p:grpSpPr>
+      <p:sp>
+        <p:nvSpPr>
+          <p:cNvPr id="2" name="Text 0"/>
+          <p:cNvSpPr/>
+          <p:nvPr/>
+        </p:nvSpPr>
+        <p:spPr>
+          <a:xfrm>
+            <a:off x="502920" y="960120"/>
+            <a:ext cx="11155680" cy="868680"/>
+          </a:xfrm>
+          <a:prstGeom prst="rect">
+            <a:avLst/>
+          </a:prstGeom>
+          <a:noFill/>
+          <a:ln/>
+        </p:spPr>
+        <p:txBody>
+          <a:bodyPr wrap="square" lIns="0" tIns="0" rIns="0" bIns="0" rtlCol="0" anchor="ctr"/>
+          <a:lstStyle/>
+          <a:p>
+            <a:pPr marL="0" indent="0">
+              <a:buNone/>
+            </a:pPr>
+            <a:r>
+              <a:rPr lang="en-US" sz="4800" b="1" dirty="0">
+                <a:solidFill>
+                  <a:srgbClr val="FFFFFF"/>
+                </a:solidFill>
+                <a:latin typeface="Arial" pitchFamily="34" charset="0"/>
+                <a:ea typeface="Arial" pitchFamily="34" charset="-122"/>
+                <a:cs typeface="Arial" pitchFamily="34" charset="-120"/>
+              </a:rPr>
+              <a:t>Prospect Assist AI</a:t>
+            </a:r>
+            <a:endParaRPr lang="en-US" sz="4800" dirty="0"/>
+          </a:p>
+        </p:txBody>
+      </p:sp>
+      <p:sp>
+        <p:nvSpPr>
+          <p:cNvPr id="3" name="Text 1"/>
+          <p:cNvSpPr/>
+          <p:nvPr/>
+        </p:nvSpPr>
+        <p:spPr>
+          <a:xfrm>
+            <a:off x="502920" y="1828800"/>
+            <a:ext cx="10424160" cy="411480"/>
+          </a:xfrm>
+          <a:prstGeom prst="rect">
+            <a:avLst/>
+          </a:prstGeom>
+          <a:noFill/>
+          <a:ln/>
+        </p:spPr>
+        <p:txBody>
+          <a:bodyPr wrap="square" lIns="0" tIns="0" rIns="0" bIns="0" rtlCol="0" anchor="ctr"/>
+          <a:lstStyle/>
+          <a:p>
+            <a:pPr marL="0" indent="0">
+              <a:buNone/>
+            </a:pPr>
+            <a:r>
+              <a:rPr lang="en-US" sz="1700" dirty="0">
+                <a:solidFill>
+                  <a:srgbClr val="CDE8E0"/>
+                </a:solidFill>
+                <a:latin typeface="Calibri" pitchFamily="34" charset="0"/>
+                <a:ea typeface="Calibri" pitchFamily="34" charset="-122"/>
+                <a:cs typeface="Calibri" pitchFamily="34" charset="-120"/>
+              </a:rPr>
+              <a:t>Behavior-driven lead generation &amp; underwriting support for IDBI retail lending</a:t>
+            </a:r>
+            <a:endParaRPr lang="en-US" sz="1700" dirty="0"/>
+          </a:p>
+        </p:txBody>
+      </p:sp>
+      <p:sp>
+        <p:nvSpPr>
+          <p:cNvPr id="4" name="Text 2"/>
+          <p:cNvSpPr/>
+          <p:nvPr/>
+        </p:nvSpPr>
+        <p:spPr>
+          <a:xfrm>
+            <a:off x="502920" y="2249424"/>
+            <a:ext cx="10424160" cy="365760"/>
+          </a:xfrm>
+          <a:prstGeom prst="rect">
+            <a:avLst/>
+          </a:prstGeom>
+          <a:noFill/>
+          <a:ln/>
+        </p:spPr>
+        <p:txBody>
+          <a:bodyPr wrap="square" lIns="0" tIns="0" rIns="0" bIns="0" rtlCol="0" anchor="ctr"/>
+          <a:lstStyle/>
+          <a:p>
+            <a:pPr marL="0" indent="0">
+              <a:buNone/>
+            </a:pPr>
+            <a:r>
+              <a:rPr lang="en-US" sz="1300" i="1" dirty="0">
+                <a:solidFill>
+                  <a:srgbClr val="9EC9BE"/>
+                </a:solidFill>
+                <a:latin typeface="Calibri" pitchFamily="34" charset="0"/>
+                <a:ea typeface="Calibri" pitchFamily="34" charset="-122"/>
+                <a:cs typeface="Calibri" pitchFamily="34" charset="-120"/>
+              </a:rPr>
+              <a:t>IDBI Innovate 2026 · Track 2 · Prototype Submission</a:t>
+            </a:r>
+            <a:endParaRPr lang="en-US" sz="1300" dirty="0"/>
+          </a:p>
+        </p:txBody>
+      </p:sp>
+      <p:sp>
+        <p:nvSpPr>
+          <p:cNvPr id="5" name="Shape 3"/>
+          <p:cNvSpPr/>
+          <p:nvPr/>
+        </p:nvSpPr>
+        <p:spPr>
+          <a:xfrm>
+            <a:off x="502920" y="3017520"/>
+            <a:ext cx="11183112" cy="2926080"/>
+          </a:xfrm>
+          <a:prstGeom prst="roundRect">
+            <a:avLst>
+              <a:gd name="adj" fmla="val 2813"/>
+            </a:avLst>
+          </a:prstGeom>
+          <a:solidFill>
+            <a:srgbClr val="FFFFFF"/>
+          </a:solidFill>
+          <a:ln w="12700">
+            <a:solidFill>
+              <a:srgbClr val="FFFFFF"/>
+            </a:solidFill>
+            <a:prstDash val="solid"/>
+          </a:ln>
+        </p:spPr>
+        <p:txBody>
+          <a:bodyPr/>
+          <a:lstStyle/>
+          <a:p>
+            <a:endParaRPr lang="en-IN" dirty="0"/>
+          </a:p>
+        </p:txBody>
+      </p:sp>
+      <p:sp>
+        <p:nvSpPr>
+          <p:cNvPr id="6" name="Text 4"/>
+          <p:cNvSpPr/>
+          <p:nvPr/>
+        </p:nvSpPr>
+        <p:spPr>
+          <a:xfrm>
+            <a:off x="868680" y="3246120"/>
+            <a:ext cx="5486400" cy="365760"/>
+          </a:xfrm>
+          <a:prstGeom prst="rect">
+            <a:avLst/>
+          </a:prstGeom>
+          <a:noFill/>
+          <a:ln/>
+        </p:spPr>
+        <p:txBody>
+          <a:bodyPr wrap="square" lIns="0" tIns="0" rIns="0" bIns="0" rtlCol="0" anchor="ctr"/>
+          <a:lstStyle/>
+          <a:p>
+            <a:pPr marL="0" indent="0">
+              <a:buNone/>
+            </a:pPr>
+            <a:r>
+              <a:rPr lang="en-US" sz="1600" b="1" dirty="0">
+                <a:solidFill>
+                  <a:srgbClr val="0E201B"/>
+                </a:solidFill>
+                <a:latin typeface="Arial" pitchFamily="34" charset="0"/>
+                <a:ea typeface="Arial" pitchFamily="34" charset="-122"/>
+                <a:cs typeface="Arial" pitchFamily="34" charset="-120"/>
+              </a:rPr>
+              <a:t>Team Details</a:t>
+            </a:r>
+            <a:endParaRPr lang="en-US" sz="1600" dirty="0"/>
+          </a:p>
+        </p:txBody>
+      </p:sp>
+      <p:sp>
+        <p:nvSpPr>
+          <p:cNvPr id="7" name="Text 5"/>
+          <p:cNvSpPr/>
+          <p:nvPr/>
+        </p:nvSpPr>
+        <p:spPr>
+          <a:xfrm>
+            <a:off x="868680" y="3703320"/>
+            <a:ext cx="2651760" cy="685800"/>
+          </a:xfrm>
+          <a:prstGeom prst="rect">
+            <a:avLst/>
+          </a:prstGeom>
+          <a:noFill/>
+          <a:ln/>
+        </p:spPr>
+        <p:txBody>
+          <a:bodyPr wrap="square" lIns="0" tIns="0" rIns="0" bIns="0" rtlCol="0" anchor="t"/>
+          <a:lstStyle/>
+          <a:p>
+            <a:pPr marL="0" indent="0">
+              <a:buNone/>
+            </a:pPr>
+            <a:r>
+              <a:rPr lang="en-US" sz="1350" b="1" dirty="0">
+                <a:solidFill>
+                  <a:srgbClr val="00584C"/>
+                </a:solidFill>
+                <a:latin typeface="Calibri" pitchFamily="34" charset="0"/>
+                <a:ea typeface="Calibri" pitchFamily="34" charset="-122"/>
+                <a:cs typeface="Calibri" pitchFamily="34" charset="-120"/>
+              </a:rPr>
+              <a:t>a.  Team name</a:t>
+            </a:r>
+            <a:endParaRPr lang="en-US" sz="1350" dirty="0"/>
+          </a:p>
+        </p:txBody>
+      </p:sp>
+      <p:sp>
+        <p:nvSpPr>
+          <p:cNvPr id="8" name="Text 6"/>
+          <p:cNvSpPr/>
+          <p:nvPr/>
+        </p:nvSpPr>
+        <p:spPr>
+          <a:xfrm>
+            <a:off x="3657600" y="3703320"/>
+            <a:ext cx="7680960" cy="685800"/>
+          </a:xfrm>
+          <a:prstGeom prst="rect">
+            <a:avLst/>
+          </a:prstGeom>
+          <a:noFill/>
+          <a:ln/>
+        </p:spPr>
+        <p:txBody>
+          <a:bodyPr wrap="square" lIns="0" tIns="0" rIns="0" bIns="0" rtlCol="0" anchor="t"/>
+          <a:lstStyle/>
+          <a:p>
+            <a:pPr marL="0" indent="0">
+              <a:lnSpc>
+                <a:spcPct val="105000"/>
+              </a:lnSpc>
+              <a:buNone/>
+            </a:pPr>
+            <a:r>
+              <a:rPr lang="en-US" sz="1250" dirty="0">
+                <a:solidFill>
+                  <a:srgbClr val="0E201B"/>
+                </a:solidFill>
+                <a:latin typeface="Calibri" pitchFamily="34" charset="0"/>
+                <a:ea typeface="Calibri" pitchFamily="34" charset="-122"/>
+                <a:cs typeface="Calibri" pitchFamily="34" charset="-120"/>
+              </a:rPr>
+              <a:t>____________________________</a:t>
+            </a:r>
+            <a:endParaRPr lang="en-US" sz="1250" dirty="0"/>
+          </a:p>
+        </p:txBody>
+      </p:sp>
+      <p:sp>
+        <p:nvSpPr>
+          <p:cNvPr id="9" name="Text 7"/>
+          <p:cNvSpPr/>
+          <p:nvPr/>
+        </p:nvSpPr>
+        <p:spPr>
+          <a:xfrm>
+            <a:off x="868680" y="4416552"/>
+            <a:ext cx="2651760" cy="685800"/>
+          </a:xfrm>
+          <a:prstGeom prst="rect">
+            <a:avLst/>
+          </a:prstGeom>
+          <a:noFill/>
+          <a:ln/>
+        </p:spPr>
+        <p:txBody>
+          <a:bodyPr wrap="square" lIns="0" tIns="0" rIns="0" bIns="0" rtlCol="0" anchor="t"/>
+          <a:lstStyle/>
+          <a:p>
+            <a:pPr marL="0" indent="0">
+              <a:buNone/>
+            </a:pPr>
+            <a:r>
+              <a:rPr lang="en-US" sz="1350" b="1" dirty="0">
+                <a:solidFill>
+                  <a:srgbClr val="00584C"/>
+                </a:solidFill>
+                <a:latin typeface="Calibri" pitchFamily="34" charset="0"/>
+                <a:ea typeface="Calibri" pitchFamily="34" charset="-122"/>
+                <a:cs typeface="Calibri" pitchFamily="34" charset="-120"/>
+              </a:rPr>
+              <a:t>b.  Team leader name</a:t>
+            </a:r>
+            <a:endParaRPr lang="en-US" sz="1350" dirty="0"/>
+          </a:p>
+        </p:txBody>
+      </p:sp>
+      <p:sp>
+        <p:nvSpPr>
+          <p:cNvPr id="10" name="Text 8"/>
+          <p:cNvSpPr/>
+          <p:nvPr/>
+        </p:nvSpPr>
+        <p:spPr>
+          <a:xfrm>
+            <a:off x="3657600" y="4416552"/>
+            <a:ext cx="7680960" cy="685800"/>
+          </a:xfrm>
+          <a:prstGeom prst="rect">
+            <a:avLst/>
+          </a:prstGeom>
+          <a:noFill/>
+          <a:ln/>
+        </p:spPr>
+        <p:txBody>
+          <a:bodyPr wrap="square" lIns="0" tIns="0" rIns="0" bIns="0" rtlCol="0" anchor="t"/>
+          <a:lstStyle/>
+          <a:p>
+            <a:pPr marL="0" indent="0">
+              <a:lnSpc>
+                <a:spcPct val="105000"/>
+              </a:lnSpc>
+              <a:buNone/>
+            </a:pPr>
+            <a:r>
+              <a:rPr lang="en-US" sz="1250" dirty="0">
+                <a:solidFill>
+                  <a:srgbClr val="0E201B"/>
+                </a:solidFill>
+                <a:latin typeface="Calibri" pitchFamily="34" charset="0"/>
+                <a:ea typeface="Calibri" pitchFamily="34" charset="-122"/>
+                <a:cs typeface="Calibri" pitchFamily="34" charset="-120"/>
+              </a:rPr>
+              <a:t>____________________________</a:t>
+            </a:r>
+            <a:endParaRPr lang="en-US" sz="1250" dirty="0"/>
+          </a:p>
+        </p:txBody>
+      </p:sp>
+      <p:sp>
+        <p:nvSpPr>
+          <p:cNvPr id="11" name="Text 9"/>
+          <p:cNvSpPr/>
+          <p:nvPr/>
+        </p:nvSpPr>
+        <p:spPr>
+          <a:xfrm>
+            <a:off x="868680" y="5129784"/>
+            <a:ext cx="2651760" cy="685800"/>
+          </a:xfrm>
+          <a:prstGeom prst="rect">
+            <a:avLst/>
+          </a:prstGeom>
+          <a:noFill/>
+          <a:ln/>
+        </p:spPr>
+        <p:txBody>
+          <a:bodyPr wrap="square" lIns="0" tIns="0" rIns="0" bIns="0" rtlCol="0" anchor="t"/>
+          <a:lstStyle/>
+          <a:p>
+            <a:pPr marL="0" indent="0">
+              <a:buNone/>
+            </a:pPr>
+            <a:r>
+              <a:rPr lang="en-US" sz="1350" b="1" dirty="0">
+                <a:solidFill>
+                  <a:srgbClr val="00584C"/>
+                </a:solidFill>
+                <a:latin typeface="Calibri" pitchFamily="34" charset="0"/>
+                <a:ea typeface="Calibri" pitchFamily="34" charset="-122"/>
+                <a:cs typeface="Calibri" pitchFamily="34" charset="-120"/>
+              </a:rPr>
+              <a:t>c.  Problem statement</a:t>
+            </a:r>
+            <a:endParaRPr lang="en-US" sz="1350" dirty="0"/>
+          </a:p>
+        </p:txBody>
+      </p:sp>
+      <p:sp>
+        <p:nvSpPr>
+          <p:cNvPr id="12" name="Text 10"/>
+          <p:cNvSpPr/>
+          <p:nvPr/>
+        </p:nvSpPr>
+        <p:spPr>
+          <a:xfrm>
+            <a:off x="3657600" y="5129784"/>
+            <a:ext cx="7680960" cy="685800"/>
+          </a:xfrm>
+          <a:prstGeom prst="rect">
+            <a:avLst/>
+          </a:prstGeom>
+          <a:noFill/>
+          <a:ln/>
+        </p:spPr>
+        <p:txBody>
+          <a:bodyPr wrap="square" lIns="0" tIns="0" rIns="0" bIns="0" rtlCol="0" anchor="t"/>
+          <a:lstStyle/>
+          <a:p>
+            <a:pPr marL="0" indent="0">
+              <a:lnSpc>
+                <a:spcPct val="105000"/>
+              </a:lnSpc>
+              <a:buNone/>
+            </a:pPr>
+            <a:r>
+              <a:rPr lang="en-US" sz="1250" dirty="0">
+                <a:solidFill>
+                  <a:srgbClr val="0E201B"/>
+                </a:solidFill>
+                <a:latin typeface="Calibri" pitchFamily="34" charset="0"/>
+                <a:ea typeface="Calibri" pitchFamily="34" charset="-122"/>
+                <a:cs typeface="Calibri" pitchFamily="34" charset="-120"/>
+              </a:rPr>
+              <a:t>Track 2 — Prospect Assist AI: data-driven identification of eligible, repayment-capable, genuinely interested retail-loan prospects from transaction &amp; behavioral insights (Personal · Home · Mortgage/LAP · Auto)</a:t>
+            </a:r>
+            <a:endParaRPr lang="en-US" sz="1250" dirty="0"/>
+          </a:p>
+        </p:txBody>
+      </p:sp>
+    </p:spTree>
+  </p:cSld>
+  <p:clrMapOvr>
+    <a:masterClrMapping/>
+  </p:clrMapOvr>
+</p:sld>
+</file>
+
+<file path=ppt/slides/slide3.xml><?xml version="1.0" encoding="utf-8"?>
 <p:sld xmlns:a="http://schemas.openxmlformats.org/drawingml/2006/main" xmlns:r="http://schemas.openxmlformats.org/officeDocument/2006/relationships" xmlns:p="http://schemas.openxmlformats.org/presentationml/2006/main">
   <p:cSld name="Slide 2">
     <p:spTree>
@@ -5839,7 +6693,7 @@
           <a:bodyPr wrap="square" lIns="0" tIns="0" rIns="0" bIns="0" rtlCol="0" anchor="ctr"/>
           <a:lstStyle/>
           <a:p>
-            <a:pPr algn="ctr" indent="0" marL="0">
+            <a:pPr marL="0" indent="0" algn="ctr">
               <a:buNone/>
             </a:pPr>
             <a:r>
@@ -5878,7 +6732,7 @@
           <a:bodyPr wrap="square" lIns="0" tIns="0" rIns="0" bIns="0" rtlCol="0" anchor="ctr"/>
           <a:lstStyle/>
           <a:p>
-            <a:pPr indent="0" marL="0">
+            <a:pPr marL="0" indent="0">
               <a:buNone/>
             </a:pPr>
             <a:r>
@@ -5917,7 +6771,7 @@
           <a:bodyPr wrap="square" lIns="0" tIns="0" rIns="0" bIns="0" rtlCol="0" anchor="t"/>
           <a:lstStyle/>
           <a:p>
-            <a:pPr indent="0" marL="0">
+            <a:pPr marL="0" indent="0">
               <a:lnSpc>
                 <a:spcPct val="112000"/>
               </a:lnSpc>
@@ -5936,24 +6790,7 @@
                 <a:cs typeface="Calibri" pitchFamily="34" charset="-120"/>
               </a:rPr>
               <a:t>Retail lending today runs on declared income, bureau scores and static FOIR — so lead-to-loan conversion sits near 1%, and genuine borrowers with non-standard income are missed.
-</a:t>
-            </a:r>
-            <a:pPr indent="0" marL="0">
-              <a:lnSpc>
-                <a:spcPct val="112000"/>
-              </a:lnSpc>
-              <a:buNone/>
-            </a:pPr>
-            <a:r>
-              <a:rPr lang="en-US" sz="1450" dirty="0">
-                <a:solidFill>
-                  <a:srgbClr val="0E201B"/>
-                </a:solidFill>
-                <a:latin typeface="Calibri" pitchFamily="34" charset="0"/>
-                <a:ea typeface="Calibri" pitchFamily="34" charset="-122"/>
-                <a:cs typeface="Calibri" pitchFamily="34" charset="-120"/>
-              </a:rPr>
-              <a:t>Prospect Assist AI replaces declarations with evidence. A multi-agent pipeline mines consented transaction, UPI, GST, engagement and alt-data signals to answer three questions for every prospect — and hands relationship managers a prioritized queue where every lead carries its own affordability math and evidence bundle.</a:t>
+Prospect Assist AI replaces declarations with evidence. A multi-agent pipeline mines consented transaction, UPI, GST, engagement and alt-data signals to answer three questions for every prospect — and hands relationship managers a prioritized queue where every lead carries its own affordability math and evidence bundle.</a:t>
             </a:r>
             <a:endParaRPr lang="en-US" sz="1450" dirty="0"/>
           </a:p>
@@ -5985,6 +6822,13 @@
             <a:prstDash val="solid"/>
           </a:ln>
         </p:spPr>
+        <p:txBody>
+          <a:bodyPr/>
+          <a:lstStyle/>
+          <a:p>
+            <a:endParaRPr lang="en-IN"/>
+          </a:p>
+        </p:txBody>
       </p:sp>
       <p:sp>
         <p:nvSpPr>
@@ -6007,7 +6851,7 @@
           <a:bodyPr wrap="square" lIns="0" tIns="0" rIns="0" bIns="0" rtlCol="0" anchor="ctr"/>
           <a:lstStyle/>
           <a:p>
-            <a:pPr indent="0" marL="0">
+            <a:pPr marL="0" indent="0">
               <a:buNone/>
             </a:pPr>
             <a:r>
@@ -6021,9 +6865,6 @@
               </a:rPr>
               <a:t>~1%  </a:t>
             </a:r>
-            <a:pPr indent="0" marL="0">
-              <a:buNone/>
-            </a:pPr>
             <a:r>
               <a:rPr lang="en-US" sz="2600" b="1" dirty="0">
                 <a:solidFill>
@@ -6035,9 +6876,6 @@
               </a:rPr>
               <a:t>→  </a:t>
             </a:r>
-            <a:pPr indent="0" marL="0">
-              <a:buNone/>
-            </a:pPr>
             <a:r>
               <a:rPr lang="en-US" sz="3000" b="1" dirty="0">
                 <a:solidFill>
@@ -6049,9 +6887,6 @@
               </a:rPr>
               <a:t>&gt;30%</a:t>
             </a:r>
-            <a:pPr indent="0" marL="0">
-              <a:buNone/>
-            </a:pPr>
             <a:r>
               <a:rPr lang="en-US" sz="1250" dirty="0">
                 <a:solidFill>
@@ -6093,6 +6928,13 @@
             <a:prstDash val="solid"/>
           </a:ln>
         </p:spPr>
+        <p:txBody>
+          <a:bodyPr/>
+          <a:lstStyle/>
+          <a:p>
+            <a:endParaRPr lang="en-IN"/>
+          </a:p>
+        </p:txBody>
       </p:sp>
       <p:sp>
         <p:nvSpPr>
@@ -6115,7 +6957,7 @@
           <a:bodyPr wrap="square" lIns="0" tIns="0" rIns="0" bIns="0" rtlCol="0" anchor="ctr"/>
           <a:lstStyle/>
           <a:p>
-            <a:pPr indent="0" marL="0">
+            <a:pPr marL="0" indent="0">
               <a:buNone/>
             </a:pPr>
             <a:r>
@@ -6154,7 +6996,7 @@
           <a:bodyPr wrap="square" lIns="0" tIns="0" rIns="0" bIns="0" rtlCol="0" anchor="t"/>
           <a:lstStyle/>
           <a:p>
-            <a:pPr indent="0" marL="0">
+            <a:pPr marL="0" indent="0">
               <a:lnSpc>
                 <a:spcPct val="106000"/>
               </a:lnSpc>
@@ -6201,6 +7043,13 @@
             <a:prstDash val="solid"/>
           </a:ln>
         </p:spPr>
+        <p:txBody>
+          <a:bodyPr/>
+          <a:lstStyle/>
+          <a:p>
+            <a:endParaRPr lang="en-IN"/>
+          </a:p>
+        </p:txBody>
       </p:sp>
       <p:sp>
         <p:nvSpPr>
@@ -6223,7 +7072,7 @@
           <a:bodyPr wrap="square" lIns="0" tIns="0" rIns="0" bIns="0" rtlCol="0" anchor="ctr"/>
           <a:lstStyle/>
           <a:p>
-            <a:pPr indent="0" marL="0">
+            <a:pPr marL="0" indent="0">
               <a:buNone/>
             </a:pPr>
             <a:r>
@@ -6262,7 +7111,7 @@
           <a:bodyPr wrap="square" lIns="0" tIns="0" rIns="0" bIns="0" rtlCol="0" anchor="t"/>
           <a:lstStyle/>
           <a:p>
-            <a:pPr indent="0" marL="0">
+            <a:pPr marL="0" indent="0">
               <a:lnSpc>
                 <a:spcPct val="106000"/>
               </a:lnSpc>
@@ -6309,6 +7158,13 @@
             <a:prstDash val="solid"/>
           </a:ln>
         </p:spPr>
+        <p:txBody>
+          <a:bodyPr/>
+          <a:lstStyle/>
+          <a:p>
+            <a:endParaRPr lang="en-IN"/>
+          </a:p>
+        </p:txBody>
       </p:sp>
       <p:sp>
         <p:nvSpPr>
@@ -6331,7 +7187,7 @@
           <a:bodyPr wrap="square" lIns="0" tIns="0" rIns="0" bIns="0" rtlCol="0" anchor="ctr"/>
           <a:lstStyle/>
           <a:p>
-            <a:pPr indent="0" marL="0">
+            <a:pPr marL="0" indent="0">
               <a:buNone/>
             </a:pPr>
             <a:r>
@@ -6370,7 +7226,7 @@
           <a:bodyPr wrap="square" lIns="0" tIns="0" rIns="0" bIns="0" rtlCol="0" anchor="t"/>
           <a:lstStyle/>
           <a:p>
-            <a:pPr indent="0" marL="0">
+            <a:pPr marL="0" indent="0">
               <a:lnSpc>
                 <a:spcPct val="106000"/>
               </a:lnSpc>
@@ -6412,7 +7268,7 @@
           <a:bodyPr wrap="square" lIns="0" tIns="0" rIns="0" bIns="0" rtlCol="0" anchor="ctr"/>
           <a:lstStyle/>
           <a:p>
-            <a:pPr indent="0" marL="0">
+            <a:pPr marL="0" indent="0">
               <a:buNone/>
             </a:pPr>
             <a:r>
@@ -6438,7 +7294,7 @@
 </p:sld>
 </file>
 
-<file path=ppt/slides/slide3.xml><?xml version="1.0" encoding="utf-8"?>
+<file path=ppt/slides/slide4.xml><?xml version="1.0" encoding="utf-8"?>
 <p:sld xmlns:a="http://schemas.openxmlformats.org/drawingml/2006/main" xmlns:r="http://schemas.openxmlformats.org/officeDocument/2006/relationships" xmlns:p="http://schemas.openxmlformats.org/presentationml/2006/main">
   <p:cSld name="Slide 3">
     <p:spTree>
@@ -6480,7 +7336,7 @@
           <a:bodyPr wrap="square" lIns="0" tIns="0" rIns="0" bIns="0" rtlCol="0" anchor="ctr"/>
           <a:lstStyle/>
           <a:p>
-            <a:pPr algn="ctr" indent="0" marL="0">
+            <a:pPr marL="0" indent="0" algn="ctr">
               <a:buNone/>
             </a:pPr>
             <a:r>
@@ -6519,7 +7375,7 @@
           <a:bodyPr wrap="square" lIns="0" tIns="0" rIns="0" bIns="0" rtlCol="0" anchor="ctr"/>
           <a:lstStyle/>
           <a:p>
-            <a:pPr indent="0" marL="0">
+            <a:pPr marL="0" indent="0">
               <a:buNone/>
             </a:pPr>
             <a:r>
@@ -6563,6 +7419,13 @@
             <a:prstDash val="solid"/>
           </a:ln>
         </p:spPr>
+        <p:txBody>
+          <a:bodyPr/>
+          <a:lstStyle/>
+          <a:p>
+            <a:endParaRPr lang="en-IN"/>
+          </a:p>
+        </p:txBody>
       </p:sp>
       <p:sp>
         <p:nvSpPr>
@@ -6585,7 +7448,7 @@
           <a:bodyPr wrap="square" lIns="0" tIns="0" rIns="0" bIns="0" rtlCol="0" anchor="ctr"/>
           <a:lstStyle/>
           <a:p>
-            <a:pPr indent="0" marL="0">
+            <a:pPr marL="0" indent="0">
               <a:buNone/>
             </a:pPr>
             <a:r>
@@ -6747,6 +7610,13 @@
             <a:prstDash val="solid"/>
           </a:ln>
         </p:spPr>
+        <p:txBody>
+          <a:bodyPr/>
+          <a:lstStyle/>
+          <a:p>
+            <a:endParaRPr lang="en-IN"/>
+          </a:p>
+        </p:txBody>
       </p:sp>
       <p:sp>
         <p:nvSpPr>
@@ -6769,7 +7639,7 @@
           <a:bodyPr wrap="square" lIns="0" tIns="0" rIns="0" bIns="0" rtlCol="0" anchor="ctr"/>
           <a:lstStyle/>
           <a:p>
-            <a:pPr indent="0" marL="0">
+            <a:pPr marL="0" indent="0">
               <a:buNone/>
             </a:pPr>
             <a:r>
@@ -6931,6 +7801,13 @@
             <a:prstDash val="solid"/>
           </a:ln>
         </p:spPr>
+        <p:txBody>
+          <a:bodyPr/>
+          <a:lstStyle/>
+          <a:p>
+            <a:endParaRPr lang="en-IN"/>
+          </a:p>
+        </p:txBody>
       </p:sp>
       <p:sp>
         <p:nvSpPr>
@@ -6953,7 +7830,7 @@
           <a:bodyPr wrap="square" lIns="0" tIns="0" rIns="0" bIns="0" rtlCol="0" anchor="ctr"/>
           <a:lstStyle/>
           <a:p>
-            <a:pPr indent="0" marL="0">
+            <a:pPr marL="0" indent="0">
               <a:buNone/>
             </a:pPr>
             <a:r>
@@ -7110,7 +7987,7 @@
           <a:bodyPr wrap="square" lIns="0" tIns="0" rIns="0" bIns="0" rtlCol="0" anchor="ctr"/>
           <a:lstStyle/>
           <a:p>
-            <a:pPr indent="0" marL="0">
+            <a:pPr marL="0" indent="0">
               <a:buNone/>
             </a:pPr>
             <a:r>
@@ -7136,7 +8013,7 @@
 </p:sld>
 </file>
 
-<file path=ppt/slides/slide4.xml><?xml version="1.0" encoding="utf-8"?>
+<file path=ppt/slides/slide5.xml><?xml version="1.0" encoding="utf-8"?>
 <p:sld xmlns:a="http://schemas.openxmlformats.org/drawingml/2006/main" xmlns:r="http://schemas.openxmlformats.org/officeDocument/2006/relationships" xmlns:p="http://schemas.openxmlformats.org/presentationml/2006/main">
   <p:cSld name="Slide 4">
     <p:spTree>
@@ -7178,7 +8055,7 @@
           <a:bodyPr wrap="square" lIns="0" tIns="0" rIns="0" bIns="0" rtlCol="0" anchor="ctr"/>
           <a:lstStyle/>
           <a:p>
-            <a:pPr algn="ctr" indent="0" marL="0">
+            <a:pPr marL="0" indent="0" algn="ctr">
               <a:buNone/>
             </a:pPr>
             <a:r>
@@ -7217,7 +8094,7 @@
           <a:bodyPr wrap="square" lIns="0" tIns="0" rIns="0" bIns="0" rtlCol="0" anchor="ctr"/>
           <a:lstStyle/>
           <a:p>
-            <a:pPr indent="0" marL="0">
+            <a:pPr marL="0" indent="0">
               <a:buNone/>
             </a:pPr>
             <a:r>
@@ -7261,6 +8138,13 @@
             <a:prstDash val="solid"/>
           </a:ln>
         </p:spPr>
+        <p:txBody>
+          <a:bodyPr/>
+          <a:lstStyle/>
+          <a:p>
+            <a:endParaRPr lang="en-IN"/>
+          </a:p>
+        </p:txBody>
       </p:sp>
       <p:sp>
         <p:nvSpPr>
@@ -7283,7 +8167,7 @@
           <a:bodyPr wrap="square" lIns="0" tIns="0" rIns="0" bIns="0" rtlCol="0" anchor="ctr"/>
           <a:lstStyle/>
           <a:p>
-            <a:pPr indent="0" marL="0">
+            <a:pPr marL="0" indent="0">
               <a:buNone/>
             </a:pPr>
             <a:r>
@@ -7322,7 +8206,7 @@
           <a:bodyPr wrap="square" lIns="0" tIns="0" rIns="0" bIns="0" rtlCol="0" anchor="t"/>
           <a:lstStyle/>
           <a:p>
-            <a:pPr indent="0" marL="0">
+            <a:pPr marL="0" indent="0">
               <a:lnSpc>
                 <a:spcPct val="104000"/>
               </a:lnSpc>
@@ -7369,6 +8253,13 @@
             <a:prstDash val="solid"/>
           </a:ln>
         </p:spPr>
+        <p:txBody>
+          <a:bodyPr/>
+          <a:lstStyle/>
+          <a:p>
+            <a:endParaRPr lang="en-IN"/>
+          </a:p>
+        </p:txBody>
       </p:sp>
       <p:sp>
         <p:nvSpPr>
@@ -7391,7 +8282,7 @@
           <a:bodyPr wrap="square" lIns="0" tIns="0" rIns="0" bIns="0" rtlCol="0" anchor="ctr"/>
           <a:lstStyle/>
           <a:p>
-            <a:pPr indent="0" marL="0">
+            <a:pPr marL="0" indent="0">
               <a:buNone/>
             </a:pPr>
             <a:r>
@@ -7430,7 +8321,7 @@
           <a:bodyPr wrap="square" lIns="0" tIns="0" rIns="0" bIns="0" rtlCol="0" anchor="t"/>
           <a:lstStyle/>
           <a:p>
-            <a:pPr indent="0" marL="0">
+            <a:pPr marL="0" indent="0">
               <a:lnSpc>
                 <a:spcPct val="104000"/>
               </a:lnSpc>
@@ -7477,6 +8368,13 @@
             <a:prstDash val="solid"/>
           </a:ln>
         </p:spPr>
+        <p:txBody>
+          <a:bodyPr/>
+          <a:lstStyle/>
+          <a:p>
+            <a:endParaRPr lang="en-IN"/>
+          </a:p>
+        </p:txBody>
       </p:sp>
       <p:sp>
         <p:nvSpPr>
@@ -7499,7 +8397,7 @@
           <a:bodyPr wrap="square" lIns="0" tIns="0" rIns="0" bIns="0" rtlCol="0" anchor="ctr"/>
           <a:lstStyle/>
           <a:p>
-            <a:pPr indent="0" marL="0">
+            <a:pPr marL="0" indent="0">
               <a:buNone/>
             </a:pPr>
             <a:r>
@@ -7538,7 +8436,7 @@
           <a:bodyPr wrap="square" lIns="0" tIns="0" rIns="0" bIns="0" rtlCol="0" anchor="t"/>
           <a:lstStyle/>
           <a:p>
-            <a:pPr indent="0" marL="0">
+            <a:pPr marL="0" indent="0">
               <a:lnSpc>
                 <a:spcPct val="104000"/>
               </a:lnSpc>
@@ -7585,6 +8483,13 @@
             <a:prstDash val="solid"/>
           </a:ln>
         </p:spPr>
+        <p:txBody>
+          <a:bodyPr/>
+          <a:lstStyle/>
+          <a:p>
+            <a:endParaRPr lang="en-IN"/>
+          </a:p>
+        </p:txBody>
       </p:sp>
       <p:sp>
         <p:nvSpPr>
@@ -7607,7 +8512,7 @@
           <a:bodyPr wrap="square" lIns="0" tIns="0" rIns="0" bIns="0" rtlCol="0" anchor="ctr"/>
           <a:lstStyle/>
           <a:p>
-            <a:pPr indent="0" marL="0">
+            <a:pPr marL="0" indent="0">
               <a:buNone/>
             </a:pPr>
             <a:r>
@@ -7646,7 +8551,7 @@
           <a:bodyPr wrap="square" lIns="0" tIns="0" rIns="0" bIns="0" rtlCol="0" anchor="t"/>
           <a:lstStyle/>
           <a:p>
-            <a:pPr indent="0" marL="0">
+            <a:pPr marL="0" indent="0">
               <a:lnSpc>
                 <a:spcPct val="104000"/>
               </a:lnSpc>
@@ -7693,6 +8598,13 @@
             <a:prstDash val="solid"/>
           </a:ln>
         </p:spPr>
+        <p:txBody>
+          <a:bodyPr/>
+          <a:lstStyle/>
+          <a:p>
+            <a:endParaRPr lang="en-IN"/>
+          </a:p>
+        </p:txBody>
       </p:sp>
       <p:sp>
         <p:nvSpPr>
@@ -7715,7 +8627,7 @@
           <a:bodyPr wrap="square" lIns="0" tIns="0" rIns="0" bIns="0" rtlCol="0" anchor="ctr"/>
           <a:lstStyle/>
           <a:p>
-            <a:pPr indent="0" marL="0">
+            <a:pPr marL="0" indent="0">
               <a:buNone/>
             </a:pPr>
             <a:r>
@@ -7754,7 +8666,7 @@
           <a:bodyPr wrap="square" lIns="0" tIns="0" rIns="0" bIns="0" rtlCol="0" anchor="t"/>
           <a:lstStyle/>
           <a:p>
-            <a:pPr indent="0" marL="0">
+            <a:pPr marL="0" indent="0">
               <a:lnSpc>
                 <a:spcPct val="104000"/>
               </a:lnSpc>
@@ -7801,6 +8713,13 @@
             <a:prstDash val="solid"/>
           </a:ln>
         </p:spPr>
+        <p:txBody>
+          <a:bodyPr/>
+          <a:lstStyle/>
+          <a:p>
+            <a:endParaRPr lang="en-IN"/>
+          </a:p>
+        </p:txBody>
       </p:sp>
       <p:sp>
         <p:nvSpPr>
@@ -7823,7 +8742,7 @@
           <a:bodyPr wrap="square" lIns="0" tIns="0" rIns="0" bIns="0" rtlCol="0" anchor="ctr"/>
           <a:lstStyle/>
           <a:p>
-            <a:pPr indent="0" marL="0">
+            <a:pPr marL="0" indent="0">
               <a:buNone/>
             </a:pPr>
             <a:r>
@@ -7862,7 +8781,7 @@
           <a:bodyPr wrap="square" lIns="0" tIns="0" rIns="0" bIns="0" rtlCol="0" anchor="t"/>
           <a:lstStyle/>
           <a:p>
-            <a:pPr indent="0" marL="0">
+            <a:pPr marL="0" indent="0">
               <a:lnSpc>
                 <a:spcPct val="104000"/>
               </a:lnSpc>
@@ -7909,6 +8828,13 @@
             <a:prstDash val="solid"/>
           </a:ln>
         </p:spPr>
+        <p:txBody>
+          <a:bodyPr/>
+          <a:lstStyle/>
+          <a:p>
+            <a:endParaRPr lang="en-IN"/>
+          </a:p>
+        </p:txBody>
       </p:sp>
       <p:sp>
         <p:nvSpPr>
@@ -7931,7 +8857,7 @@
           <a:bodyPr wrap="square" lIns="0" tIns="0" rIns="0" bIns="0" rtlCol="0" anchor="ctr"/>
           <a:lstStyle/>
           <a:p>
-            <a:pPr indent="0" marL="0">
+            <a:pPr marL="0" indent="0">
               <a:buNone/>
             </a:pPr>
             <a:r>
@@ -7970,7 +8896,7 @@
           <a:bodyPr wrap="square" lIns="0" tIns="0" rIns="0" bIns="0" rtlCol="0" anchor="t"/>
           <a:lstStyle/>
           <a:p>
-            <a:pPr indent="0" marL="0">
+            <a:pPr marL="0" indent="0">
               <a:lnSpc>
                 <a:spcPct val="104000"/>
               </a:lnSpc>
@@ -8017,6 +8943,13 @@
             <a:prstDash val="solid"/>
           </a:ln>
         </p:spPr>
+        <p:txBody>
+          <a:bodyPr/>
+          <a:lstStyle/>
+          <a:p>
+            <a:endParaRPr lang="en-IN"/>
+          </a:p>
+        </p:txBody>
       </p:sp>
       <p:sp>
         <p:nvSpPr>
@@ -8039,7 +8972,7 @@
           <a:bodyPr wrap="square" lIns="0" tIns="0" rIns="0" bIns="0" rtlCol="0" anchor="ctr"/>
           <a:lstStyle/>
           <a:p>
-            <a:pPr indent="0" marL="0">
+            <a:pPr marL="0" indent="0">
               <a:buNone/>
             </a:pPr>
             <a:r>
@@ -8078,7 +9011,7 @@
           <a:bodyPr wrap="square" lIns="0" tIns="0" rIns="0" bIns="0" rtlCol="0" anchor="t"/>
           <a:lstStyle/>
           <a:p>
-            <a:pPr indent="0" marL="0">
+            <a:pPr marL="0" indent="0">
               <a:lnSpc>
                 <a:spcPct val="104000"/>
               </a:lnSpc>
@@ -8120,7 +9053,7 @@
           <a:bodyPr wrap="square" lIns="0" tIns="0" rIns="0" bIns="0" rtlCol="0" anchor="ctr"/>
           <a:lstStyle/>
           <a:p>
-            <a:pPr indent="0" marL="0">
+            <a:pPr marL="0" indent="0">
               <a:buNone/>
             </a:pPr>
             <a:r>
@@ -8146,7 +9079,7 @@
 </p:sld>
 </file>
 
-<file path=ppt/slides/slide5.xml><?xml version="1.0" encoding="utf-8"?>
+<file path=ppt/slides/slide6.xml><?xml version="1.0" encoding="utf-8"?>
 <p:sld xmlns:a="http://schemas.openxmlformats.org/drawingml/2006/main" xmlns:r="http://schemas.openxmlformats.org/officeDocument/2006/relationships" xmlns:p="http://schemas.openxmlformats.org/presentationml/2006/main">
   <p:cSld name="Slide 5">
     <p:spTree>
@@ -8188,7 +9121,7 @@
           <a:bodyPr wrap="square" lIns="0" tIns="0" rIns="0" bIns="0" rtlCol="0" anchor="ctr"/>
           <a:lstStyle/>
           <a:p>
-            <a:pPr algn="ctr" indent="0" marL="0">
+            <a:pPr marL="0" indent="0" algn="ctr">
               <a:buNone/>
             </a:pPr>
             <a:r>
@@ -8227,7 +9160,7 @@
           <a:bodyPr wrap="square" lIns="0" tIns="0" rIns="0" bIns="0" rtlCol="0" anchor="ctr"/>
           <a:lstStyle/>
           <a:p>
-            <a:pPr indent="0" marL="0">
+            <a:pPr marL="0" indent="0">
               <a:buNone/>
             </a:pPr>
             <a:r>
@@ -8271,6 +9204,13 @@
             <a:prstDash val="solid"/>
           </a:ln>
         </p:spPr>
+        <p:txBody>
+          <a:bodyPr/>
+          <a:lstStyle/>
+          <a:p>
+            <a:endParaRPr lang="en-IN"/>
+          </a:p>
+        </p:txBody>
       </p:sp>
       <p:sp>
         <p:nvSpPr>
@@ -8293,7 +9233,7 @@
           <a:bodyPr wrap="square" lIns="0" tIns="0" rIns="0" bIns="0" rtlCol="0" anchor="ctr"/>
           <a:lstStyle/>
           <a:p>
-            <a:pPr algn="ctr" indent="0" marL="0">
+            <a:pPr marL="0" indent="0" algn="ctr">
               <a:lnSpc>
                 <a:spcPct val="102000"/>
               </a:lnSpc>
@@ -8313,7 +9253,7 @@
             <a:endParaRPr lang="en-US" sz="1200" dirty="0"/>
           </a:p>
           <a:p>
-            <a:pPr algn="ctr" indent="0" marL="0">
+            <a:pPr marL="0" indent="0" algn="ctr">
               <a:lnSpc>
                 <a:spcPct val="102000"/>
               </a:lnSpc>
@@ -8360,6 +9300,13 @@
             <a:prstDash val="solid"/>
           </a:ln>
         </p:spPr>
+        <p:txBody>
+          <a:bodyPr/>
+          <a:lstStyle/>
+          <a:p>
+            <a:endParaRPr lang="en-IN"/>
+          </a:p>
+        </p:txBody>
       </p:sp>
       <p:sp>
         <p:nvSpPr>
@@ -8382,7 +9329,7 @@
           <a:bodyPr wrap="square" lIns="0" tIns="0" rIns="0" bIns="0" rtlCol="0" anchor="ctr"/>
           <a:lstStyle/>
           <a:p>
-            <a:pPr algn="ctr" indent="0" marL="0">
+            <a:pPr marL="0" indent="0" algn="ctr">
               <a:lnSpc>
                 <a:spcPct val="102000"/>
               </a:lnSpc>
@@ -8402,7 +9349,7 @@
             <a:endParaRPr lang="en-US" sz="1200" dirty="0"/>
           </a:p>
           <a:p>
-            <a:pPr algn="ctr" indent="0" marL="0">
+            <a:pPr marL="0" indent="0" algn="ctr">
               <a:lnSpc>
                 <a:spcPct val="102000"/>
               </a:lnSpc>
@@ -8449,6 +9396,13 @@
             <a:prstDash val="solid"/>
           </a:ln>
         </p:spPr>
+        <p:txBody>
+          <a:bodyPr/>
+          <a:lstStyle/>
+          <a:p>
+            <a:endParaRPr lang="en-IN"/>
+          </a:p>
+        </p:txBody>
       </p:sp>
       <p:sp>
         <p:nvSpPr>
@@ -8471,7 +9425,7 @@
           <a:bodyPr wrap="square" lIns="0" tIns="0" rIns="0" bIns="0" rtlCol="0" anchor="ctr"/>
           <a:lstStyle/>
           <a:p>
-            <a:pPr algn="ctr" indent="0" marL="0">
+            <a:pPr marL="0" indent="0" algn="ctr">
               <a:lnSpc>
                 <a:spcPct val="102000"/>
               </a:lnSpc>
@@ -8491,7 +9445,7 @@
             <a:endParaRPr lang="en-US" sz="1200" dirty="0"/>
           </a:p>
           <a:p>
-            <a:pPr algn="ctr" indent="0" marL="0">
+            <a:pPr marL="0" indent="0" algn="ctr">
               <a:lnSpc>
                 <a:spcPct val="102000"/>
               </a:lnSpc>
@@ -8538,6 +9492,13 @@
             <a:prstDash val="solid"/>
           </a:ln>
         </p:spPr>
+        <p:txBody>
+          <a:bodyPr/>
+          <a:lstStyle/>
+          <a:p>
+            <a:endParaRPr lang="en-IN"/>
+          </a:p>
+        </p:txBody>
       </p:sp>
       <p:sp>
         <p:nvSpPr>
@@ -8560,7 +9521,7 @@
           <a:bodyPr wrap="square" lIns="0" tIns="0" rIns="0" bIns="0" rtlCol="0" anchor="ctr"/>
           <a:lstStyle/>
           <a:p>
-            <a:pPr algn="ctr" indent="0" marL="0">
+            <a:pPr marL="0" indent="0" algn="ctr">
               <a:lnSpc>
                 <a:spcPct val="102000"/>
               </a:lnSpc>
@@ -8580,7 +9541,7 @@
             <a:endParaRPr lang="en-US" sz="1200" dirty="0"/>
           </a:p>
           <a:p>
-            <a:pPr algn="ctr" indent="0" marL="0">
+            <a:pPr marL="0" indent="0" algn="ctr">
               <a:lnSpc>
                 <a:spcPct val="102000"/>
               </a:lnSpc>
@@ -8625,6 +9586,13 @@
             <a:prstDash val="solid"/>
           </a:ln>
         </p:spPr>
+        <p:txBody>
+          <a:bodyPr/>
+          <a:lstStyle/>
+          <a:p>
+            <a:endParaRPr lang="en-IN"/>
+          </a:p>
+        </p:txBody>
       </p:sp>
       <p:sp>
         <p:nvSpPr>
@@ -8650,6 +9618,13 @@
             <a:prstDash val="solid"/>
           </a:ln>
         </p:spPr>
+        <p:txBody>
+          <a:bodyPr/>
+          <a:lstStyle/>
+          <a:p>
+            <a:endParaRPr lang="en-IN"/>
+          </a:p>
+        </p:txBody>
       </p:sp>
       <p:sp>
         <p:nvSpPr>
@@ -8675,6 +9650,13 @@
             <a:prstDash val="solid"/>
           </a:ln>
         </p:spPr>
+        <p:txBody>
+          <a:bodyPr/>
+          <a:lstStyle/>
+          <a:p>
+            <a:endParaRPr lang="en-IN"/>
+          </a:p>
+        </p:txBody>
       </p:sp>
       <p:sp>
         <p:nvSpPr>
@@ -8700,6 +9682,13 @@
             <a:prstDash val="solid"/>
           </a:ln>
         </p:spPr>
+        <p:txBody>
+          <a:bodyPr/>
+          <a:lstStyle/>
+          <a:p>
+            <a:endParaRPr lang="en-IN"/>
+          </a:p>
+        </p:txBody>
       </p:sp>
       <p:sp>
         <p:nvSpPr>
@@ -8727,6 +9716,13 @@
             <a:prstDash val="solid"/>
           </a:ln>
         </p:spPr>
+        <p:txBody>
+          <a:bodyPr/>
+          <a:lstStyle/>
+          <a:p>
+            <a:endParaRPr lang="en-IN"/>
+          </a:p>
+        </p:txBody>
       </p:sp>
       <p:sp>
         <p:nvSpPr>
@@ -8749,7 +9745,7 @@
           <a:bodyPr wrap="square" lIns="0" tIns="0" rIns="0" bIns="0" rtlCol="0" anchor="ctr"/>
           <a:lstStyle/>
           <a:p>
-            <a:pPr algn="ctr" indent="0" marL="0">
+            <a:pPr marL="0" indent="0" algn="ctr">
               <a:lnSpc>
                 <a:spcPct val="102000"/>
               </a:lnSpc>
@@ -8769,7 +9765,7 @@
             <a:endParaRPr lang="en-US" sz="1200" dirty="0"/>
           </a:p>
           <a:p>
-            <a:pPr algn="ctr" indent="0" marL="0">
+            <a:pPr marL="0" indent="0" algn="ctr">
               <a:lnSpc>
                 <a:spcPct val="102000"/>
               </a:lnSpc>
@@ -8816,6 +9812,13 @@
             <a:prstDash val="solid"/>
           </a:ln>
         </p:spPr>
+        <p:txBody>
+          <a:bodyPr/>
+          <a:lstStyle/>
+          <a:p>
+            <a:endParaRPr lang="en-IN"/>
+          </a:p>
+        </p:txBody>
       </p:sp>
       <p:sp>
         <p:nvSpPr>
@@ -8838,7 +9841,7 @@
           <a:bodyPr wrap="square" lIns="0" tIns="0" rIns="0" bIns="0" rtlCol="0" anchor="ctr"/>
           <a:lstStyle/>
           <a:p>
-            <a:pPr algn="ctr" indent="0" marL="0">
+            <a:pPr marL="0" indent="0" algn="ctr">
               <a:lnSpc>
                 <a:spcPct val="102000"/>
               </a:lnSpc>
@@ -8858,7 +9861,7 @@
             <a:endParaRPr lang="en-US" sz="1200" dirty="0"/>
           </a:p>
           <a:p>
-            <a:pPr algn="ctr" indent="0" marL="0">
+            <a:pPr marL="0" indent="0" algn="ctr">
               <a:lnSpc>
                 <a:spcPct val="102000"/>
               </a:lnSpc>
@@ -8905,6 +9908,13 @@
             <a:prstDash val="solid"/>
           </a:ln>
         </p:spPr>
+        <p:txBody>
+          <a:bodyPr/>
+          <a:lstStyle/>
+          <a:p>
+            <a:endParaRPr lang="en-IN"/>
+          </a:p>
+        </p:txBody>
       </p:sp>
       <p:sp>
         <p:nvSpPr>
@@ -8927,7 +9937,7 @@
           <a:bodyPr wrap="square" lIns="0" tIns="0" rIns="0" bIns="0" rtlCol="0" anchor="ctr"/>
           <a:lstStyle/>
           <a:p>
-            <a:pPr algn="ctr" indent="0" marL="0">
+            <a:pPr marL="0" indent="0" algn="ctr">
               <a:lnSpc>
                 <a:spcPct val="102000"/>
               </a:lnSpc>
@@ -8947,7 +9957,7 @@
             <a:endParaRPr lang="en-US" sz="1200" dirty="0"/>
           </a:p>
           <a:p>
-            <a:pPr algn="ctr" indent="0" marL="0">
+            <a:pPr marL="0" indent="0" algn="ctr">
               <a:lnSpc>
                 <a:spcPct val="102000"/>
               </a:lnSpc>
@@ -8992,6 +10002,13 @@
             <a:prstDash val="solid"/>
           </a:ln>
         </p:spPr>
+        <p:txBody>
+          <a:bodyPr/>
+          <a:lstStyle/>
+          <a:p>
+            <a:endParaRPr lang="en-IN"/>
+          </a:p>
+        </p:txBody>
       </p:sp>
       <p:sp>
         <p:nvSpPr>
@@ -9017,6 +10034,13 @@
             <a:prstDash val="solid"/>
           </a:ln>
         </p:spPr>
+        <p:txBody>
+          <a:bodyPr/>
+          <a:lstStyle/>
+          <a:p>
+            <a:endParaRPr lang="en-IN"/>
+          </a:p>
+        </p:txBody>
       </p:sp>
       <p:sp>
         <p:nvSpPr>
@@ -9042,6 +10066,13 @@
             <a:prstDash val="solid"/>
           </a:ln>
         </p:spPr>
+        <p:txBody>
+          <a:bodyPr/>
+          <a:lstStyle/>
+          <a:p>
+            <a:endParaRPr lang="en-IN"/>
+          </a:p>
+        </p:txBody>
       </p:sp>
       <p:sp>
         <p:nvSpPr>
@@ -9069,6 +10100,13 @@
             <a:prstDash val="solid"/>
           </a:ln>
         </p:spPr>
+        <p:txBody>
+          <a:bodyPr/>
+          <a:lstStyle/>
+          <a:p>
+            <a:endParaRPr lang="en-IN"/>
+          </a:p>
+        </p:txBody>
       </p:sp>
       <p:sp>
         <p:nvSpPr>
@@ -9091,7 +10129,7 @@
           <a:bodyPr wrap="square" lIns="0" tIns="0" rIns="0" bIns="0" rtlCol="0" anchor="ctr"/>
           <a:lstStyle/>
           <a:p>
-            <a:pPr algn="ctr" indent="0" marL="0">
+            <a:pPr marL="0" indent="0" algn="ctr">
               <a:lnSpc>
                 <a:spcPct val="102000"/>
               </a:lnSpc>
@@ -9111,7 +10149,7 @@
             <a:endParaRPr lang="en-US" sz="1200" dirty="0"/>
           </a:p>
           <a:p>
-            <a:pPr algn="ctr" indent="0" marL="0">
+            <a:pPr marL="0" indent="0" algn="ctr">
               <a:lnSpc>
                 <a:spcPct val="102000"/>
               </a:lnSpc>
@@ -9158,6 +10196,13 @@
             <a:prstDash val="solid"/>
           </a:ln>
         </p:spPr>
+        <p:txBody>
+          <a:bodyPr/>
+          <a:lstStyle/>
+          <a:p>
+            <a:endParaRPr lang="en-IN"/>
+          </a:p>
+        </p:txBody>
       </p:sp>
       <p:sp>
         <p:nvSpPr>
@@ -9180,7 +10225,7 @@
           <a:bodyPr wrap="square" lIns="0" tIns="0" rIns="0" bIns="0" rtlCol="0" anchor="ctr"/>
           <a:lstStyle/>
           <a:p>
-            <a:pPr algn="ctr" indent="0" marL="0">
+            <a:pPr marL="0" indent="0" algn="ctr">
               <a:lnSpc>
                 <a:spcPct val="102000"/>
               </a:lnSpc>
@@ -9200,7 +10245,7 @@
             <a:endParaRPr lang="en-US" sz="1200" dirty="0"/>
           </a:p>
           <a:p>
-            <a:pPr algn="ctr" indent="0" marL="0">
+            <a:pPr marL="0" indent="0" algn="ctr">
               <a:lnSpc>
                 <a:spcPct val="102000"/>
               </a:lnSpc>
@@ -9245,6 +10290,13 @@
             <a:prstDash val="solid"/>
           </a:ln>
         </p:spPr>
+        <p:txBody>
+          <a:bodyPr/>
+          <a:lstStyle/>
+          <a:p>
+            <a:endParaRPr lang="en-IN"/>
+          </a:p>
+        </p:txBody>
       </p:sp>
       <p:sp>
         <p:nvSpPr>
@@ -9267,7 +10319,7 @@
           <a:bodyPr wrap="square" lIns="0" tIns="0" rIns="0" bIns="0" rtlCol="0" anchor="ctr"/>
           <a:lstStyle/>
           <a:p>
-            <a:pPr indent="0" marL="0">
+            <a:pPr marL="0" indent="0">
               <a:buNone/>
             </a:pPr>
             <a:r>
@@ -9306,7 +10358,7 @@
           <a:bodyPr wrap="square" lIns="0" tIns="0" rIns="0" bIns="0" rtlCol="0" anchor="ctr"/>
           <a:lstStyle/>
           <a:p>
-            <a:pPr indent="0" marL="0">
+            <a:pPr marL="0" indent="0">
               <a:buNone/>
             </a:pPr>
             <a:r>
@@ -9332,7 +10384,7 @@
 </p:sld>
 </file>
 
-<file path=ppt/slides/slide6.xml><?xml version="1.0" encoding="utf-8"?>
+<file path=ppt/slides/slide7.xml><?xml version="1.0" encoding="utf-8"?>
 <p:sld xmlns:a="http://schemas.openxmlformats.org/drawingml/2006/main" xmlns:r="http://schemas.openxmlformats.org/officeDocument/2006/relationships" xmlns:p="http://schemas.openxmlformats.org/presentationml/2006/main">
   <p:cSld name="Slide 6">
     <p:spTree>
@@ -9374,7 +10426,7 @@
           <a:bodyPr wrap="square" lIns="0" tIns="0" rIns="0" bIns="0" rtlCol="0" anchor="ctr"/>
           <a:lstStyle/>
           <a:p>
-            <a:pPr algn="ctr" indent="0" marL="0">
+            <a:pPr marL="0" indent="0" algn="ctr">
               <a:buNone/>
             </a:pPr>
             <a:r>
@@ -9413,7 +10465,7 @@
           <a:bodyPr wrap="square" lIns="0" tIns="0" rIns="0" bIns="0" rtlCol="0" anchor="ctr"/>
           <a:lstStyle/>
           <a:p>
-            <a:pPr indent="0" marL="0">
+            <a:pPr marL="0" indent="0">
               <a:buNone/>
             </a:pPr>
             <a:r>
@@ -9433,14 +10485,14 @@
       </p:sp>
       <p:pic>
         <p:nvPicPr>
-          <p:cNvPr id="4" name="Image 0" descr="C:/Users/gokuls/Downloads/prospect-assist-ai/dashboard/snapshots/dashboard_overview.png">    </p:cNvPr>
+          <p:cNvPr id="4" name="Image 0" descr="C:/Users/gokuls/Downloads/prospect-assist-ai/dashboard/snapshots/dashboard_overview.png"/>
           <p:cNvPicPr>
             <a:picLocks noChangeAspect="1"/>
           </p:cNvPicPr>
           <p:nvPr/>
         </p:nvPicPr>
         <p:blipFill>
-          <a:blip r:embed="rId1"/>
+          <a:blip r:embed="rId3"/>
           <a:stretch>
             <a:fillRect/>
           </a:stretch>
@@ -9454,7 +10506,7 @@
             <a:avLst/>
           </a:prstGeom>
           <a:effectLst>
-            <a:outerShdw sx="100000" sy="100000" kx="0" ky="0" algn="bl" rotWithShape="0" blurRad="101600" dist="25400" dir="5400000">
+            <a:outerShdw blurRad="101600" dist="25400" dir="5400000" algn="bl" rotWithShape="0">
               <a:srgbClr val="9AACA6">
                 <a:alpha val="40000"/>
               </a:srgbClr>
@@ -9483,7 +10535,7 @@
           <a:bodyPr wrap="square" lIns="0" tIns="0" rIns="0" bIns="0" rtlCol="0" anchor="ctr"/>
           <a:lstStyle/>
           <a:p>
-            <a:pPr indent="0" marL="0">
+            <a:pPr marL="0" indent="0">
               <a:buNone/>
             </a:pPr>
             <a:r>
@@ -9509,7 +10561,7 @@
 </p:sld>
 </file>
 
-<file path=ppt/slides/slide7.xml><?xml version="1.0" encoding="utf-8"?>
+<file path=ppt/slides/slide8.xml><?xml version="1.0" encoding="utf-8"?>
 <p:sld xmlns:a="http://schemas.openxmlformats.org/drawingml/2006/main" xmlns:r="http://schemas.openxmlformats.org/officeDocument/2006/relationships" xmlns:p="http://schemas.openxmlformats.org/presentationml/2006/main">
   <p:cSld name="Slide 7">
     <p:spTree>
@@ -9551,7 +10603,7 @@
           <a:bodyPr wrap="square" lIns="0" tIns="0" rIns="0" bIns="0" rtlCol="0" anchor="ctr"/>
           <a:lstStyle/>
           <a:p>
-            <a:pPr algn="ctr" indent="0" marL="0">
+            <a:pPr marL="0" indent="0" algn="ctr">
               <a:buNone/>
             </a:pPr>
             <a:r>
@@ -9590,7 +10642,7 @@
           <a:bodyPr wrap="square" lIns="0" tIns="0" rIns="0" bIns="0" rtlCol="0" anchor="ctr"/>
           <a:lstStyle/>
           <a:p>
-            <a:pPr indent="0" marL="0">
+            <a:pPr marL="0" indent="0">
               <a:buNone/>
             </a:pPr>
             <a:r>
@@ -9634,6 +10686,13 @@
             <a:prstDash val="solid"/>
           </a:ln>
         </p:spPr>
+        <p:txBody>
+          <a:bodyPr/>
+          <a:lstStyle/>
+          <a:p>
+            <a:endParaRPr lang="en-IN"/>
+          </a:p>
+        </p:txBody>
       </p:sp>
       <p:sp>
         <p:nvSpPr>
@@ -9656,7 +10715,7 @@
           <a:bodyPr wrap="square" lIns="0" tIns="0" rIns="0" bIns="0" rtlCol="0" anchor="ctr"/>
           <a:lstStyle/>
           <a:p>
-            <a:pPr algn="ctr" indent="0" marL="0">
+            <a:pPr marL="0" indent="0" algn="ctr">
               <a:lnSpc>
                 <a:spcPct val="102000"/>
               </a:lnSpc>
@@ -9676,7 +10735,7 @@
             <a:endParaRPr lang="en-US" sz="1300" dirty="0"/>
           </a:p>
           <a:p>
-            <a:pPr algn="ctr" indent="0" marL="0">
+            <a:pPr marL="0" indent="0" algn="ctr">
               <a:lnSpc>
                 <a:spcPct val="102000"/>
               </a:lnSpc>
@@ -9723,6 +10782,13 @@
             <a:prstDash val="solid"/>
           </a:ln>
         </p:spPr>
+        <p:txBody>
+          <a:bodyPr/>
+          <a:lstStyle/>
+          <a:p>
+            <a:endParaRPr lang="en-IN"/>
+          </a:p>
+        </p:txBody>
       </p:sp>
       <p:sp>
         <p:nvSpPr>
@@ -9745,7 +10811,7 @@
           <a:bodyPr wrap="square" lIns="0" tIns="0" rIns="0" bIns="0" rtlCol="0" anchor="ctr"/>
           <a:lstStyle/>
           <a:p>
-            <a:pPr algn="ctr" indent="0" marL="0">
+            <a:pPr marL="0" indent="0" algn="ctr">
               <a:lnSpc>
                 <a:spcPct val="102000"/>
               </a:lnSpc>
@@ -9765,7 +10831,7 @@
             <a:endParaRPr lang="en-US" sz="1300" dirty="0"/>
           </a:p>
           <a:p>
-            <a:pPr algn="ctr" indent="0" marL="0">
+            <a:pPr marL="0" indent="0" algn="ctr">
               <a:lnSpc>
                 <a:spcPct val="102000"/>
               </a:lnSpc>
@@ -9812,6 +10878,13 @@
             <a:prstDash val="solid"/>
           </a:ln>
         </p:spPr>
+        <p:txBody>
+          <a:bodyPr/>
+          <a:lstStyle/>
+          <a:p>
+            <a:endParaRPr lang="en-IN"/>
+          </a:p>
+        </p:txBody>
       </p:sp>
       <p:sp>
         <p:nvSpPr>
@@ -9834,7 +10907,7 @@
           <a:bodyPr wrap="square" lIns="0" tIns="0" rIns="0" bIns="0" rtlCol="0" anchor="ctr"/>
           <a:lstStyle/>
           <a:p>
-            <a:pPr algn="ctr" indent="0" marL="0">
+            <a:pPr marL="0" indent="0" algn="ctr">
               <a:lnSpc>
                 <a:spcPct val="102000"/>
               </a:lnSpc>
@@ -9854,7 +10927,7 @@
             <a:endParaRPr lang="en-US" sz="1300" dirty="0"/>
           </a:p>
           <a:p>
-            <a:pPr algn="ctr" indent="0" marL="0">
+            <a:pPr marL="0" indent="0" algn="ctr">
               <a:lnSpc>
                 <a:spcPct val="102000"/>
               </a:lnSpc>
@@ -9899,6 +10972,13 @@
             <a:prstDash val="solid"/>
           </a:ln>
         </p:spPr>
+        <p:txBody>
+          <a:bodyPr/>
+          <a:lstStyle/>
+          <a:p>
+            <a:endParaRPr lang="en-IN"/>
+          </a:p>
+        </p:txBody>
       </p:sp>
       <p:sp>
         <p:nvSpPr>
@@ -9924,6 +11004,13 @@
             <a:prstDash val="solid"/>
           </a:ln>
         </p:spPr>
+        <p:txBody>
+          <a:bodyPr/>
+          <a:lstStyle/>
+          <a:p>
+            <a:endParaRPr lang="en-IN"/>
+          </a:p>
+        </p:txBody>
       </p:sp>
       <p:sp>
         <p:nvSpPr>
@@ -9949,6 +11036,13 @@
             <a:prstDash val="solid"/>
           </a:ln>
         </p:spPr>
+        <p:txBody>
+          <a:bodyPr/>
+          <a:lstStyle/>
+          <a:p>
+            <a:endParaRPr lang="en-IN"/>
+          </a:p>
+        </p:txBody>
       </p:sp>
       <p:sp>
         <p:nvSpPr>
@@ -9976,6 +11070,13 @@
             <a:prstDash val="solid"/>
           </a:ln>
         </p:spPr>
+        <p:txBody>
+          <a:bodyPr/>
+          <a:lstStyle/>
+          <a:p>
+            <a:endParaRPr lang="en-IN"/>
+          </a:p>
+        </p:txBody>
       </p:sp>
       <p:sp>
         <p:nvSpPr>
@@ -9998,7 +11099,7 @@
           <a:bodyPr wrap="square" lIns="0" tIns="0" rIns="0" bIns="0" rtlCol="0" anchor="ctr"/>
           <a:lstStyle/>
           <a:p>
-            <a:pPr algn="ctr" indent="0" marL="0">
+            <a:pPr marL="0" indent="0" algn="ctr">
               <a:lnSpc>
                 <a:spcPct val="102000"/>
               </a:lnSpc>
@@ -10018,7 +11119,7 @@
             <a:endParaRPr lang="en-US" sz="1300" dirty="0"/>
           </a:p>
           <a:p>
-            <a:pPr algn="ctr" indent="0" marL="0">
+            <a:pPr marL="0" indent="0" algn="ctr">
               <a:lnSpc>
                 <a:spcPct val="102000"/>
               </a:lnSpc>
@@ -10065,6 +11166,13 @@
             <a:prstDash val="solid"/>
           </a:ln>
         </p:spPr>
+        <p:txBody>
+          <a:bodyPr/>
+          <a:lstStyle/>
+          <a:p>
+            <a:endParaRPr lang="en-IN"/>
+          </a:p>
+        </p:txBody>
       </p:sp>
       <p:sp>
         <p:nvSpPr>
@@ -10087,7 +11195,7 @@
           <a:bodyPr wrap="square" lIns="0" tIns="0" rIns="0" bIns="0" rtlCol="0" anchor="ctr"/>
           <a:lstStyle/>
           <a:p>
-            <a:pPr algn="ctr" indent="0" marL="0">
+            <a:pPr marL="0" indent="0" algn="ctr">
               <a:lnSpc>
                 <a:spcPct val="102000"/>
               </a:lnSpc>
@@ -10107,7 +11215,7 @@
             <a:endParaRPr lang="en-US" sz="1300" dirty="0"/>
           </a:p>
           <a:p>
-            <a:pPr algn="ctr" indent="0" marL="0">
+            <a:pPr marL="0" indent="0" algn="ctr">
               <a:lnSpc>
                 <a:spcPct val="102000"/>
               </a:lnSpc>
@@ -10154,6 +11262,13 @@
             <a:prstDash val="solid"/>
           </a:ln>
         </p:spPr>
+        <p:txBody>
+          <a:bodyPr/>
+          <a:lstStyle/>
+          <a:p>
+            <a:endParaRPr lang="en-IN"/>
+          </a:p>
+        </p:txBody>
       </p:sp>
       <p:sp>
         <p:nvSpPr>
@@ -10176,7 +11291,7 @@
           <a:bodyPr wrap="square" lIns="0" tIns="0" rIns="0" bIns="0" rtlCol="0" anchor="ctr"/>
           <a:lstStyle/>
           <a:p>
-            <a:pPr algn="ctr" indent="0" marL="0">
+            <a:pPr marL="0" indent="0" algn="ctr">
               <a:lnSpc>
                 <a:spcPct val="102000"/>
               </a:lnSpc>
@@ -10196,7 +11311,7 @@
             <a:endParaRPr lang="en-US" sz="1300" dirty="0"/>
           </a:p>
           <a:p>
-            <a:pPr algn="ctr" indent="0" marL="0">
+            <a:pPr marL="0" indent="0" algn="ctr">
               <a:lnSpc>
                 <a:spcPct val="102000"/>
               </a:lnSpc>
@@ -10241,6 +11356,13 @@
             <a:prstDash val="solid"/>
           </a:ln>
         </p:spPr>
+        <p:txBody>
+          <a:bodyPr/>
+          <a:lstStyle/>
+          <a:p>
+            <a:endParaRPr lang="en-IN"/>
+          </a:p>
+        </p:txBody>
       </p:sp>
       <p:sp>
         <p:nvSpPr>
@@ -10266,6 +11388,13 @@
             <a:prstDash val="solid"/>
           </a:ln>
         </p:spPr>
+        <p:txBody>
+          <a:bodyPr/>
+          <a:lstStyle/>
+          <a:p>
+            <a:endParaRPr lang="en-IN"/>
+          </a:p>
+        </p:txBody>
       </p:sp>
       <p:sp>
         <p:nvSpPr>
@@ -10293,6 +11422,13 @@
             <a:prstDash val="solid"/>
           </a:ln>
         </p:spPr>
+        <p:txBody>
+          <a:bodyPr/>
+          <a:lstStyle/>
+          <a:p>
+            <a:endParaRPr lang="en-IN"/>
+          </a:p>
+        </p:txBody>
       </p:sp>
       <p:sp>
         <p:nvSpPr>
@@ -10315,7 +11451,7 @@
           <a:bodyPr wrap="square" lIns="0" tIns="0" rIns="0" bIns="0" rtlCol="0" anchor="ctr"/>
           <a:lstStyle/>
           <a:p>
-            <a:pPr indent="0" marL="0">
+            <a:pPr marL="0" indent="0">
               <a:buNone/>
             </a:pPr>
             <a:r>
@@ -10329,9 +11465,6 @@
               </a:rPr>
               <a:t>Consent service — </a:t>
             </a:r>
-            <a:pPr indent="0" marL="0">
-              <a:buNone/>
-            </a:pPr>
             <a:r>
               <a:rPr lang="en-US" sz="1100" dirty="0">
                 <a:solidFill>
@@ -10373,6 +11506,13 @@
             <a:prstDash val="solid"/>
           </a:ln>
         </p:spPr>
+        <p:txBody>
+          <a:bodyPr/>
+          <a:lstStyle/>
+          <a:p>
+            <a:endParaRPr lang="en-IN"/>
+          </a:p>
+        </p:txBody>
       </p:sp>
       <p:sp>
         <p:nvSpPr>
@@ -10395,7 +11535,7 @@
           <a:bodyPr wrap="square" lIns="0" tIns="0" rIns="0" bIns="0" rtlCol="0" anchor="ctr"/>
           <a:lstStyle/>
           <a:p>
-            <a:pPr indent="0" marL="0">
+            <a:pPr marL="0" indent="0">
               <a:buNone/>
             </a:pPr>
             <a:r>
@@ -10409,9 +11549,6 @@
               </a:rPr>
               <a:t>Persistence — </a:t>
             </a:r>
-            <a:pPr indent="0" marL="0">
-              <a:buNone/>
-            </a:pPr>
             <a:r>
               <a:rPr lang="en-US" sz="1100" dirty="0">
                 <a:solidFill>
@@ -10448,7 +11585,7 @@
           <a:bodyPr wrap="square" lIns="0" tIns="0" rIns="0" bIns="0" rtlCol="0" anchor="ctr"/>
           <a:lstStyle/>
           <a:p>
-            <a:pPr indent="0" marL="0">
+            <a:pPr marL="0" indent="0">
               <a:buNone/>
             </a:pPr>
             <a:r>
@@ -10474,7 +11611,7 @@
 </p:sld>
 </file>
 
-<file path=ppt/slides/slide8.xml><?xml version="1.0" encoding="utf-8"?>
+<file path=ppt/slides/slide9.xml><?xml version="1.0" encoding="utf-8"?>
 <p:sld xmlns:a="http://schemas.openxmlformats.org/drawingml/2006/main" xmlns:r="http://schemas.openxmlformats.org/officeDocument/2006/relationships" xmlns:p="http://schemas.openxmlformats.org/presentationml/2006/main">
   <p:cSld name="Slide 8">
     <p:spTree>
@@ -10516,7 +11653,7 @@
           <a:bodyPr wrap="square" lIns="0" tIns="0" rIns="0" bIns="0" rtlCol="0" anchor="ctr"/>
           <a:lstStyle/>
           <a:p>
-            <a:pPr algn="ctr" indent="0" marL="0">
+            <a:pPr marL="0" indent="0" algn="ctr">
               <a:buNone/>
             </a:pPr>
             <a:r>
@@ -10555,7 +11692,7 @@
           <a:bodyPr wrap="square" lIns="0" tIns="0" rIns="0" bIns="0" rtlCol="0" anchor="ctr"/>
           <a:lstStyle/>
           <a:p>
-            <a:pPr indent="0" marL="0">
+            <a:pPr marL="0" indent="0">
               <a:buNone/>
             </a:pPr>
             <a:r>
@@ -10599,6 +11736,13 @@
             <a:prstDash val="solid"/>
           </a:ln>
         </p:spPr>
+        <p:txBody>
+          <a:bodyPr/>
+          <a:lstStyle/>
+          <a:p>
+            <a:endParaRPr lang="en-IN"/>
+          </a:p>
+        </p:txBody>
       </p:sp>
       <p:sp>
         <p:nvSpPr>
@@ -10621,7 +11765,7 @@
           <a:bodyPr wrap="square" lIns="0" tIns="0" rIns="0" bIns="0" rtlCol="0" anchor="ctr"/>
           <a:lstStyle/>
           <a:p>
-            <a:pPr indent="0" marL="0">
+            <a:pPr marL="0" indent="0">
               <a:buNone/>
             </a:pPr>
             <a:r>
@@ -10807,6 +11951,13 @@
             <a:prstDash val="solid"/>
           </a:ln>
         </p:spPr>
+        <p:txBody>
+          <a:bodyPr/>
+          <a:lstStyle/>
+          <a:p>
+            <a:endParaRPr lang="en-IN"/>
+          </a:p>
+        </p:txBody>
       </p:sp>
       <p:sp>
         <p:nvSpPr>
@@ -10829,7 +11980,7 @@
           <a:bodyPr wrap="square" lIns="0" tIns="0" rIns="0" bIns="0" rtlCol="0" anchor="ctr"/>
           <a:lstStyle/>
           <a:p>
-            <a:pPr indent="0" marL="0">
+            <a:pPr marL="0" indent="0">
               <a:buNone/>
             </a:pPr>
             <a:r>
@@ -11010,633 +12161,7 @@
           <a:bodyPr wrap="square" lIns="0" tIns="0" rIns="0" bIns="0" rtlCol="0" anchor="ctr"/>
           <a:lstStyle/>
           <a:p>
-            <a:pPr indent="0" marL="0">
-              <a:buNone/>
-            </a:pPr>
-            <a:r>
-              <a:rPr lang="en-US" sz="900" dirty="0">
-                <a:solidFill>
-                  <a:srgbClr val="55645F"/>
-                </a:solidFill>
-                <a:latin typeface="Calibri" pitchFamily="34" charset="0"/>
-                <a:ea typeface="Calibri" pitchFamily="34" charset="-122"/>
-                <a:cs typeface="Calibri" pitchFamily="34" charset="-120"/>
-              </a:rPr>
-              <a:t>Prospect Assist AI · IDBI Innovate 2026 · Track 2</a:t>
-            </a:r>
-            <a:endParaRPr lang="en-US" sz="900" dirty="0"/>
-          </a:p>
-        </p:txBody>
-      </p:sp>
-    </p:spTree>
-  </p:cSld>
-  <p:clrMapOvr>
-    <a:masterClrMapping/>
-  </p:clrMapOvr>
-</p:sld>
-</file>
-
-<file path=ppt/slides/slide9.xml><?xml version="1.0" encoding="utf-8"?>
-<p:sld xmlns:a="http://schemas.openxmlformats.org/drawingml/2006/main" xmlns:r="http://schemas.openxmlformats.org/officeDocument/2006/relationships" xmlns:p="http://schemas.openxmlformats.org/presentationml/2006/main">
-  <p:cSld name="Slide 9">
-    <p:spTree>
-      <p:nvGrpSpPr>
-        <p:cNvPr id="1" name=""/>
-        <p:cNvGrpSpPr/>
-        <p:nvPr/>
-      </p:nvGrpSpPr>
-      <p:grpSpPr>
-        <a:xfrm>
-          <a:off x="0" y="0"/>
-          <a:ext cx="0" cy="0"/>
-          <a:chOff x="0" y="0"/>
-          <a:chExt cx="0" cy="0"/>
-        </a:xfrm>
-      </p:grpSpPr>
-      <p:sp>
-        <p:nvSpPr>
-          <p:cNvPr id="2" name="Text 0"/>
-          <p:cNvSpPr/>
-          <p:nvPr/>
-        </p:nvSpPr>
-        <p:spPr>
-          <a:xfrm>
-            <a:off x="502920" y="347472"/>
-            <a:ext cx="1417320" cy="292608"/>
-          </a:xfrm>
-          <a:prstGeom prst="roundRect">
-            <a:avLst>
-              <a:gd name="adj" fmla="val 50000"/>
-            </a:avLst>
-          </a:prstGeom>
-          <a:solidFill>
-            <a:srgbClr val="00584C"/>
-          </a:solidFill>
-          <a:ln/>
-        </p:spPr>
-        <p:txBody>
-          <a:bodyPr wrap="square" lIns="0" tIns="0" rIns="0" bIns="0" rtlCol="0" anchor="ctr"/>
-          <a:lstStyle/>
-          <a:p>
-            <a:pPr algn="ctr" indent="0" marL="0">
-              <a:buNone/>
-            </a:pPr>
-            <a:r>
-              <a:rPr lang="en-US" sz="1100" b="1" dirty="0">
-                <a:solidFill>
-                  <a:srgbClr val="FFFFFF"/>
-                </a:solidFill>
-                <a:latin typeface="Calibri" pitchFamily="34" charset="0"/>
-                <a:ea typeface="Calibri" pitchFamily="34" charset="-122"/>
-                <a:cs typeface="Calibri" pitchFamily="34" charset="-120"/>
-              </a:rPr>
-              <a:t>09 · COST</a:t>
-            </a:r>
-            <a:endParaRPr lang="en-US" sz="1100" dirty="0"/>
-          </a:p>
-        </p:txBody>
-      </p:sp>
-      <p:sp>
-        <p:nvSpPr>
-          <p:cNvPr id="3" name="Text 1"/>
-          <p:cNvSpPr/>
-          <p:nvPr/>
-        </p:nvSpPr>
-        <p:spPr>
-          <a:xfrm>
-            <a:off x="502920" y="713232"/>
-            <a:ext cx="11183112" cy="566928"/>
-          </a:xfrm>
-          <a:prstGeom prst="rect">
-            <a:avLst/>
-          </a:prstGeom>
-          <a:noFill/>
-          <a:ln/>
-        </p:spPr>
-        <p:txBody>
-          <a:bodyPr wrap="square" lIns="0" tIns="0" rIns="0" bIns="0" rtlCol="0" anchor="ctr"/>
-          <a:lstStyle/>
-          <a:p>
-            <a:pPr indent="0" marL="0">
-              <a:buNone/>
-            </a:pPr>
-            <a:r>
-              <a:rPr lang="en-US" sz="2800" b="1" dirty="0">
-                <a:solidFill>
-                  <a:srgbClr val="0E201B"/>
-                </a:solidFill>
-                <a:latin typeface="Arial" pitchFamily="34" charset="0"/>
-                <a:ea typeface="Arial" pitchFamily="34" charset="-122"/>
-                <a:cs typeface="Arial" pitchFamily="34" charset="-120"/>
-              </a:rPr>
-              <a:t>Estimated implementation cost (indicative)</a:t>
-            </a:r>
-            <a:endParaRPr lang="en-US" sz="2800" dirty="0"/>
-          </a:p>
-        </p:txBody>
-      </p:sp>
-      <p:sp>
-        <p:nvSpPr>
-          <p:cNvPr id="4" name="Shape 2"/>
-          <p:cNvSpPr/>
-          <p:nvPr/>
-        </p:nvSpPr>
-        <p:spPr>
-          <a:xfrm>
-            <a:off x="502920" y="1600200"/>
-            <a:ext cx="11183112" cy="1389888"/>
-          </a:xfrm>
-          <a:prstGeom prst="roundRect">
-            <a:avLst>
-              <a:gd name="adj" fmla="val 5921"/>
-            </a:avLst>
-          </a:prstGeom>
-          <a:solidFill>
-            <a:srgbClr val="EAF4F1"/>
-          </a:solidFill>
-          <a:ln w="12700">
-            <a:solidFill>
-              <a:srgbClr val="EAF4F1"/>
-            </a:solidFill>
-            <a:prstDash val="solid"/>
-          </a:ln>
-        </p:spPr>
-      </p:sp>
-      <p:sp>
-        <p:nvSpPr>
-          <p:cNvPr id="5" name="Text 3"/>
-          <p:cNvSpPr/>
-          <p:nvPr/>
-        </p:nvSpPr>
-        <p:spPr>
-          <a:xfrm>
-            <a:off x="777240" y="1746504"/>
-            <a:ext cx="3291840" cy="365760"/>
-          </a:xfrm>
-          <a:prstGeom prst="rect">
-            <a:avLst/>
-          </a:prstGeom>
-          <a:noFill/>
-          <a:ln/>
-        </p:spPr>
-        <p:txBody>
-          <a:bodyPr wrap="square" lIns="0" tIns="0" rIns="0" bIns="0" rtlCol="0" anchor="ctr"/>
-          <a:lstStyle/>
-          <a:p>
-            <a:pPr indent="0" marL="0">
-              <a:buNone/>
-            </a:pPr>
-            <a:r>
-              <a:rPr lang="en-US" sz="1400" b="1" dirty="0">
-                <a:solidFill>
-                  <a:srgbClr val="0E201B"/>
-                </a:solidFill>
-                <a:latin typeface="Arial" pitchFamily="34" charset="0"/>
-                <a:ea typeface="Arial" pitchFamily="34" charset="-122"/>
-                <a:cs typeface="Arial" pitchFamily="34" charset="-120"/>
-              </a:rPr>
-              <a:t>Phase 1 — Prototype</a:t>
-            </a:r>
-            <a:endParaRPr lang="en-US" sz="1400" dirty="0"/>
-          </a:p>
-        </p:txBody>
-      </p:sp>
-      <p:sp>
-        <p:nvSpPr>
-          <p:cNvPr id="6" name="Text 4"/>
-          <p:cNvSpPr/>
-          <p:nvPr/>
-        </p:nvSpPr>
-        <p:spPr>
-          <a:xfrm>
-            <a:off x="777240" y="2148840"/>
-            <a:ext cx="3291840" cy="502920"/>
-          </a:xfrm>
-          <a:prstGeom prst="rect">
-            <a:avLst/>
-          </a:prstGeom>
-          <a:noFill/>
-          <a:ln/>
-        </p:spPr>
-        <p:txBody>
-          <a:bodyPr wrap="square" lIns="0" tIns="0" rIns="0" bIns="0" rtlCol="0" anchor="ctr"/>
-          <a:lstStyle/>
-          <a:p>
-            <a:pPr indent="0" marL="0">
-              <a:buNone/>
-            </a:pPr>
-            <a:r>
-              <a:rPr lang="en-US" sz="1900" b="1" dirty="0">
-                <a:solidFill>
-                  <a:srgbClr val="00584C"/>
-                </a:solidFill>
-                <a:latin typeface="Arial" pitchFamily="34" charset="0"/>
-                <a:ea typeface="Arial" pitchFamily="34" charset="-122"/>
-                <a:cs typeface="Arial" pitchFamily="34" charset="-120"/>
-              </a:rPr>
-              <a:t>₹0 infrastructure</a:t>
-            </a:r>
-            <a:endParaRPr lang="en-US" sz="1900" dirty="0"/>
-          </a:p>
-        </p:txBody>
-      </p:sp>
-      <p:sp>
-        <p:nvSpPr>
-          <p:cNvPr id="7" name="Text 5"/>
-          <p:cNvSpPr/>
-          <p:nvPr/>
-        </p:nvSpPr>
-        <p:spPr>
-          <a:xfrm>
-            <a:off x="4343400" y="1746504"/>
-            <a:ext cx="7223760" cy="1097280"/>
-          </a:xfrm>
-          <a:prstGeom prst="rect">
-            <a:avLst/>
-          </a:prstGeom>
-          <a:noFill/>
-          <a:ln/>
-        </p:spPr>
-        <p:txBody>
-          <a:bodyPr wrap="square" lIns="0" tIns="0" rIns="0" bIns="0" rtlCol="0" anchor="ctr"/>
-          <a:lstStyle/>
-          <a:p>
-            <a:pPr indent="0" marL="0">
-              <a:lnSpc>
-                <a:spcPct val="108000"/>
-              </a:lnSpc>
-              <a:buNone/>
-            </a:pPr>
-            <a:r>
-              <a:rPr lang="en-US" sz="1200" dirty="0">
-                <a:solidFill>
-                  <a:srgbClr val="55645F"/>
-                </a:solidFill>
-                <a:latin typeface="Calibri" pitchFamily="34" charset="0"/>
-                <a:ea typeface="Calibri" pitchFamily="34" charset="-122"/>
-                <a:cs typeface="Calibri" pitchFamily="34" charset="-120"/>
-              </a:rPr>
-              <a:t>Runs locally against the synthetic sandbox; no cloud spend, no licensed data. Already built.</a:t>
-            </a:r>
-            <a:endParaRPr lang="en-US" sz="1200" dirty="0"/>
-          </a:p>
-        </p:txBody>
-      </p:sp>
-      <p:sp>
-        <p:nvSpPr>
-          <p:cNvPr id="8" name="Shape 6"/>
-          <p:cNvSpPr/>
-          <p:nvPr/>
-        </p:nvSpPr>
-        <p:spPr>
-          <a:xfrm>
-            <a:off x="502920" y="3136392"/>
-            <a:ext cx="11183112" cy="1389888"/>
-          </a:xfrm>
-          <a:prstGeom prst="roundRect">
-            <a:avLst>
-              <a:gd name="adj" fmla="val 5921"/>
-            </a:avLst>
-          </a:prstGeom>
-          <a:solidFill>
-            <a:srgbClr val="EAF4F1"/>
-          </a:solidFill>
-          <a:ln w="12700">
-            <a:solidFill>
-              <a:srgbClr val="EAF4F1"/>
-            </a:solidFill>
-            <a:prstDash val="solid"/>
-          </a:ln>
-        </p:spPr>
-      </p:sp>
-      <p:sp>
-        <p:nvSpPr>
-          <p:cNvPr id="9" name="Text 7"/>
-          <p:cNvSpPr/>
-          <p:nvPr/>
-        </p:nvSpPr>
-        <p:spPr>
-          <a:xfrm>
-            <a:off x="777240" y="3282696"/>
-            <a:ext cx="3291840" cy="365760"/>
-          </a:xfrm>
-          <a:prstGeom prst="rect">
-            <a:avLst/>
-          </a:prstGeom>
-          <a:noFill/>
-          <a:ln/>
-        </p:spPr>
-        <p:txBody>
-          <a:bodyPr wrap="square" lIns="0" tIns="0" rIns="0" bIns="0" rtlCol="0" anchor="ctr"/>
-          <a:lstStyle/>
-          <a:p>
-            <a:pPr indent="0" marL="0">
-              <a:buNone/>
-            </a:pPr>
-            <a:r>
-              <a:rPr lang="en-US" sz="1400" b="1" dirty="0">
-                <a:solidFill>
-                  <a:srgbClr val="0E201B"/>
-                </a:solidFill>
-                <a:latin typeface="Arial" pitchFamily="34" charset="0"/>
-                <a:ea typeface="Arial" pitchFamily="34" charset="-122"/>
-                <a:cs typeface="Arial" pitchFamily="34" charset="-120"/>
-              </a:rPr>
-              <a:t>Phase 2 — Bank-sandbox pilot</a:t>
-            </a:r>
-            <a:endParaRPr lang="en-US" sz="1400" dirty="0"/>
-          </a:p>
-        </p:txBody>
-      </p:sp>
-      <p:sp>
-        <p:nvSpPr>
-          <p:cNvPr id="10" name="Text 8"/>
-          <p:cNvSpPr/>
-          <p:nvPr/>
-        </p:nvSpPr>
-        <p:spPr>
-          <a:xfrm>
-            <a:off x="777240" y="3685032"/>
-            <a:ext cx="3291840" cy="502920"/>
-          </a:xfrm>
-          <a:prstGeom prst="rect">
-            <a:avLst/>
-          </a:prstGeom>
-          <a:noFill/>
-          <a:ln/>
-        </p:spPr>
-        <p:txBody>
-          <a:bodyPr wrap="square" lIns="0" tIns="0" rIns="0" bIns="0" rtlCol="0" anchor="ctr"/>
-          <a:lstStyle/>
-          <a:p>
-            <a:pPr indent="0" marL="0">
-              <a:buNone/>
-            </a:pPr>
-            <a:r>
-              <a:rPr lang="en-US" sz="1900" b="1" dirty="0">
-                <a:solidFill>
-                  <a:srgbClr val="C77700"/>
-                </a:solidFill>
-                <a:latin typeface="Arial" pitchFamily="34" charset="0"/>
-                <a:ea typeface="Arial" pitchFamily="34" charset="-122"/>
-                <a:cs typeface="Arial" pitchFamily="34" charset="-120"/>
-              </a:rPr>
-              <a:t>≈ ₹40k–60k / month</a:t>
-            </a:r>
-            <a:endParaRPr lang="en-US" sz="1900" dirty="0"/>
-          </a:p>
-        </p:txBody>
-      </p:sp>
-      <p:sp>
-        <p:nvSpPr>
-          <p:cNvPr id="11" name="Text 9"/>
-          <p:cNvSpPr/>
-          <p:nvPr/>
-        </p:nvSpPr>
-        <p:spPr>
-          <a:xfrm>
-            <a:off x="4343400" y="3282696"/>
-            <a:ext cx="7223760" cy="1097280"/>
-          </a:xfrm>
-          <a:prstGeom prst="rect">
-            <a:avLst/>
-          </a:prstGeom>
-          <a:noFill/>
-          <a:ln/>
-        </p:spPr>
-        <p:txBody>
-          <a:bodyPr wrap="square" lIns="0" tIns="0" rIns="0" bIns="0" rtlCol="0" anchor="ctr"/>
-          <a:lstStyle/>
-          <a:p>
-            <a:pPr indent="0" marL="0">
-              <a:lnSpc>
-                <a:spcPct val="108000"/>
-              </a:lnSpc>
-              <a:buNone/>
-            </a:pPr>
-            <a:r>
-              <a:rPr lang="en-US" sz="1200" dirty="0">
-                <a:solidFill>
-                  <a:srgbClr val="55645F"/>
-                </a:solidFill>
-                <a:latin typeface="Calibri" pitchFamily="34" charset="0"/>
-                <a:ea typeface="Calibri" pitchFamily="34" charset="-122"/>
-                <a:cs typeface="Calibri" pitchFamily="34" charset="-120"/>
-              </a:rPr>
-              <a:t>Containerized API + dashboard on AWS (ECS/Fargate, RDS PostgreSQL, ElastiCache, monitoring); IDBI sandbox data via connector swap.</a:t>
-            </a:r>
-            <a:endParaRPr lang="en-US" sz="1200" dirty="0"/>
-          </a:p>
-        </p:txBody>
-      </p:sp>
-      <p:sp>
-        <p:nvSpPr>
-          <p:cNvPr id="12" name="Shape 10"/>
-          <p:cNvSpPr/>
-          <p:nvPr/>
-        </p:nvSpPr>
-        <p:spPr>
-          <a:xfrm>
-            <a:off x="502920" y="4672584"/>
-            <a:ext cx="11183112" cy="1389888"/>
-          </a:xfrm>
-          <a:prstGeom prst="roundRect">
-            <a:avLst>
-              <a:gd name="adj" fmla="val 5921"/>
-            </a:avLst>
-          </a:prstGeom>
-          <a:solidFill>
-            <a:srgbClr val="EAF4F1"/>
-          </a:solidFill>
-          <a:ln w="12700">
-            <a:solidFill>
-              <a:srgbClr val="EAF4F1"/>
-            </a:solidFill>
-            <a:prstDash val="solid"/>
-          </a:ln>
-        </p:spPr>
-      </p:sp>
-      <p:sp>
-        <p:nvSpPr>
-          <p:cNvPr id="13" name="Text 11"/>
-          <p:cNvSpPr/>
-          <p:nvPr/>
-        </p:nvSpPr>
-        <p:spPr>
-          <a:xfrm>
-            <a:off x="777240" y="4818888"/>
-            <a:ext cx="3291840" cy="365760"/>
-          </a:xfrm>
-          <a:prstGeom prst="rect">
-            <a:avLst/>
-          </a:prstGeom>
-          <a:noFill/>
-          <a:ln/>
-        </p:spPr>
-        <p:txBody>
-          <a:bodyPr wrap="square" lIns="0" tIns="0" rIns="0" bIns="0" rtlCol="0" anchor="ctr"/>
-          <a:lstStyle/>
-          <a:p>
-            <a:pPr indent="0" marL="0">
-              <a:buNone/>
-            </a:pPr>
-            <a:r>
-              <a:rPr lang="en-US" sz="1400" b="1" dirty="0">
-                <a:solidFill>
-                  <a:srgbClr val="0E201B"/>
-                </a:solidFill>
-                <a:latin typeface="Arial" pitchFamily="34" charset="0"/>
-                <a:ea typeface="Arial" pitchFamily="34" charset="-122"/>
-                <a:cs typeface="Arial" pitchFamily="34" charset="-120"/>
-              </a:rPr>
-              <a:t>Phase 3 — Production</a:t>
-            </a:r>
-            <a:endParaRPr lang="en-US" sz="1400" dirty="0"/>
-          </a:p>
-        </p:txBody>
-      </p:sp>
-      <p:sp>
-        <p:nvSpPr>
-          <p:cNvPr id="14" name="Text 12"/>
-          <p:cNvSpPr/>
-          <p:nvPr/>
-        </p:nvSpPr>
-        <p:spPr>
-          <a:xfrm>
-            <a:off x="777240" y="5221224"/>
-            <a:ext cx="3291840" cy="502920"/>
-          </a:xfrm>
-          <a:prstGeom prst="rect">
-            <a:avLst/>
-          </a:prstGeom>
-          <a:noFill/>
-          <a:ln/>
-        </p:spPr>
-        <p:txBody>
-          <a:bodyPr wrap="square" lIns="0" tIns="0" rIns="0" bIns="0" rtlCol="0" anchor="ctr"/>
-          <a:lstStyle/>
-          <a:p>
-            <a:pPr indent="0" marL="0">
-              <a:buNone/>
-            </a:pPr>
-            <a:r>
-              <a:rPr lang="en-US" sz="1900" b="1" dirty="0">
-                <a:solidFill>
-                  <a:srgbClr val="2E7D6B"/>
-                </a:solidFill>
-                <a:latin typeface="Arial" pitchFamily="34" charset="0"/>
-                <a:ea typeface="Arial" pitchFamily="34" charset="-122"/>
-                <a:cs typeface="Arial" pitchFamily="34" charset="-120"/>
-              </a:rPr>
-              <a:t>Usage-based</a:t>
-            </a:r>
-            <a:endParaRPr lang="en-US" sz="1900" dirty="0"/>
-          </a:p>
-        </p:txBody>
-      </p:sp>
-      <p:sp>
-        <p:nvSpPr>
-          <p:cNvPr id="15" name="Text 13"/>
-          <p:cNvSpPr/>
-          <p:nvPr/>
-        </p:nvSpPr>
-        <p:spPr>
-          <a:xfrm>
-            <a:off x="4343400" y="4818888"/>
-            <a:ext cx="7223760" cy="1097280"/>
-          </a:xfrm>
-          <a:prstGeom prst="rect">
-            <a:avLst/>
-          </a:prstGeom>
-          <a:noFill/>
-          <a:ln/>
-        </p:spPr>
-        <p:txBody>
-          <a:bodyPr wrap="square" lIns="0" tIns="0" rIns="0" bIns="0" rtlCol="0" anchor="ctr"/>
-          <a:lstStyle/>
-          <a:p>
-            <a:pPr indent="0" marL="0">
-              <a:lnSpc>
-                <a:spcPct val="108000"/>
-              </a:lnSpc>
-              <a:buNone/>
-            </a:pPr>
-            <a:r>
-              <a:rPr lang="en-US" sz="1200" dirty="0">
-                <a:solidFill>
-                  <a:srgbClr val="55645F"/>
-                </a:solidFill>
-                <a:latin typeface="Calibri" pitchFamily="34" charset="0"/>
-                <a:ea typeface="Calibri" pitchFamily="34" charset="-122"/>
-                <a:cs typeface="Calibri" pitchFamily="34" charset="-120"/>
-              </a:rPr>
-              <a:t>Scales with scored-prospect volume; main drivers are model serving, AA/GST/bureau API calls and data retention. Detailed TCO after pilot benchmarking.</a:t>
-            </a:r>
-            <a:endParaRPr lang="en-US" sz="1200" dirty="0"/>
-          </a:p>
-        </p:txBody>
-      </p:sp>
-      <p:sp>
-        <p:nvSpPr>
-          <p:cNvPr id="16" name="Text 14"/>
-          <p:cNvSpPr/>
-          <p:nvPr/>
-        </p:nvSpPr>
-        <p:spPr>
-          <a:xfrm>
-            <a:off x="502920" y="6263640"/>
-            <a:ext cx="11155680" cy="274320"/>
-          </a:xfrm>
-          <a:prstGeom prst="rect">
-            <a:avLst/>
-          </a:prstGeom>
-          <a:noFill/>
-          <a:ln/>
-        </p:spPr>
-        <p:txBody>
-          <a:bodyPr wrap="square" lIns="0" tIns="0" rIns="0" bIns="0" rtlCol="0" anchor="ctr"/>
-          <a:lstStyle/>
-          <a:p>
-            <a:pPr indent="0" marL="0">
-              <a:buNone/>
-            </a:pPr>
-            <a:r>
-              <a:rPr lang="en-US" sz="1050" i="1" dirty="0">
-                <a:solidFill>
-                  <a:srgbClr val="55645F"/>
-                </a:solidFill>
-                <a:latin typeface="Calibri" pitchFamily="34" charset="0"/>
-                <a:ea typeface="Calibri" pitchFamily="34" charset="-122"/>
-                <a:cs typeface="Calibri" pitchFamily="34" charset="-120"/>
-              </a:rPr>
-              <a:t>Figures are indicative estimates for planning only; the prototype's data-source seam keeps re-platforming cost near zero between phases.</a:t>
-            </a:r>
-            <a:endParaRPr lang="en-US" sz="1050" dirty="0"/>
-          </a:p>
-        </p:txBody>
-      </p:sp>
-      <p:sp>
-        <p:nvSpPr>
-          <p:cNvPr id="17" name="Text 15"/>
-          <p:cNvSpPr/>
-          <p:nvPr/>
-        </p:nvSpPr>
-        <p:spPr>
-          <a:xfrm>
-            <a:off x="502920" y="6473952"/>
-            <a:ext cx="5486400" cy="274320"/>
-          </a:xfrm>
-          <a:prstGeom prst="rect">
-            <a:avLst/>
-          </a:prstGeom>
-          <a:noFill/>
-          <a:ln/>
-        </p:spPr>
-        <p:txBody>
-          <a:bodyPr wrap="square" lIns="0" tIns="0" rIns="0" bIns="0" rtlCol="0" anchor="ctr"/>
-          <a:lstStyle/>
-          <a:p>
-            <a:pPr indent="0" marL="0">
+            <a:pPr marL="0" indent="0">
               <a:buNone/>
             </a:pPr>
             <a:r>
@@ -11955,4 +12480,319 @@
     </a:ext>
   </a:extLst>
 </a:theme>
+</file>
+
+<file path=ppt/theme/theme2.xml><?xml version="1.0" encoding="utf-8"?>
+<a:theme xmlns:a="http://schemas.openxmlformats.org/drawingml/2006/main" name="Office Theme">
+  <a:themeElements>
+    <a:clrScheme name="Office">
+      <a:dk1>
+        <a:sysClr val="windowText" lastClr="000000"/>
+      </a:dk1>
+      <a:lt1>
+        <a:sysClr val="window" lastClr="FFFFFF"/>
+      </a:lt1>
+      <a:dk2>
+        <a:srgbClr val="0E2841"/>
+      </a:dk2>
+      <a:lt2>
+        <a:srgbClr val="E8E8E8"/>
+      </a:lt2>
+      <a:accent1>
+        <a:srgbClr val="156082"/>
+      </a:accent1>
+      <a:accent2>
+        <a:srgbClr val="E97132"/>
+      </a:accent2>
+      <a:accent3>
+        <a:srgbClr val="196B24"/>
+      </a:accent3>
+      <a:accent4>
+        <a:srgbClr val="0F9ED5"/>
+      </a:accent4>
+      <a:accent5>
+        <a:srgbClr val="A02B93"/>
+      </a:accent5>
+      <a:accent6>
+        <a:srgbClr val="4EA72E"/>
+      </a:accent6>
+      <a:hlink>
+        <a:srgbClr val="467886"/>
+      </a:hlink>
+      <a:folHlink>
+        <a:srgbClr val="96607D"/>
+      </a:folHlink>
+    </a:clrScheme>
+    <a:fontScheme name="Office">
+      <a:majorFont>
+        <a:latin typeface="Aptos Display" panose="02110004020202020204"/>
+        <a:ea typeface=""/>
+        <a:cs typeface=""/>
+        <a:font script="Jpan" typeface="游ゴシック Light"/>
+        <a:font script="Hang" typeface="맑은 고딕"/>
+        <a:font script="Hans" typeface="等线 Light"/>
+        <a:font script="Hant" typeface="新細明體"/>
+        <a:font script="Arab" typeface="Times New Roman"/>
+        <a:font script="Hebr" typeface="Times New Roman"/>
+        <a:font script="Thai" typeface="Angsana New"/>
+        <a:font script="Ethi" typeface="Nyala"/>
+        <a:font script="Beng" typeface="Vrinda"/>
+        <a:font script="Gujr" typeface="Shruti"/>
+        <a:font script="Khmr" typeface="MoolBoran"/>
+        <a:font script="Knda" typeface="Tunga"/>
+        <a:font script="Guru" typeface="Raavi"/>
+        <a:font script="Cans" typeface="Euphemia"/>
+        <a:font script="Cher" typeface="Plantagenet Cherokee"/>
+        <a:font script="Yiii" typeface="Microsoft Yi Baiti"/>
+        <a:font script="Tibt" typeface="Microsoft Himalaya"/>
+        <a:font script="Thaa" typeface="MV Boli"/>
+        <a:font script="Deva" typeface="Mangal"/>
+        <a:font script="Telu" typeface="Gautami"/>
+        <a:font script="Taml" typeface="Latha"/>
+        <a:font script="Syrc" typeface="Estrangelo Edessa"/>
+        <a:font script="Orya" typeface="Kalinga"/>
+        <a:font script="Mlym" typeface="Kartika"/>
+        <a:font script="Laoo" typeface="DokChampa"/>
+        <a:font script="Sinh" typeface="Iskoola Pota"/>
+        <a:font script="Mong" typeface="Mongolian Baiti"/>
+        <a:font script="Viet" typeface="Times New Roman"/>
+        <a:font script="Uigh" typeface="Microsoft Uighur"/>
+        <a:font script="Geor" typeface="Sylfaen"/>
+        <a:font script="Armn" typeface="Arial"/>
+        <a:font script="Bugi" typeface="Leelawadee UI"/>
+        <a:font script="Bopo" typeface="Microsoft JhengHei"/>
+        <a:font script="Java" typeface="Javanese Text"/>
+        <a:font script="Lisu" typeface="Segoe UI"/>
+        <a:font script="Mymr" typeface="Myanmar Text"/>
+        <a:font script="Nkoo" typeface="Ebrima"/>
+        <a:font script="Olck" typeface="Nirmala UI"/>
+        <a:font script="Osma" typeface="Ebrima"/>
+        <a:font script="Phag" typeface="Phagspa"/>
+        <a:font script="Syrn" typeface="Estrangelo Edessa"/>
+        <a:font script="Syrj" typeface="Estrangelo Edessa"/>
+        <a:font script="Syre" typeface="Estrangelo Edessa"/>
+        <a:font script="Sora" typeface="Nirmala UI"/>
+        <a:font script="Tale" typeface="Microsoft Tai Le"/>
+        <a:font script="Talu" typeface="Microsoft New Tai Lue"/>
+        <a:font script="Tfng" typeface="Ebrima"/>
+      </a:majorFont>
+      <a:minorFont>
+        <a:latin typeface="Aptos" panose="02110004020202020204"/>
+        <a:ea typeface=""/>
+        <a:cs typeface=""/>
+        <a:font script="Jpan" typeface="游ゴシック"/>
+        <a:font script="Hang" typeface="맑은 고딕"/>
+        <a:font script="Hans" typeface="等线"/>
+        <a:font script="Hant" typeface="新細明體"/>
+        <a:font script="Arab" typeface="Arial"/>
+        <a:font script="Hebr" typeface="Arial"/>
+        <a:font script="Thai" typeface="Cordia New"/>
+        <a:font script="Ethi" typeface="Nyala"/>
+        <a:font script="Beng" typeface="Vrinda"/>
+        <a:font script="Gujr" typeface="Shruti"/>
+        <a:font script="Khmr" typeface="DaunPenh"/>
+        <a:font script="Knda" typeface="Tunga"/>
+        <a:font script="Guru" typeface="Raavi"/>
+        <a:font script="Cans" typeface="Euphemia"/>
+        <a:font script="Cher" typeface="Plantagenet Cherokee"/>
+        <a:font script="Yiii" typeface="Microsoft Yi Baiti"/>
+        <a:font script="Tibt" typeface="Microsoft Himalaya"/>
+        <a:font script="Thaa" typeface="MV Boli"/>
+        <a:font script="Deva" typeface="Mangal"/>
+        <a:font script="Telu" typeface="Gautami"/>
+        <a:font script="Taml" typeface="Latha"/>
+        <a:font script="Syrc" typeface="Estrangelo Edessa"/>
+        <a:font script="Orya" typeface="Kalinga"/>
+        <a:font script="Mlym" typeface="Kartika"/>
+        <a:font script="Laoo" typeface="DokChampa"/>
+        <a:font script="Sinh" typeface="Iskoola Pota"/>
+        <a:font script="Mong" typeface="Mongolian Baiti"/>
+        <a:font script="Viet" typeface="Arial"/>
+        <a:font script="Uigh" typeface="Microsoft Uighur"/>
+        <a:font script="Geor" typeface="Sylfaen"/>
+        <a:font script="Armn" typeface="Arial"/>
+        <a:font script="Bugi" typeface="Leelawadee UI"/>
+        <a:font script="Bopo" typeface="Microsoft JhengHei"/>
+        <a:font script="Java" typeface="Javanese Text"/>
+        <a:font script="Lisu" typeface="Segoe UI"/>
+        <a:font script="Mymr" typeface="Myanmar Text"/>
+        <a:font script="Nkoo" typeface="Ebrima"/>
+        <a:font script="Olck" typeface="Nirmala UI"/>
+        <a:font script="Osma" typeface="Ebrima"/>
+        <a:font script="Phag" typeface="Phagspa"/>
+        <a:font script="Syrn" typeface="Estrangelo Edessa"/>
+        <a:font script="Syrj" typeface="Estrangelo Edessa"/>
+        <a:font script="Syre" typeface="Estrangelo Edessa"/>
+        <a:font script="Sora" typeface="Nirmala UI"/>
+        <a:font script="Tale" typeface="Microsoft Tai Le"/>
+        <a:font script="Talu" typeface="Microsoft New Tai Lue"/>
+        <a:font script="Tfng" typeface="Ebrima"/>
+      </a:minorFont>
+    </a:fontScheme>
+    <a:fmtScheme name="Office">
+      <a:fillStyleLst>
+        <a:solidFill>
+          <a:schemeClr val="phClr"/>
+        </a:solidFill>
+        <a:gradFill rotWithShape="1">
+          <a:gsLst>
+            <a:gs pos="0">
+              <a:schemeClr val="phClr">
+                <a:lumMod val="110000"/>
+                <a:satMod val="105000"/>
+                <a:tint val="67000"/>
+              </a:schemeClr>
+            </a:gs>
+            <a:gs pos="50000">
+              <a:schemeClr val="phClr">
+                <a:lumMod val="105000"/>
+                <a:satMod val="103000"/>
+                <a:tint val="73000"/>
+              </a:schemeClr>
+            </a:gs>
+            <a:gs pos="100000">
+              <a:schemeClr val="phClr">
+                <a:lumMod val="105000"/>
+                <a:satMod val="109000"/>
+                <a:tint val="81000"/>
+              </a:schemeClr>
+            </a:gs>
+          </a:gsLst>
+          <a:lin ang="5400000" scaled="0"/>
+        </a:gradFill>
+        <a:gradFill rotWithShape="1">
+          <a:gsLst>
+            <a:gs pos="0">
+              <a:schemeClr val="phClr">
+                <a:satMod val="103000"/>
+                <a:lumMod val="102000"/>
+                <a:tint val="94000"/>
+              </a:schemeClr>
+            </a:gs>
+            <a:gs pos="50000">
+              <a:schemeClr val="phClr">
+                <a:satMod val="110000"/>
+                <a:lumMod val="100000"/>
+                <a:shade val="100000"/>
+              </a:schemeClr>
+            </a:gs>
+            <a:gs pos="100000">
+              <a:schemeClr val="phClr">
+                <a:lumMod val="99000"/>
+                <a:satMod val="120000"/>
+                <a:shade val="78000"/>
+              </a:schemeClr>
+            </a:gs>
+          </a:gsLst>
+          <a:lin ang="5400000" scaled="0"/>
+        </a:gradFill>
+      </a:fillStyleLst>
+      <a:lnStyleLst>
+        <a:ln w="12700" cap="flat" cmpd="sng" algn="ctr">
+          <a:solidFill>
+            <a:schemeClr val="phClr"/>
+          </a:solidFill>
+          <a:prstDash val="solid"/>
+          <a:miter lim="800000"/>
+        </a:ln>
+        <a:ln w="19050" cap="flat" cmpd="sng" algn="ctr">
+          <a:solidFill>
+            <a:schemeClr val="phClr"/>
+          </a:solidFill>
+          <a:prstDash val="solid"/>
+          <a:miter lim="800000"/>
+        </a:ln>
+        <a:ln w="25400" cap="flat" cmpd="sng" algn="ctr">
+          <a:solidFill>
+            <a:schemeClr val="phClr"/>
+          </a:solidFill>
+          <a:prstDash val="solid"/>
+          <a:miter lim="800000"/>
+        </a:ln>
+      </a:lnStyleLst>
+      <a:effectStyleLst>
+        <a:effectStyle>
+          <a:effectLst/>
+        </a:effectStyle>
+        <a:effectStyle>
+          <a:effectLst/>
+        </a:effectStyle>
+        <a:effectStyle>
+          <a:effectLst>
+            <a:outerShdw blurRad="57150" dist="19050" dir="5400000" algn="ctr" rotWithShape="0">
+              <a:srgbClr val="000000">
+                <a:alpha val="63000"/>
+              </a:srgbClr>
+            </a:outerShdw>
+          </a:effectLst>
+        </a:effectStyle>
+      </a:effectStyleLst>
+      <a:bgFillStyleLst>
+        <a:solidFill>
+          <a:schemeClr val="phClr"/>
+        </a:solidFill>
+        <a:solidFill>
+          <a:schemeClr val="phClr">
+            <a:tint val="95000"/>
+            <a:satMod val="170000"/>
+          </a:schemeClr>
+        </a:solidFill>
+        <a:gradFill rotWithShape="1">
+          <a:gsLst>
+            <a:gs pos="0">
+              <a:schemeClr val="phClr">
+                <a:tint val="93000"/>
+                <a:satMod val="150000"/>
+                <a:shade val="98000"/>
+                <a:lumMod val="102000"/>
+              </a:schemeClr>
+            </a:gs>
+            <a:gs pos="50000">
+              <a:schemeClr val="phClr">
+                <a:tint val="98000"/>
+                <a:satMod val="130000"/>
+                <a:shade val="90000"/>
+                <a:lumMod val="103000"/>
+              </a:schemeClr>
+            </a:gs>
+            <a:gs pos="100000">
+              <a:schemeClr val="phClr">
+                <a:shade val="63000"/>
+                <a:satMod val="120000"/>
+              </a:schemeClr>
+            </a:gs>
+          </a:gsLst>
+          <a:lin ang="5400000" scaled="0"/>
+        </a:gradFill>
+      </a:bgFillStyleLst>
+    </a:fmtScheme>
+  </a:themeElements>
+  <a:objectDefaults>
+    <a:lnDef>
+      <a:spPr/>
+      <a:bodyPr/>
+      <a:lstStyle/>
+      <a:style>
+        <a:lnRef idx="2">
+          <a:schemeClr val="accent1"/>
+        </a:lnRef>
+        <a:fillRef idx="0">
+          <a:schemeClr val="accent1"/>
+        </a:fillRef>
+        <a:effectRef idx="1">
+          <a:schemeClr val="accent1"/>
+        </a:effectRef>
+        <a:fontRef idx="minor">
+          <a:schemeClr val="tx1"/>
+        </a:fontRef>
+      </a:style>
+    </a:lnDef>
+  </a:objectDefaults>
+  <a:extraClrSchemeLst/>
+  <a:extLst>
+    <a:ext uri="{05A4C25C-085E-4340-85A3-A5531E510DB2}">
+      <thm15:themeFamily xmlns:thm15="http://schemas.microsoft.com/office/thememl/2012/main" name="Office Theme" id="{2E142A2C-CD16-42D6-873A-C26D2A0506FA}" vid="{1BDDFF52-6CD6-40A5-AB3C-68EB2F1E4D0A}"/>
+    </a:ext>
+  </a:extLst>
+</a:theme>
 </file>
--- a/Prospect_Assist_AI_Submission_Deck.pptx
+++ b/Prospect_Assist_AI_Submission_Deck.pptx
@@ -5,23 +5,22 @@
     <p:sldMasterId id="2147483648" r:id="rId1"/>
   </p:sldMasterIdLst>
   <p:notesMasterIdLst>
-    <p:notesMasterId r:id="rId16"/>
+    <p:notesMasterId r:id="rId15"/>
   </p:notesMasterIdLst>
   <p:sldIdLst>
     <p:sldId id="269" r:id="rId2"/>
-    <p:sldId id="256" r:id="rId3"/>
-    <p:sldId id="257" r:id="rId4"/>
-    <p:sldId id="258" r:id="rId5"/>
-    <p:sldId id="259" r:id="rId6"/>
-    <p:sldId id="260" r:id="rId7"/>
-    <p:sldId id="261" r:id="rId8"/>
-    <p:sldId id="262" r:id="rId9"/>
-    <p:sldId id="263" r:id="rId10"/>
-    <p:sldId id="264" r:id="rId11"/>
-    <p:sldId id="265" r:id="rId12"/>
-    <p:sldId id="266" r:id="rId13"/>
-    <p:sldId id="267" r:id="rId14"/>
-    <p:sldId id="268" r:id="rId15"/>
+    <p:sldId id="257" r:id="rId3"/>
+    <p:sldId id="258" r:id="rId4"/>
+    <p:sldId id="259" r:id="rId5"/>
+    <p:sldId id="260" r:id="rId6"/>
+    <p:sldId id="261" r:id="rId7"/>
+    <p:sldId id="262" r:id="rId8"/>
+    <p:sldId id="263" r:id="rId9"/>
+    <p:sldId id="264" r:id="rId10"/>
+    <p:sldId id="265" r:id="rId11"/>
+    <p:sldId id="266" r:id="rId12"/>
+    <p:sldId id="267" r:id="rId13"/>
+    <p:sldId id="268" r:id="rId14"/>
   </p:sldIdLst>
   <p:sldSz cx="12192000" cy="6858000"/>
   <p:notesSz cx="6858000" cy="12192000"/>
@@ -850,90 +849,6 @@
             <a:fld id="{F7021451-1387-4CA6-816F-3879F97B5CBC}" type="slidenum">
               <a:rPr lang="en-US"/>
               <a:t>13</a:t>
-            </a:fld>
-            <a:endParaRPr lang="en-US"/>
-          </a:p>
-        </p:txBody>
-      </p:sp>
-    </p:spTree>
-    <p:extLst>
-      <p:ext uri="{BB962C8B-B14F-4D97-AF65-F5344CB8AC3E}">
-        <p14:creationId xmlns:p14="http://schemas.microsoft.com/office/powerpoint/2010/main" val="1024086991"/>
-      </p:ext>
-    </p:extLst>
-  </p:cSld>
-  <p:clrMapOvr>
-    <a:masterClrMapping/>
-  </p:clrMapOvr>
-</p:notes>
-</file>
-
-<file path=ppt/notesSlides/notesSlide13.xml><?xml version="1.0" encoding="utf-8"?>
-<p:notes xmlns:a="http://schemas.openxmlformats.org/drawingml/2006/main" xmlns:r="http://schemas.openxmlformats.org/officeDocument/2006/relationships" xmlns:p="http://schemas.openxmlformats.org/presentationml/2006/main">
-  <p:cSld>
-    <p:spTree>
-      <p:nvGrpSpPr>
-        <p:cNvPr id="1" name=""/>
-        <p:cNvGrpSpPr/>
-        <p:nvPr/>
-      </p:nvGrpSpPr>
-      <p:grpSpPr>
-        <a:xfrm>
-          <a:off x="0" y="0"/>
-          <a:ext cx="0" cy="0"/>
-          <a:chOff x="0" y="0"/>
-          <a:chExt cx="0" cy="0"/>
-        </a:xfrm>
-      </p:grpSpPr>
-      <p:sp>
-        <p:nvSpPr>
-          <p:cNvPr id="2" name="Slide Image Placeholder 1"/>
-          <p:cNvSpPr>
-            <a:spLocks noGrp="1" noRot="1" noChangeAspect="1"/>
-          </p:cNvSpPr>
-          <p:nvPr>
-            <p:ph type="sldImg"/>
-          </p:nvPr>
-        </p:nvSpPr>
-        <p:spPr/>
-      </p:sp>
-      <p:sp>
-        <p:nvSpPr>
-          <p:cNvPr id="3" name="Notes Placeholder 2"/>
-          <p:cNvSpPr>
-            <a:spLocks noGrp="1"/>
-          </p:cNvSpPr>
-          <p:nvPr>
-            <p:ph type="body" idx="1"/>
-          </p:nvPr>
-        </p:nvSpPr>
-        <p:spPr/>
-        <p:txBody>
-          <a:bodyPr/>
-          <a:lstStyle/>
-          <a:p>
-            <a:endParaRPr lang="en-US" dirty="0"/>
-          </a:p>
-        </p:txBody>
-      </p:sp>
-      <p:sp>
-        <p:nvSpPr>
-          <p:cNvPr id="4" name="Slide Number Placeholder 3"/>
-          <p:cNvSpPr>
-            <a:spLocks noGrp="1"/>
-          </p:cNvSpPr>
-          <p:nvPr>
-            <p:ph type="sldNum" sz="quarter" idx="10"/>
-          </p:nvPr>
-        </p:nvSpPr>
-        <p:spPr/>
-        <p:txBody>
-          <a:bodyPr/>
-          <a:lstStyle/>
-          <a:p>
-            <a:fld id="{F7021451-1387-4CA6-816F-3879F97B5CBC}" type="slidenum">
-              <a:rPr lang="en-US"/>
-              <a:t>14</a:t>
             </a:fld>
             <a:endParaRPr lang="en-US"/>
           </a:p>
@@ -2301,653 +2216,6 @@
 
 <file path=ppt/slides/slide10.xml><?xml version="1.0" encoding="utf-8"?>
 <p:sld xmlns:a="http://schemas.openxmlformats.org/drawingml/2006/main" xmlns:r="http://schemas.openxmlformats.org/officeDocument/2006/relationships" xmlns:p="http://schemas.openxmlformats.org/presentationml/2006/main">
-  <p:cSld name="Slide 9">
-    <p:spTree>
-      <p:nvGrpSpPr>
-        <p:cNvPr id="1" name=""/>
-        <p:cNvGrpSpPr/>
-        <p:nvPr/>
-      </p:nvGrpSpPr>
-      <p:grpSpPr>
-        <a:xfrm>
-          <a:off x="0" y="0"/>
-          <a:ext cx="0" cy="0"/>
-          <a:chOff x="0" y="0"/>
-          <a:chExt cx="0" cy="0"/>
-        </a:xfrm>
-      </p:grpSpPr>
-      <p:sp>
-        <p:nvSpPr>
-          <p:cNvPr id="2" name="Text 0"/>
-          <p:cNvSpPr/>
-          <p:nvPr/>
-        </p:nvSpPr>
-        <p:spPr>
-          <a:xfrm>
-            <a:off x="502920" y="347472"/>
-            <a:ext cx="1417320" cy="292608"/>
-          </a:xfrm>
-          <a:prstGeom prst="roundRect">
-            <a:avLst>
-              <a:gd name="adj" fmla="val 50000"/>
-            </a:avLst>
-          </a:prstGeom>
-          <a:solidFill>
-            <a:srgbClr val="00584C"/>
-          </a:solidFill>
-          <a:ln/>
-        </p:spPr>
-        <p:txBody>
-          <a:bodyPr wrap="square" lIns="0" tIns="0" rIns="0" bIns="0" rtlCol="0" anchor="ctr"/>
-          <a:lstStyle/>
-          <a:p>
-            <a:pPr marL="0" indent="0" algn="ctr">
-              <a:buNone/>
-            </a:pPr>
-            <a:r>
-              <a:rPr lang="en-US" sz="1100" b="1" dirty="0">
-                <a:solidFill>
-                  <a:srgbClr val="FFFFFF"/>
-                </a:solidFill>
-                <a:latin typeface="Calibri" pitchFamily="34" charset="0"/>
-                <a:ea typeface="Calibri" pitchFamily="34" charset="-122"/>
-                <a:cs typeface="Calibri" pitchFamily="34" charset="-120"/>
-              </a:rPr>
-              <a:t>09 · COST</a:t>
-            </a:r>
-            <a:endParaRPr lang="en-US" sz="1100" dirty="0"/>
-          </a:p>
-        </p:txBody>
-      </p:sp>
-      <p:sp>
-        <p:nvSpPr>
-          <p:cNvPr id="3" name="Text 1"/>
-          <p:cNvSpPr/>
-          <p:nvPr/>
-        </p:nvSpPr>
-        <p:spPr>
-          <a:xfrm>
-            <a:off x="502920" y="713232"/>
-            <a:ext cx="11183112" cy="566928"/>
-          </a:xfrm>
-          <a:prstGeom prst="rect">
-            <a:avLst/>
-          </a:prstGeom>
-          <a:noFill/>
-          <a:ln/>
-        </p:spPr>
-        <p:txBody>
-          <a:bodyPr wrap="square" lIns="0" tIns="0" rIns="0" bIns="0" rtlCol="0" anchor="ctr"/>
-          <a:lstStyle/>
-          <a:p>
-            <a:pPr marL="0" indent="0">
-              <a:buNone/>
-            </a:pPr>
-            <a:r>
-              <a:rPr lang="en-US" sz="2800" b="1" dirty="0">
-                <a:solidFill>
-                  <a:srgbClr val="0E201B"/>
-                </a:solidFill>
-                <a:latin typeface="Arial" pitchFamily="34" charset="0"/>
-                <a:ea typeface="Arial" pitchFamily="34" charset="-122"/>
-                <a:cs typeface="Arial" pitchFamily="34" charset="-120"/>
-              </a:rPr>
-              <a:t>Estimated implementation cost (indicative)</a:t>
-            </a:r>
-            <a:endParaRPr lang="en-US" sz="2800" dirty="0"/>
-          </a:p>
-        </p:txBody>
-      </p:sp>
-      <p:sp>
-        <p:nvSpPr>
-          <p:cNvPr id="4" name="Shape 2"/>
-          <p:cNvSpPr/>
-          <p:nvPr/>
-        </p:nvSpPr>
-        <p:spPr>
-          <a:xfrm>
-            <a:off x="502920" y="1600200"/>
-            <a:ext cx="11183112" cy="1389888"/>
-          </a:xfrm>
-          <a:prstGeom prst="roundRect">
-            <a:avLst>
-              <a:gd name="adj" fmla="val 5921"/>
-            </a:avLst>
-          </a:prstGeom>
-          <a:solidFill>
-            <a:srgbClr val="EAF4F1"/>
-          </a:solidFill>
-          <a:ln w="12700">
-            <a:solidFill>
-              <a:srgbClr val="EAF4F1"/>
-            </a:solidFill>
-            <a:prstDash val="solid"/>
-          </a:ln>
-        </p:spPr>
-        <p:txBody>
-          <a:bodyPr/>
-          <a:lstStyle/>
-          <a:p>
-            <a:endParaRPr lang="en-IN"/>
-          </a:p>
-        </p:txBody>
-      </p:sp>
-      <p:sp>
-        <p:nvSpPr>
-          <p:cNvPr id="5" name="Text 3"/>
-          <p:cNvSpPr/>
-          <p:nvPr/>
-        </p:nvSpPr>
-        <p:spPr>
-          <a:xfrm>
-            <a:off x="777240" y="1746504"/>
-            <a:ext cx="3291840" cy="365760"/>
-          </a:xfrm>
-          <a:prstGeom prst="rect">
-            <a:avLst/>
-          </a:prstGeom>
-          <a:noFill/>
-          <a:ln/>
-        </p:spPr>
-        <p:txBody>
-          <a:bodyPr wrap="square" lIns="0" tIns="0" rIns="0" bIns="0" rtlCol="0" anchor="ctr"/>
-          <a:lstStyle/>
-          <a:p>
-            <a:pPr marL="0" indent="0">
-              <a:buNone/>
-            </a:pPr>
-            <a:r>
-              <a:rPr lang="en-US" sz="1400" b="1" dirty="0">
-                <a:solidFill>
-                  <a:srgbClr val="0E201B"/>
-                </a:solidFill>
-                <a:latin typeface="Arial" pitchFamily="34" charset="0"/>
-                <a:ea typeface="Arial" pitchFamily="34" charset="-122"/>
-                <a:cs typeface="Arial" pitchFamily="34" charset="-120"/>
-              </a:rPr>
-              <a:t>Phase 1 — Prototype</a:t>
-            </a:r>
-            <a:endParaRPr lang="en-US" sz="1400" dirty="0"/>
-          </a:p>
-        </p:txBody>
-      </p:sp>
-      <p:sp>
-        <p:nvSpPr>
-          <p:cNvPr id="6" name="Text 4"/>
-          <p:cNvSpPr/>
-          <p:nvPr/>
-        </p:nvSpPr>
-        <p:spPr>
-          <a:xfrm>
-            <a:off x="777240" y="2148840"/>
-            <a:ext cx="3291840" cy="502920"/>
-          </a:xfrm>
-          <a:prstGeom prst="rect">
-            <a:avLst/>
-          </a:prstGeom>
-          <a:noFill/>
-          <a:ln/>
-        </p:spPr>
-        <p:txBody>
-          <a:bodyPr wrap="square" lIns="0" tIns="0" rIns="0" bIns="0" rtlCol="0" anchor="ctr"/>
-          <a:lstStyle/>
-          <a:p>
-            <a:pPr marL="0" indent="0">
-              <a:buNone/>
-            </a:pPr>
-            <a:r>
-              <a:rPr lang="en-US" sz="1900" b="1" dirty="0">
-                <a:solidFill>
-                  <a:srgbClr val="00584C"/>
-                </a:solidFill>
-                <a:latin typeface="Arial" pitchFamily="34" charset="0"/>
-                <a:ea typeface="Arial" pitchFamily="34" charset="-122"/>
-                <a:cs typeface="Arial" pitchFamily="34" charset="-120"/>
-              </a:rPr>
-              <a:t>₹0 infrastructure</a:t>
-            </a:r>
-            <a:endParaRPr lang="en-US" sz="1900" dirty="0"/>
-          </a:p>
-        </p:txBody>
-      </p:sp>
-      <p:sp>
-        <p:nvSpPr>
-          <p:cNvPr id="7" name="Text 5"/>
-          <p:cNvSpPr/>
-          <p:nvPr/>
-        </p:nvSpPr>
-        <p:spPr>
-          <a:xfrm>
-            <a:off x="4343400" y="1746504"/>
-            <a:ext cx="7223760" cy="1097280"/>
-          </a:xfrm>
-          <a:prstGeom prst="rect">
-            <a:avLst/>
-          </a:prstGeom>
-          <a:noFill/>
-          <a:ln/>
-        </p:spPr>
-        <p:txBody>
-          <a:bodyPr wrap="square" lIns="0" tIns="0" rIns="0" bIns="0" rtlCol="0" anchor="ctr"/>
-          <a:lstStyle/>
-          <a:p>
-            <a:pPr marL="0" indent="0">
-              <a:lnSpc>
-                <a:spcPct val="108000"/>
-              </a:lnSpc>
-              <a:buNone/>
-            </a:pPr>
-            <a:r>
-              <a:rPr lang="en-US" sz="1200" dirty="0">
-                <a:solidFill>
-                  <a:srgbClr val="55645F"/>
-                </a:solidFill>
-                <a:latin typeface="Calibri" pitchFamily="34" charset="0"/>
-                <a:ea typeface="Calibri" pitchFamily="34" charset="-122"/>
-                <a:cs typeface="Calibri" pitchFamily="34" charset="-120"/>
-              </a:rPr>
-              <a:t>Runs locally against the synthetic sandbox; no cloud spend, no licensed data. Already built.</a:t>
-            </a:r>
-            <a:endParaRPr lang="en-US" sz="1200" dirty="0"/>
-          </a:p>
-        </p:txBody>
-      </p:sp>
-      <p:sp>
-        <p:nvSpPr>
-          <p:cNvPr id="8" name="Shape 6"/>
-          <p:cNvSpPr/>
-          <p:nvPr/>
-        </p:nvSpPr>
-        <p:spPr>
-          <a:xfrm>
-            <a:off x="502920" y="3136392"/>
-            <a:ext cx="11183112" cy="1389888"/>
-          </a:xfrm>
-          <a:prstGeom prst="roundRect">
-            <a:avLst>
-              <a:gd name="adj" fmla="val 5921"/>
-            </a:avLst>
-          </a:prstGeom>
-          <a:solidFill>
-            <a:srgbClr val="EAF4F1"/>
-          </a:solidFill>
-          <a:ln w="12700">
-            <a:solidFill>
-              <a:srgbClr val="EAF4F1"/>
-            </a:solidFill>
-            <a:prstDash val="solid"/>
-          </a:ln>
-        </p:spPr>
-        <p:txBody>
-          <a:bodyPr/>
-          <a:lstStyle/>
-          <a:p>
-            <a:endParaRPr lang="en-IN"/>
-          </a:p>
-        </p:txBody>
-      </p:sp>
-      <p:sp>
-        <p:nvSpPr>
-          <p:cNvPr id="9" name="Text 7"/>
-          <p:cNvSpPr/>
-          <p:nvPr/>
-        </p:nvSpPr>
-        <p:spPr>
-          <a:xfrm>
-            <a:off x="777240" y="3282696"/>
-            <a:ext cx="3291840" cy="365760"/>
-          </a:xfrm>
-          <a:prstGeom prst="rect">
-            <a:avLst/>
-          </a:prstGeom>
-          <a:noFill/>
-          <a:ln/>
-        </p:spPr>
-        <p:txBody>
-          <a:bodyPr wrap="square" lIns="0" tIns="0" rIns="0" bIns="0" rtlCol="0" anchor="ctr"/>
-          <a:lstStyle/>
-          <a:p>
-            <a:pPr marL="0" indent="0">
-              <a:buNone/>
-            </a:pPr>
-            <a:r>
-              <a:rPr lang="en-US" sz="1400" b="1" dirty="0">
-                <a:solidFill>
-                  <a:srgbClr val="0E201B"/>
-                </a:solidFill>
-                <a:latin typeface="Arial" pitchFamily="34" charset="0"/>
-                <a:ea typeface="Arial" pitchFamily="34" charset="-122"/>
-                <a:cs typeface="Arial" pitchFamily="34" charset="-120"/>
-              </a:rPr>
-              <a:t>Phase 2 — Bank-sandbox pilot</a:t>
-            </a:r>
-            <a:endParaRPr lang="en-US" sz="1400" dirty="0"/>
-          </a:p>
-        </p:txBody>
-      </p:sp>
-      <p:sp>
-        <p:nvSpPr>
-          <p:cNvPr id="10" name="Text 8"/>
-          <p:cNvSpPr/>
-          <p:nvPr/>
-        </p:nvSpPr>
-        <p:spPr>
-          <a:xfrm>
-            <a:off x="777240" y="3685032"/>
-            <a:ext cx="3291840" cy="502920"/>
-          </a:xfrm>
-          <a:prstGeom prst="rect">
-            <a:avLst/>
-          </a:prstGeom>
-          <a:noFill/>
-          <a:ln/>
-        </p:spPr>
-        <p:txBody>
-          <a:bodyPr wrap="square" lIns="0" tIns="0" rIns="0" bIns="0" rtlCol="0" anchor="ctr"/>
-          <a:lstStyle/>
-          <a:p>
-            <a:pPr marL="0" indent="0">
-              <a:buNone/>
-            </a:pPr>
-            <a:r>
-              <a:rPr lang="en-US" sz="1900" b="1" dirty="0">
-                <a:solidFill>
-                  <a:srgbClr val="C77700"/>
-                </a:solidFill>
-                <a:latin typeface="Arial" pitchFamily="34" charset="0"/>
-                <a:ea typeface="Arial" pitchFamily="34" charset="-122"/>
-                <a:cs typeface="Arial" pitchFamily="34" charset="-120"/>
-              </a:rPr>
-              <a:t>≈ ₹40k–60k / month</a:t>
-            </a:r>
-            <a:endParaRPr lang="en-US" sz="1900" dirty="0"/>
-          </a:p>
-        </p:txBody>
-      </p:sp>
-      <p:sp>
-        <p:nvSpPr>
-          <p:cNvPr id="11" name="Text 9"/>
-          <p:cNvSpPr/>
-          <p:nvPr/>
-        </p:nvSpPr>
-        <p:spPr>
-          <a:xfrm>
-            <a:off x="4343400" y="3282696"/>
-            <a:ext cx="7223760" cy="1097280"/>
-          </a:xfrm>
-          <a:prstGeom prst="rect">
-            <a:avLst/>
-          </a:prstGeom>
-          <a:noFill/>
-          <a:ln/>
-        </p:spPr>
-        <p:txBody>
-          <a:bodyPr wrap="square" lIns="0" tIns="0" rIns="0" bIns="0" rtlCol="0" anchor="ctr"/>
-          <a:lstStyle/>
-          <a:p>
-            <a:pPr marL="0" indent="0">
-              <a:lnSpc>
-                <a:spcPct val="108000"/>
-              </a:lnSpc>
-              <a:buNone/>
-            </a:pPr>
-            <a:r>
-              <a:rPr lang="en-US" sz="1200" dirty="0">
-                <a:solidFill>
-                  <a:srgbClr val="55645F"/>
-                </a:solidFill>
-                <a:latin typeface="Calibri" pitchFamily="34" charset="0"/>
-                <a:ea typeface="Calibri" pitchFamily="34" charset="-122"/>
-                <a:cs typeface="Calibri" pitchFamily="34" charset="-120"/>
-              </a:rPr>
-              <a:t>Containerized API + dashboard on AWS (ECS/Fargate, RDS PostgreSQL, ElastiCache, monitoring); IDBI sandbox data via connector swap.</a:t>
-            </a:r>
-            <a:endParaRPr lang="en-US" sz="1200" dirty="0"/>
-          </a:p>
-        </p:txBody>
-      </p:sp>
-      <p:sp>
-        <p:nvSpPr>
-          <p:cNvPr id="12" name="Shape 10"/>
-          <p:cNvSpPr/>
-          <p:nvPr/>
-        </p:nvSpPr>
-        <p:spPr>
-          <a:xfrm>
-            <a:off x="502920" y="4672584"/>
-            <a:ext cx="11183112" cy="1389888"/>
-          </a:xfrm>
-          <a:prstGeom prst="roundRect">
-            <a:avLst>
-              <a:gd name="adj" fmla="val 5921"/>
-            </a:avLst>
-          </a:prstGeom>
-          <a:solidFill>
-            <a:srgbClr val="EAF4F1"/>
-          </a:solidFill>
-          <a:ln w="12700">
-            <a:solidFill>
-              <a:srgbClr val="EAF4F1"/>
-            </a:solidFill>
-            <a:prstDash val="solid"/>
-          </a:ln>
-        </p:spPr>
-        <p:txBody>
-          <a:bodyPr/>
-          <a:lstStyle/>
-          <a:p>
-            <a:endParaRPr lang="en-IN"/>
-          </a:p>
-        </p:txBody>
-      </p:sp>
-      <p:sp>
-        <p:nvSpPr>
-          <p:cNvPr id="13" name="Text 11"/>
-          <p:cNvSpPr/>
-          <p:nvPr/>
-        </p:nvSpPr>
-        <p:spPr>
-          <a:xfrm>
-            <a:off x="777240" y="4818888"/>
-            <a:ext cx="3291840" cy="365760"/>
-          </a:xfrm>
-          <a:prstGeom prst="rect">
-            <a:avLst/>
-          </a:prstGeom>
-          <a:noFill/>
-          <a:ln/>
-        </p:spPr>
-        <p:txBody>
-          <a:bodyPr wrap="square" lIns="0" tIns="0" rIns="0" bIns="0" rtlCol="0" anchor="ctr"/>
-          <a:lstStyle/>
-          <a:p>
-            <a:pPr marL="0" indent="0">
-              <a:buNone/>
-            </a:pPr>
-            <a:r>
-              <a:rPr lang="en-US" sz="1400" b="1" dirty="0">
-                <a:solidFill>
-                  <a:srgbClr val="0E201B"/>
-                </a:solidFill>
-                <a:latin typeface="Arial" pitchFamily="34" charset="0"/>
-                <a:ea typeface="Arial" pitchFamily="34" charset="-122"/>
-                <a:cs typeface="Arial" pitchFamily="34" charset="-120"/>
-              </a:rPr>
-              <a:t>Phase 3 — Production</a:t>
-            </a:r>
-            <a:endParaRPr lang="en-US" sz="1400" dirty="0"/>
-          </a:p>
-        </p:txBody>
-      </p:sp>
-      <p:sp>
-        <p:nvSpPr>
-          <p:cNvPr id="14" name="Text 12"/>
-          <p:cNvSpPr/>
-          <p:nvPr/>
-        </p:nvSpPr>
-        <p:spPr>
-          <a:xfrm>
-            <a:off x="777240" y="5221224"/>
-            <a:ext cx="3291840" cy="502920"/>
-          </a:xfrm>
-          <a:prstGeom prst="rect">
-            <a:avLst/>
-          </a:prstGeom>
-          <a:noFill/>
-          <a:ln/>
-        </p:spPr>
-        <p:txBody>
-          <a:bodyPr wrap="square" lIns="0" tIns="0" rIns="0" bIns="0" rtlCol="0" anchor="ctr"/>
-          <a:lstStyle/>
-          <a:p>
-            <a:pPr marL="0" indent="0">
-              <a:buNone/>
-            </a:pPr>
-            <a:r>
-              <a:rPr lang="en-US" sz="1900" b="1" dirty="0">
-                <a:solidFill>
-                  <a:srgbClr val="2E7D6B"/>
-                </a:solidFill>
-                <a:latin typeface="Arial" pitchFamily="34" charset="0"/>
-                <a:ea typeface="Arial" pitchFamily="34" charset="-122"/>
-                <a:cs typeface="Arial" pitchFamily="34" charset="-120"/>
-              </a:rPr>
-              <a:t>Usage-based</a:t>
-            </a:r>
-            <a:endParaRPr lang="en-US" sz="1900" dirty="0"/>
-          </a:p>
-        </p:txBody>
-      </p:sp>
-      <p:sp>
-        <p:nvSpPr>
-          <p:cNvPr id="15" name="Text 13"/>
-          <p:cNvSpPr/>
-          <p:nvPr/>
-        </p:nvSpPr>
-        <p:spPr>
-          <a:xfrm>
-            <a:off x="4343400" y="4818888"/>
-            <a:ext cx="7223760" cy="1097280"/>
-          </a:xfrm>
-          <a:prstGeom prst="rect">
-            <a:avLst/>
-          </a:prstGeom>
-          <a:noFill/>
-          <a:ln/>
-        </p:spPr>
-        <p:txBody>
-          <a:bodyPr wrap="square" lIns="0" tIns="0" rIns="0" bIns="0" rtlCol="0" anchor="ctr"/>
-          <a:lstStyle/>
-          <a:p>
-            <a:pPr marL="0" indent="0">
-              <a:lnSpc>
-                <a:spcPct val="108000"/>
-              </a:lnSpc>
-              <a:buNone/>
-            </a:pPr>
-            <a:r>
-              <a:rPr lang="en-US" sz="1200" dirty="0">
-                <a:solidFill>
-                  <a:srgbClr val="55645F"/>
-                </a:solidFill>
-                <a:latin typeface="Calibri" pitchFamily="34" charset="0"/>
-                <a:ea typeface="Calibri" pitchFamily="34" charset="-122"/>
-                <a:cs typeface="Calibri" pitchFamily="34" charset="-120"/>
-              </a:rPr>
-              <a:t>Scales with scored-prospect volume; main drivers are model serving, AA/GST/bureau API calls and data retention. Detailed TCO after pilot benchmarking.</a:t>
-            </a:r>
-            <a:endParaRPr lang="en-US" sz="1200" dirty="0"/>
-          </a:p>
-        </p:txBody>
-      </p:sp>
-      <p:sp>
-        <p:nvSpPr>
-          <p:cNvPr id="16" name="Text 14"/>
-          <p:cNvSpPr/>
-          <p:nvPr/>
-        </p:nvSpPr>
-        <p:spPr>
-          <a:xfrm>
-            <a:off x="502920" y="6263640"/>
-            <a:ext cx="11155680" cy="274320"/>
-          </a:xfrm>
-          <a:prstGeom prst="rect">
-            <a:avLst/>
-          </a:prstGeom>
-          <a:noFill/>
-          <a:ln/>
-        </p:spPr>
-        <p:txBody>
-          <a:bodyPr wrap="square" lIns="0" tIns="0" rIns="0" bIns="0" rtlCol="0" anchor="ctr"/>
-          <a:lstStyle/>
-          <a:p>
-            <a:pPr marL="0" indent="0">
-              <a:buNone/>
-            </a:pPr>
-            <a:r>
-              <a:rPr lang="en-US" sz="1050" i="1" dirty="0">
-                <a:solidFill>
-                  <a:srgbClr val="55645F"/>
-                </a:solidFill>
-                <a:latin typeface="Calibri" pitchFamily="34" charset="0"/>
-                <a:ea typeface="Calibri" pitchFamily="34" charset="-122"/>
-                <a:cs typeface="Calibri" pitchFamily="34" charset="-120"/>
-              </a:rPr>
-              <a:t>Figures are indicative estimates for planning only; the prototype's data-source seam keeps re-platforming cost near zero between phases.</a:t>
-            </a:r>
-            <a:endParaRPr lang="en-US" sz="1050" dirty="0"/>
-          </a:p>
-        </p:txBody>
-      </p:sp>
-      <p:sp>
-        <p:nvSpPr>
-          <p:cNvPr id="17" name="Text 15"/>
-          <p:cNvSpPr/>
-          <p:nvPr/>
-        </p:nvSpPr>
-        <p:spPr>
-          <a:xfrm>
-            <a:off x="502920" y="6473952"/>
-            <a:ext cx="5486400" cy="274320"/>
-          </a:xfrm>
-          <a:prstGeom prst="rect">
-            <a:avLst/>
-          </a:prstGeom>
-          <a:noFill/>
-          <a:ln/>
-        </p:spPr>
-        <p:txBody>
-          <a:bodyPr wrap="square" lIns="0" tIns="0" rIns="0" bIns="0" rtlCol="0" anchor="ctr"/>
-          <a:lstStyle/>
-          <a:p>
-            <a:pPr marL="0" indent="0">
-              <a:buNone/>
-            </a:pPr>
-            <a:r>
-              <a:rPr lang="en-US" sz="900" dirty="0">
-                <a:solidFill>
-                  <a:srgbClr val="55645F"/>
-                </a:solidFill>
-                <a:latin typeface="Calibri" pitchFamily="34" charset="0"/>
-                <a:ea typeface="Calibri" pitchFamily="34" charset="-122"/>
-                <a:cs typeface="Calibri" pitchFamily="34" charset="-120"/>
-              </a:rPr>
-              <a:t>Prospect Assist AI · IDBI Innovate 2026 · Track 2</a:t>
-            </a:r>
-            <a:endParaRPr lang="en-US" sz="900" dirty="0"/>
-          </a:p>
-        </p:txBody>
-      </p:sp>
-    </p:spTree>
-  </p:cSld>
-  <p:clrMapOvr>
-    <a:masterClrMapping/>
-  </p:clrMapOvr>
-</p:sld>
-</file>
-
-<file path=ppt/slides/slide11.xml><?xml version="1.0" encoding="utf-8"?>
-<p:sld xmlns:a="http://schemas.openxmlformats.org/drawingml/2006/main" xmlns:r="http://schemas.openxmlformats.org/officeDocument/2006/relationships" xmlns:p="http://schemas.openxmlformats.org/presentationml/2006/main">
   <p:cSld name="Slide 10">
     <p:spTree>
       <p:nvGrpSpPr>
@@ -3232,7 +2500,7 @@
 </p:sld>
 </file>
 
-<file path=ppt/slides/slide12.xml><?xml version="1.0" encoding="utf-8"?>
+<file path=ppt/slides/slide11.xml><?xml version="1.0" encoding="utf-8"?>
 <p:sld xmlns:a="http://schemas.openxmlformats.org/drawingml/2006/main" xmlns:r="http://schemas.openxmlformats.org/officeDocument/2006/relationships" xmlns:p="http://schemas.openxmlformats.org/presentationml/2006/main">
   <p:cSld name="Slide 11">
     <p:spTree>
@@ -5043,7 +4311,7 @@
 </p:sld>
 </file>
 
-<file path=ppt/slides/slide13.xml><?xml version="1.0" encoding="utf-8"?>
+<file path=ppt/slides/slide12.xml><?xml version="1.0" encoding="utf-8"?>
 <p:sld xmlns:a="http://schemas.openxmlformats.org/drawingml/2006/main" xmlns:r="http://schemas.openxmlformats.org/officeDocument/2006/relationships" xmlns:p="http://schemas.openxmlformats.org/presentationml/2006/main">
   <p:cSld name="Slide 12">
     <p:spTree>
@@ -5738,7 +5006,7 @@
 </p:sld>
 </file>
 
-<file path=ppt/slides/slide14.xml><?xml version="1.0" encoding="utf-8"?>
+<file path=ppt/slides/slide13.xml><?xml version="1.0" encoding="utf-8"?>
 <p:sld xmlns:a="http://schemas.openxmlformats.org/drawingml/2006/main" xmlns:r="http://schemas.openxmlformats.org/officeDocument/2006/relationships" xmlns:p="http://schemas.openxmlformats.org/presentationml/2006/main">
   <p:cSld name="Slide 13">
     <p:bg>
@@ -6187,472 +5455,6 @@
 
 <file path=ppt/slides/slide2.xml><?xml version="1.0" encoding="utf-8"?>
 <p:sld xmlns:a="http://schemas.openxmlformats.org/drawingml/2006/main" xmlns:r="http://schemas.openxmlformats.org/officeDocument/2006/relationships" xmlns:p="http://schemas.openxmlformats.org/presentationml/2006/main">
-  <p:cSld name="Slide 1">
-    <p:bg>
-      <p:bgPr>
-        <a:solidFill>
-          <a:srgbClr val="00584C"/>
-        </a:solidFill>
-        <a:effectLst/>
-      </p:bgPr>
-    </p:bg>
-    <p:spTree>
-      <p:nvGrpSpPr>
-        <p:cNvPr id="1" name=""/>
-        <p:cNvGrpSpPr/>
-        <p:nvPr/>
-      </p:nvGrpSpPr>
-      <p:grpSpPr>
-        <a:xfrm>
-          <a:off x="0" y="0"/>
-          <a:ext cx="0" cy="0"/>
-          <a:chOff x="0" y="0"/>
-          <a:chExt cx="0" cy="0"/>
-        </a:xfrm>
-      </p:grpSpPr>
-      <p:sp>
-        <p:nvSpPr>
-          <p:cNvPr id="2" name="Text 0"/>
-          <p:cNvSpPr/>
-          <p:nvPr/>
-        </p:nvSpPr>
-        <p:spPr>
-          <a:xfrm>
-            <a:off x="502920" y="960120"/>
-            <a:ext cx="11155680" cy="868680"/>
-          </a:xfrm>
-          <a:prstGeom prst="rect">
-            <a:avLst/>
-          </a:prstGeom>
-          <a:noFill/>
-          <a:ln/>
-        </p:spPr>
-        <p:txBody>
-          <a:bodyPr wrap="square" lIns="0" tIns="0" rIns="0" bIns="0" rtlCol="0" anchor="ctr"/>
-          <a:lstStyle/>
-          <a:p>
-            <a:pPr marL="0" indent="0">
-              <a:buNone/>
-            </a:pPr>
-            <a:r>
-              <a:rPr lang="en-US" sz="4800" b="1" dirty="0">
-                <a:solidFill>
-                  <a:srgbClr val="FFFFFF"/>
-                </a:solidFill>
-                <a:latin typeface="Arial" pitchFamily="34" charset="0"/>
-                <a:ea typeface="Arial" pitchFamily="34" charset="-122"/>
-                <a:cs typeface="Arial" pitchFamily="34" charset="-120"/>
-              </a:rPr>
-              <a:t>Prospect Assist AI</a:t>
-            </a:r>
-            <a:endParaRPr lang="en-US" sz="4800" dirty="0"/>
-          </a:p>
-        </p:txBody>
-      </p:sp>
-      <p:sp>
-        <p:nvSpPr>
-          <p:cNvPr id="3" name="Text 1"/>
-          <p:cNvSpPr/>
-          <p:nvPr/>
-        </p:nvSpPr>
-        <p:spPr>
-          <a:xfrm>
-            <a:off x="502920" y="1828800"/>
-            <a:ext cx="10424160" cy="411480"/>
-          </a:xfrm>
-          <a:prstGeom prst="rect">
-            <a:avLst/>
-          </a:prstGeom>
-          <a:noFill/>
-          <a:ln/>
-        </p:spPr>
-        <p:txBody>
-          <a:bodyPr wrap="square" lIns="0" tIns="0" rIns="0" bIns="0" rtlCol="0" anchor="ctr"/>
-          <a:lstStyle/>
-          <a:p>
-            <a:pPr marL="0" indent="0">
-              <a:buNone/>
-            </a:pPr>
-            <a:r>
-              <a:rPr lang="en-US" sz="1700" dirty="0">
-                <a:solidFill>
-                  <a:srgbClr val="CDE8E0"/>
-                </a:solidFill>
-                <a:latin typeface="Calibri" pitchFamily="34" charset="0"/>
-                <a:ea typeface="Calibri" pitchFamily="34" charset="-122"/>
-                <a:cs typeface="Calibri" pitchFamily="34" charset="-120"/>
-              </a:rPr>
-              <a:t>Behavior-driven lead generation &amp; underwriting support for IDBI retail lending</a:t>
-            </a:r>
-            <a:endParaRPr lang="en-US" sz="1700" dirty="0"/>
-          </a:p>
-        </p:txBody>
-      </p:sp>
-      <p:sp>
-        <p:nvSpPr>
-          <p:cNvPr id="4" name="Text 2"/>
-          <p:cNvSpPr/>
-          <p:nvPr/>
-        </p:nvSpPr>
-        <p:spPr>
-          <a:xfrm>
-            <a:off x="502920" y="2249424"/>
-            <a:ext cx="10424160" cy="365760"/>
-          </a:xfrm>
-          <a:prstGeom prst="rect">
-            <a:avLst/>
-          </a:prstGeom>
-          <a:noFill/>
-          <a:ln/>
-        </p:spPr>
-        <p:txBody>
-          <a:bodyPr wrap="square" lIns="0" tIns="0" rIns="0" bIns="0" rtlCol="0" anchor="ctr"/>
-          <a:lstStyle/>
-          <a:p>
-            <a:pPr marL="0" indent="0">
-              <a:buNone/>
-            </a:pPr>
-            <a:r>
-              <a:rPr lang="en-US" sz="1300" i="1" dirty="0">
-                <a:solidFill>
-                  <a:srgbClr val="9EC9BE"/>
-                </a:solidFill>
-                <a:latin typeface="Calibri" pitchFamily="34" charset="0"/>
-                <a:ea typeface="Calibri" pitchFamily="34" charset="-122"/>
-                <a:cs typeface="Calibri" pitchFamily="34" charset="-120"/>
-              </a:rPr>
-              <a:t>IDBI Innovate 2026 · Track 2 · Prototype Submission</a:t>
-            </a:r>
-            <a:endParaRPr lang="en-US" sz="1300" dirty="0"/>
-          </a:p>
-        </p:txBody>
-      </p:sp>
-      <p:sp>
-        <p:nvSpPr>
-          <p:cNvPr id="5" name="Shape 3"/>
-          <p:cNvSpPr/>
-          <p:nvPr/>
-        </p:nvSpPr>
-        <p:spPr>
-          <a:xfrm>
-            <a:off x="502920" y="3017520"/>
-            <a:ext cx="11183112" cy="2926080"/>
-          </a:xfrm>
-          <a:prstGeom prst="roundRect">
-            <a:avLst>
-              <a:gd name="adj" fmla="val 2813"/>
-            </a:avLst>
-          </a:prstGeom>
-          <a:solidFill>
-            <a:srgbClr val="FFFFFF"/>
-          </a:solidFill>
-          <a:ln w="12700">
-            <a:solidFill>
-              <a:srgbClr val="FFFFFF"/>
-            </a:solidFill>
-            <a:prstDash val="solid"/>
-          </a:ln>
-        </p:spPr>
-        <p:txBody>
-          <a:bodyPr/>
-          <a:lstStyle/>
-          <a:p>
-            <a:endParaRPr lang="en-IN" dirty="0"/>
-          </a:p>
-        </p:txBody>
-      </p:sp>
-      <p:sp>
-        <p:nvSpPr>
-          <p:cNvPr id="6" name="Text 4"/>
-          <p:cNvSpPr/>
-          <p:nvPr/>
-        </p:nvSpPr>
-        <p:spPr>
-          <a:xfrm>
-            <a:off x="868680" y="3246120"/>
-            <a:ext cx="5486400" cy="365760"/>
-          </a:xfrm>
-          <a:prstGeom prst="rect">
-            <a:avLst/>
-          </a:prstGeom>
-          <a:noFill/>
-          <a:ln/>
-        </p:spPr>
-        <p:txBody>
-          <a:bodyPr wrap="square" lIns="0" tIns="0" rIns="0" bIns="0" rtlCol="0" anchor="ctr"/>
-          <a:lstStyle/>
-          <a:p>
-            <a:pPr marL="0" indent="0">
-              <a:buNone/>
-            </a:pPr>
-            <a:r>
-              <a:rPr lang="en-US" sz="1600" b="1" dirty="0">
-                <a:solidFill>
-                  <a:srgbClr val="0E201B"/>
-                </a:solidFill>
-                <a:latin typeface="Arial" pitchFamily="34" charset="0"/>
-                <a:ea typeface="Arial" pitchFamily="34" charset="-122"/>
-                <a:cs typeface="Arial" pitchFamily="34" charset="-120"/>
-              </a:rPr>
-              <a:t>Team Details</a:t>
-            </a:r>
-            <a:endParaRPr lang="en-US" sz="1600" dirty="0"/>
-          </a:p>
-        </p:txBody>
-      </p:sp>
-      <p:sp>
-        <p:nvSpPr>
-          <p:cNvPr id="7" name="Text 5"/>
-          <p:cNvSpPr/>
-          <p:nvPr/>
-        </p:nvSpPr>
-        <p:spPr>
-          <a:xfrm>
-            <a:off x="868680" y="3703320"/>
-            <a:ext cx="2651760" cy="685800"/>
-          </a:xfrm>
-          <a:prstGeom prst="rect">
-            <a:avLst/>
-          </a:prstGeom>
-          <a:noFill/>
-          <a:ln/>
-        </p:spPr>
-        <p:txBody>
-          <a:bodyPr wrap="square" lIns="0" tIns="0" rIns="0" bIns="0" rtlCol="0" anchor="t"/>
-          <a:lstStyle/>
-          <a:p>
-            <a:pPr marL="0" indent="0">
-              <a:buNone/>
-            </a:pPr>
-            <a:r>
-              <a:rPr lang="en-US" sz="1350" b="1" dirty="0">
-                <a:solidFill>
-                  <a:srgbClr val="00584C"/>
-                </a:solidFill>
-                <a:latin typeface="Calibri" pitchFamily="34" charset="0"/>
-                <a:ea typeface="Calibri" pitchFamily="34" charset="-122"/>
-                <a:cs typeface="Calibri" pitchFamily="34" charset="-120"/>
-              </a:rPr>
-              <a:t>a.  Team name</a:t>
-            </a:r>
-            <a:endParaRPr lang="en-US" sz="1350" dirty="0"/>
-          </a:p>
-        </p:txBody>
-      </p:sp>
-      <p:sp>
-        <p:nvSpPr>
-          <p:cNvPr id="8" name="Text 6"/>
-          <p:cNvSpPr/>
-          <p:nvPr/>
-        </p:nvSpPr>
-        <p:spPr>
-          <a:xfrm>
-            <a:off x="3657600" y="3703320"/>
-            <a:ext cx="7680960" cy="685800"/>
-          </a:xfrm>
-          <a:prstGeom prst="rect">
-            <a:avLst/>
-          </a:prstGeom>
-          <a:noFill/>
-          <a:ln/>
-        </p:spPr>
-        <p:txBody>
-          <a:bodyPr wrap="square" lIns="0" tIns="0" rIns="0" bIns="0" rtlCol="0" anchor="t"/>
-          <a:lstStyle/>
-          <a:p>
-            <a:pPr marL="0" indent="0">
-              <a:lnSpc>
-                <a:spcPct val="105000"/>
-              </a:lnSpc>
-              <a:buNone/>
-            </a:pPr>
-            <a:r>
-              <a:rPr lang="en-US" sz="1250" dirty="0">
-                <a:solidFill>
-                  <a:srgbClr val="0E201B"/>
-                </a:solidFill>
-                <a:latin typeface="Calibri" pitchFamily="34" charset="0"/>
-                <a:ea typeface="Calibri" pitchFamily="34" charset="-122"/>
-                <a:cs typeface="Calibri" pitchFamily="34" charset="-120"/>
-              </a:rPr>
-              <a:t>____________________________</a:t>
-            </a:r>
-            <a:endParaRPr lang="en-US" sz="1250" dirty="0"/>
-          </a:p>
-        </p:txBody>
-      </p:sp>
-      <p:sp>
-        <p:nvSpPr>
-          <p:cNvPr id="9" name="Text 7"/>
-          <p:cNvSpPr/>
-          <p:nvPr/>
-        </p:nvSpPr>
-        <p:spPr>
-          <a:xfrm>
-            <a:off x="868680" y="4416552"/>
-            <a:ext cx="2651760" cy="685800"/>
-          </a:xfrm>
-          <a:prstGeom prst="rect">
-            <a:avLst/>
-          </a:prstGeom>
-          <a:noFill/>
-          <a:ln/>
-        </p:spPr>
-        <p:txBody>
-          <a:bodyPr wrap="square" lIns="0" tIns="0" rIns="0" bIns="0" rtlCol="0" anchor="t"/>
-          <a:lstStyle/>
-          <a:p>
-            <a:pPr marL="0" indent="0">
-              <a:buNone/>
-            </a:pPr>
-            <a:r>
-              <a:rPr lang="en-US" sz="1350" b="1" dirty="0">
-                <a:solidFill>
-                  <a:srgbClr val="00584C"/>
-                </a:solidFill>
-                <a:latin typeface="Calibri" pitchFamily="34" charset="0"/>
-                <a:ea typeface="Calibri" pitchFamily="34" charset="-122"/>
-                <a:cs typeface="Calibri" pitchFamily="34" charset="-120"/>
-              </a:rPr>
-              <a:t>b.  Team leader name</a:t>
-            </a:r>
-            <a:endParaRPr lang="en-US" sz="1350" dirty="0"/>
-          </a:p>
-        </p:txBody>
-      </p:sp>
-      <p:sp>
-        <p:nvSpPr>
-          <p:cNvPr id="10" name="Text 8"/>
-          <p:cNvSpPr/>
-          <p:nvPr/>
-        </p:nvSpPr>
-        <p:spPr>
-          <a:xfrm>
-            <a:off x="3657600" y="4416552"/>
-            <a:ext cx="7680960" cy="685800"/>
-          </a:xfrm>
-          <a:prstGeom prst="rect">
-            <a:avLst/>
-          </a:prstGeom>
-          <a:noFill/>
-          <a:ln/>
-        </p:spPr>
-        <p:txBody>
-          <a:bodyPr wrap="square" lIns="0" tIns="0" rIns="0" bIns="0" rtlCol="0" anchor="t"/>
-          <a:lstStyle/>
-          <a:p>
-            <a:pPr marL="0" indent="0">
-              <a:lnSpc>
-                <a:spcPct val="105000"/>
-              </a:lnSpc>
-              <a:buNone/>
-            </a:pPr>
-            <a:r>
-              <a:rPr lang="en-US" sz="1250" dirty="0">
-                <a:solidFill>
-                  <a:srgbClr val="0E201B"/>
-                </a:solidFill>
-                <a:latin typeface="Calibri" pitchFamily="34" charset="0"/>
-                <a:ea typeface="Calibri" pitchFamily="34" charset="-122"/>
-                <a:cs typeface="Calibri" pitchFamily="34" charset="-120"/>
-              </a:rPr>
-              <a:t>____________________________</a:t>
-            </a:r>
-            <a:endParaRPr lang="en-US" sz="1250" dirty="0"/>
-          </a:p>
-        </p:txBody>
-      </p:sp>
-      <p:sp>
-        <p:nvSpPr>
-          <p:cNvPr id="11" name="Text 9"/>
-          <p:cNvSpPr/>
-          <p:nvPr/>
-        </p:nvSpPr>
-        <p:spPr>
-          <a:xfrm>
-            <a:off x="868680" y="5129784"/>
-            <a:ext cx="2651760" cy="685800"/>
-          </a:xfrm>
-          <a:prstGeom prst="rect">
-            <a:avLst/>
-          </a:prstGeom>
-          <a:noFill/>
-          <a:ln/>
-        </p:spPr>
-        <p:txBody>
-          <a:bodyPr wrap="square" lIns="0" tIns="0" rIns="0" bIns="0" rtlCol="0" anchor="t"/>
-          <a:lstStyle/>
-          <a:p>
-            <a:pPr marL="0" indent="0">
-              <a:buNone/>
-            </a:pPr>
-            <a:r>
-              <a:rPr lang="en-US" sz="1350" b="1" dirty="0">
-                <a:solidFill>
-                  <a:srgbClr val="00584C"/>
-                </a:solidFill>
-                <a:latin typeface="Calibri" pitchFamily="34" charset="0"/>
-                <a:ea typeface="Calibri" pitchFamily="34" charset="-122"/>
-                <a:cs typeface="Calibri" pitchFamily="34" charset="-120"/>
-              </a:rPr>
-              <a:t>c.  Problem statement</a:t>
-            </a:r>
-            <a:endParaRPr lang="en-US" sz="1350" dirty="0"/>
-          </a:p>
-        </p:txBody>
-      </p:sp>
-      <p:sp>
-        <p:nvSpPr>
-          <p:cNvPr id="12" name="Text 10"/>
-          <p:cNvSpPr/>
-          <p:nvPr/>
-        </p:nvSpPr>
-        <p:spPr>
-          <a:xfrm>
-            <a:off x="3657600" y="5129784"/>
-            <a:ext cx="7680960" cy="685800"/>
-          </a:xfrm>
-          <a:prstGeom prst="rect">
-            <a:avLst/>
-          </a:prstGeom>
-          <a:noFill/>
-          <a:ln/>
-        </p:spPr>
-        <p:txBody>
-          <a:bodyPr wrap="square" lIns="0" tIns="0" rIns="0" bIns="0" rtlCol="0" anchor="t"/>
-          <a:lstStyle/>
-          <a:p>
-            <a:pPr marL="0" indent="0">
-              <a:lnSpc>
-                <a:spcPct val="105000"/>
-              </a:lnSpc>
-              <a:buNone/>
-            </a:pPr>
-            <a:r>
-              <a:rPr lang="en-US" sz="1250" dirty="0">
-                <a:solidFill>
-                  <a:srgbClr val="0E201B"/>
-                </a:solidFill>
-                <a:latin typeface="Calibri" pitchFamily="34" charset="0"/>
-                <a:ea typeface="Calibri" pitchFamily="34" charset="-122"/>
-                <a:cs typeface="Calibri" pitchFamily="34" charset="-120"/>
-              </a:rPr>
-              <a:t>Track 2 — Prospect Assist AI: data-driven identification of eligible, repayment-capable, genuinely interested retail-loan prospects from transaction &amp; behavioral insights (Personal · Home · Mortgage/LAP · Auto)</a:t>
-            </a:r>
-            <a:endParaRPr lang="en-US" sz="1250" dirty="0"/>
-          </a:p>
-        </p:txBody>
-      </p:sp>
-    </p:spTree>
-  </p:cSld>
-  <p:clrMapOvr>
-    <a:masterClrMapping/>
-  </p:clrMapOvr>
-</p:sld>
-</file>
-
-<file path=ppt/slides/slide3.xml><?xml version="1.0" encoding="utf-8"?>
-<p:sld xmlns:a="http://schemas.openxmlformats.org/drawingml/2006/main" xmlns:r="http://schemas.openxmlformats.org/officeDocument/2006/relationships" xmlns:p="http://schemas.openxmlformats.org/presentationml/2006/main">
   <p:cSld name="Slide 2">
     <p:spTree>
       <p:nvGrpSpPr>
@@ -7294,7 +6096,7 @@
 </p:sld>
 </file>
 
-<file path=ppt/slides/slide4.xml><?xml version="1.0" encoding="utf-8"?>
+<file path=ppt/slides/slide3.xml><?xml version="1.0" encoding="utf-8"?>
 <p:sld xmlns:a="http://schemas.openxmlformats.org/drawingml/2006/main" xmlns:r="http://schemas.openxmlformats.org/officeDocument/2006/relationships" xmlns:p="http://schemas.openxmlformats.org/presentationml/2006/main">
   <p:cSld name="Slide 3">
     <p:spTree>
@@ -8013,7 +6815,7 @@
 </p:sld>
 </file>
 
-<file path=ppt/slides/slide5.xml><?xml version="1.0" encoding="utf-8"?>
+<file path=ppt/slides/slide4.xml><?xml version="1.0" encoding="utf-8"?>
 <p:sld xmlns:a="http://schemas.openxmlformats.org/drawingml/2006/main" xmlns:r="http://schemas.openxmlformats.org/officeDocument/2006/relationships" xmlns:p="http://schemas.openxmlformats.org/presentationml/2006/main">
   <p:cSld name="Slide 4">
     <p:spTree>
@@ -9079,7 +7881,7 @@
 </p:sld>
 </file>
 
-<file path=ppt/slides/slide6.xml><?xml version="1.0" encoding="utf-8"?>
+<file path=ppt/slides/slide5.xml><?xml version="1.0" encoding="utf-8"?>
 <p:sld xmlns:a="http://schemas.openxmlformats.org/drawingml/2006/main" xmlns:r="http://schemas.openxmlformats.org/officeDocument/2006/relationships" xmlns:p="http://schemas.openxmlformats.org/presentationml/2006/main">
   <p:cSld name="Slide 5">
     <p:spTree>
@@ -10384,7 +9186,7 @@
 </p:sld>
 </file>
 
-<file path=ppt/slides/slide7.xml><?xml version="1.0" encoding="utf-8"?>
+<file path=ppt/slides/slide6.xml><?xml version="1.0" encoding="utf-8"?>
 <p:sld xmlns:a="http://schemas.openxmlformats.org/drawingml/2006/main" xmlns:r="http://schemas.openxmlformats.org/officeDocument/2006/relationships" xmlns:p="http://schemas.openxmlformats.org/presentationml/2006/main">
   <p:cSld name="Slide 6">
     <p:spTree>
@@ -10561,7 +9363,7 @@
 </p:sld>
 </file>
 
-<file path=ppt/slides/slide8.xml><?xml version="1.0" encoding="utf-8"?>
+<file path=ppt/slides/slide7.xml><?xml version="1.0" encoding="utf-8"?>
 <p:sld xmlns:a="http://schemas.openxmlformats.org/drawingml/2006/main" xmlns:r="http://schemas.openxmlformats.org/officeDocument/2006/relationships" xmlns:p="http://schemas.openxmlformats.org/presentationml/2006/main">
   <p:cSld name="Slide 7">
     <p:spTree>
@@ -11611,7 +10413,7 @@
 </p:sld>
 </file>
 
-<file path=ppt/slides/slide9.xml><?xml version="1.0" encoding="utf-8"?>
+<file path=ppt/slides/slide8.xml><?xml version="1.0" encoding="utf-8"?>
 <p:sld xmlns:a="http://schemas.openxmlformats.org/drawingml/2006/main" xmlns:r="http://schemas.openxmlformats.org/officeDocument/2006/relationships" xmlns:p="http://schemas.openxmlformats.org/presentationml/2006/main">
   <p:cSld name="Slide 8">
     <p:spTree>
@@ -12176,6 +10978,1465 @@
               <a:t>Prospect Assist AI · IDBI Innovate 2026 · Track 2</a:t>
             </a:r>
             <a:endParaRPr lang="en-US" sz="900" dirty="0"/>
+          </a:p>
+        </p:txBody>
+      </p:sp>
+    </p:spTree>
+  </p:cSld>
+  <p:clrMapOvr>
+    <a:masterClrMapping/>
+  </p:clrMapOvr>
+</p:sld>
+</file>
+
+<file path=ppt/slides/slide9.xml><?xml version="1.0" encoding="utf-8"?>
+<p:sld xmlns:a="http://schemas.openxmlformats.org/drawingml/2006/main" xmlns:r="http://schemas.openxmlformats.org/officeDocument/2006/relationships" xmlns:p="http://schemas.openxmlformats.org/presentationml/2006/main">
+  <p:cSld name="Slide 9">
+    <p:spTree>
+      <p:nvGrpSpPr>
+        <p:cNvPr id="1" name=""/>
+        <p:cNvGrpSpPr/>
+        <p:nvPr/>
+      </p:nvGrpSpPr>
+      <p:grpSpPr>
+        <a:xfrm>
+          <a:off x="0" y="0"/>
+          <a:ext cx="0" cy="0"/>
+          <a:chOff x="0" y="0"/>
+          <a:chExt cx="0" cy="0"/>
+        </a:xfrm>
+      </p:grpSpPr>
+      <p:sp>
+        <p:nvSpPr>
+          <p:cNvPr id="2" name="Rounded Rectangle 1"/>
+          <p:cNvSpPr/>
+          <p:nvPr/>
+        </p:nvSpPr>
+        <p:spPr>
+          <a:xfrm>
+            <a:off x="502920" y="347472"/>
+            <a:ext cx="1417320" cy="292608"/>
+          </a:xfrm>
+          <a:prstGeom prst="roundRect">
+            <a:avLst>
+              <a:gd name="adj" fmla="val 50000"/>
+            </a:avLst>
+          </a:prstGeom>
+          <a:solidFill>
+            <a:srgbClr val="00584C"/>
+          </a:solidFill>
+          <a:ln>
+            <a:noFill/>
+          </a:ln>
+        </p:spPr>
+        <p:style>
+          <a:lnRef idx="1">
+            <a:schemeClr val="accent1"/>
+          </a:lnRef>
+          <a:fillRef idx="3">
+            <a:schemeClr val="accent1"/>
+          </a:fillRef>
+          <a:effectRef idx="2">
+            <a:schemeClr val="accent1"/>
+          </a:effectRef>
+          <a:fontRef idx="minor">
+            <a:schemeClr val="lt1"/>
+          </a:fontRef>
+        </p:style>
+        <p:txBody>
+          <a:bodyPr rtlCol="0" anchor="ctr" lIns="0" rIns="0" tIns="0" bIns="0"/>
+          <a:lstStyle/>
+          <a:p>
+            <a:pPr algn="ctr"/>
+            <a:r>
+              <a:rPr sz="1100" b="1">
+                <a:solidFill>
+                  <a:srgbClr val="FFFFFF"/>
+                </a:solidFill>
+                <a:latin typeface="Calibri"/>
+              </a:rPr>
+              <a:t>09 · COST</a:t>
+            </a:r>
+          </a:p>
+        </p:txBody>
+      </p:sp>
+      <p:sp>
+        <p:nvSpPr>
+          <p:cNvPr id="3" name="TextBox 2"/>
+          <p:cNvSpPr txBox="1"/>
+          <p:nvPr/>
+        </p:nvSpPr>
+        <p:spPr>
+          <a:xfrm>
+            <a:off x="502920" y="713232"/>
+            <a:ext cx="11155680" cy="566928"/>
+          </a:xfrm>
+          <a:prstGeom prst="rect">
+            <a:avLst/>
+          </a:prstGeom>
+          <a:noFill/>
+        </p:spPr>
+        <p:txBody>
+          <a:bodyPr wrap="square" anchor="t" lIns="0" rIns="0" tIns="0" bIns="0">
+            <a:spAutoFit/>
+          </a:bodyPr>
+          <a:lstStyle/>
+          <a:p>
+            <a:pPr algn="l">
+              <a:lnSpc>
+                <a:spcPct val="105000"/>
+              </a:lnSpc>
+            </a:pPr>
+            <a:r>
+              <a:rPr sz="2800" b="1" i="0">
+                <a:solidFill>
+                  <a:srgbClr val="0E201B"/>
+                </a:solidFill>
+                <a:latin typeface="Arial"/>
+              </a:rPr>
+              <a:t>Estimated implementation cost</a:t>
+            </a:r>
+          </a:p>
+        </p:txBody>
+      </p:sp>
+      <p:sp>
+        <p:nvSpPr>
+          <p:cNvPr id="4" name="TextBox 3"/>
+          <p:cNvSpPr txBox="1"/>
+          <p:nvPr/>
+        </p:nvSpPr>
+        <p:spPr>
+          <a:xfrm>
+            <a:off x="502920" y="1298448"/>
+            <a:ext cx="11155680" cy="320040"/>
+          </a:xfrm>
+          <a:prstGeom prst="rect">
+            <a:avLst/>
+          </a:prstGeom>
+          <a:noFill/>
+        </p:spPr>
+        <p:txBody>
+          <a:bodyPr wrap="square" anchor="t" lIns="0" rIns="0" tIns="0" bIns="0">
+            <a:spAutoFit/>
+          </a:bodyPr>
+          <a:lstStyle/>
+          <a:p>
+            <a:pPr algn="l">
+              <a:lnSpc>
+                <a:spcPct val="105000"/>
+              </a:lnSpc>
+            </a:pPr>
+            <a:r>
+              <a:rPr sz="1250" b="0" i="1">
+                <a:solidFill>
+                  <a:srgbClr val="55645F"/>
+                </a:solidFill>
+                <a:latin typeface="Calibri"/>
+              </a:rPr>
+              <a:t>Pilot scenario — 100K customers, 12 months of transaction data (AWS, indicative)</a:t>
+            </a:r>
+          </a:p>
+        </p:txBody>
+      </p:sp>
+      <p:graphicFrame>
+        <p:nvGraphicFramePr>
+          <p:cNvPr id="5" name="Table 4"/>
+          <p:cNvGraphicFramePr>
+            <a:graphicFrameLocks noGrp="1"/>
+          </p:cNvGraphicFramePr>
+          <p:nvPr/>
+        </p:nvGraphicFramePr>
+        <p:xfrm>
+          <a:off x="502920" y="1755648"/>
+          <a:ext cx="6309360" cy="4425696"/>
+        </p:xfrm>
+        <a:graphic>
+          <a:graphicData uri="http://schemas.openxmlformats.org/drawingml/2006/table">
+            <a:tbl>
+              <a:tblPr firstRow="1" bandRow="0">
+                <a:tableStyleId>{5940675A-B579-460E-94D1-54222C63F5DA}</a:tableStyleId>
+              </a:tblPr>
+              <a:tblGrid>
+                <a:gridCol w="2514600"/>
+                <a:gridCol w="1508760"/>
+                <a:gridCol w="2286000"/>
+              </a:tblGrid>
+              <a:tr h="402336">
+                <a:tc>
+                  <a:txBody>
+                    <a:bodyPr wrap="square"/>
+                    <a:lstStyle/>
+                    <a:p>
+                      <a:pPr algn="l"/>
+                      <a:r>
+                        <a:rPr sz="1100" b="1" i="0">
+                          <a:solidFill>
+                            <a:srgbClr val="FFFFFF"/>
+                          </a:solidFill>
+                          <a:latin typeface="Calibri"/>
+                        </a:rPr>
+                        <a:t>Component</a:t>
+                      </a:r>
+                    </a:p>
+                  </a:txBody>
+                  <a:tcPr anchor="ctr" marL="73152" marR="73152" marT="18288" marB="18288">
+                    <a:solidFill>
+                      <a:srgbClr val="00584C"/>
+                    </a:solidFill>
+                  </a:tcPr>
+                </a:tc>
+                <a:tc>
+                  <a:txBody>
+                    <a:bodyPr wrap="square"/>
+                    <a:lstStyle/>
+                    <a:p>
+                      <a:pPr algn="l"/>
+                      <a:r>
+                        <a:rPr sz="1100" b="1" i="0">
+                          <a:solidFill>
+                            <a:srgbClr val="FFFFFF"/>
+                          </a:solidFill>
+                          <a:latin typeface="Calibri"/>
+                        </a:rPr>
+                        <a:t>Monthly cost (INR)</a:t>
+                      </a:r>
+                    </a:p>
+                  </a:txBody>
+                  <a:tcPr anchor="ctr" marL="73152" marR="73152" marT="18288" marB="18288">
+                    <a:solidFill>
+                      <a:srgbClr val="00584C"/>
+                    </a:solidFill>
+                  </a:tcPr>
+                </a:tc>
+                <a:tc>
+                  <a:txBody>
+                    <a:bodyPr wrap="square"/>
+                    <a:lstStyle/>
+                    <a:p>
+                      <a:pPr algn="l"/>
+                      <a:r>
+                        <a:rPr sz="1100" b="1" i="0">
+                          <a:solidFill>
+                            <a:srgbClr val="FFFFFF"/>
+                          </a:solidFill>
+                          <a:latin typeface="Calibri"/>
+                        </a:rPr>
+                        <a:t>Notes</a:t>
+                      </a:r>
+                    </a:p>
+                  </a:txBody>
+                  <a:tcPr anchor="ctr" marL="73152" marR="73152" marT="18288" marB="18288">
+                    <a:solidFill>
+                      <a:srgbClr val="00584C"/>
+                    </a:solidFill>
+                  </a:tcPr>
+                </a:tc>
+              </a:tr>
+              <a:tr h="402336">
+                <a:tc>
+                  <a:txBody>
+                    <a:bodyPr wrap="square"/>
+                    <a:lstStyle/>
+                    <a:p>
+                      <a:pPr algn="l"/>
+                      <a:r>
+                        <a:rPr sz="1050" b="0" i="0">
+                          <a:solidFill>
+                            <a:srgbClr val="0E201B"/>
+                          </a:solidFill>
+                          <a:latin typeface="Calibri"/>
+                        </a:rPr>
+                        <a:t>Compute (EC2 / serverless)</a:t>
+                      </a:r>
+                    </a:p>
+                  </a:txBody>
+                  <a:tcPr anchor="ctr" marL="73152" marR="73152" marT="18288" marB="18288">
+                    <a:solidFill>
+                      <a:srgbClr val="FFFFFF"/>
+                    </a:solidFill>
+                  </a:tcPr>
+                </a:tc>
+                <a:tc>
+                  <a:txBody>
+                    <a:bodyPr wrap="square"/>
+                    <a:lstStyle/>
+                    <a:p>
+                      <a:pPr algn="l"/>
+                      <a:r>
+                        <a:rPr sz="1050" b="1" i="0">
+                          <a:solidFill>
+                            <a:srgbClr val="0E201B"/>
+                          </a:solidFill>
+                          <a:latin typeface="Calibri"/>
+                        </a:rPr>
+                        <a:t>₹15,000</a:t>
+                      </a:r>
+                    </a:p>
+                  </a:txBody>
+                  <a:tcPr anchor="ctr" marL="73152" marR="73152" marT="18288" marB="18288">
+                    <a:solidFill>
+                      <a:srgbClr val="FFFFFF"/>
+                    </a:solidFill>
+                  </a:tcPr>
+                </a:tc>
+                <a:tc>
+                  <a:txBody>
+                    <a:bodyPr wrap="square"/>
+                    <a:lstStyle/>
+                    <a:p>
+                      <a:pPr algn="l"/>
+                      <a:r>
+                        <a:rPr sz="1000" b="0" i="0">
+                          <a:solidFill>
+                            <a:srgbClr val="55645F"/>
+                          </a:solidFill>
+                          <a:latin typeface="Calibri"/>
+                        </a:rPr>
+                        <a:t>Spot instances, auto-scaling</a:t>
+                      </a:r>
+                    </a:p>
+                  </a:txBody>
+                  <a:tcPr anchor="ctr" marL="73152" marR="73152" marT="18288" marB="18288">
+                    <a:solidFill>
+                      <a:srgbClr val="FFFFFF"/>
+                    </a:solidFill>
+                  </a:tcPr>
+                </a:tc>
+              </a:tr>
+              <a:tr h="402336">
+                <a:tc>
+                  <a:txBody>
+                    <a:bodyPr wrap="square"/>
+                    <a:lstStyle/>
+                    <a:p>
+                      <a:pPr algn="l"/>
+                      <a:r>
+                        <a:rPr sz="1050" b="0" i="0">
+                          <a:solidFill>
+                            <a:srgbClr val="0E201B"/>
+                          </a:solidFill>
+                          <a:latin typeface="Calibri"/>
+                        </a:rPr>
+                        <a:t>Storage (S3 data lake)</a:t>
+                      </a:r>
+                    </a:p>
+                  </a:txBody>
+                  <a:tcPr anchor="ctr" marL="73152" marR="73152" marT="18288" marB="18288">
+                    <a:solidFill>
+                      <a:srgbClr val="FFFFFF"/>
+                    </a:solidFill>
+                  </a:tcPr>
+                </a:tc>
+                <a:tc>
+                  <a:txBody>
+                    <a:bodyPr wrap="square"/>
+                    <a:lstStyle/>
+                    <a:p>
+                      <a:pPr algn="l"/>
+                      <a:r>
+                        <a:rPr sz="1050" b="1" i="0">
+                          <a:solidFill>
+                            <a:srgbClr val="0E201B"/>
+                          </a:solidFill>
+                          <a:latin typeface="Calibri"/>
+                        </a:rPr>
+                        <a:t>₹2,100</a:t>
+                      </a:r>
+                    </a:p>
+                  </a:txBody>
+                  <a:tcPr anchor="ctr" marL="73152" marR="73152" marT="18288" marB="18288">
+                    <a:solidFill>
+                      <a:srgbClr val="FFFFFF"/>
+                    </a:solidFill>
+                  </a:tcPr>
+                </a:tc>
+                <a:tc>
+                  <a:txBody>
+                    <a:bodyPr wrap="square"/>
+                    <a:lstStyle/>
+                    <a:p>
+                      <a:pPr algn="l"/>
+                      <a:r>
+                        <a:rPr sz="1000" b="0" i="0">
+                          <a:solidFill>
+                            <a:srgbClr val="55645F"/>
+                          </a:solidFill>
+                          <a:latin typeface="Calibri"/>
+                        </a:rPr>
+                        <a:t>1 TB transaction data</a:t>
+                      </a:r>
+                    </a:p>
+                  </a:txBody>
+                  <a:tcPr anchor="ctr" marL="73152" marR="73152" marT="18288" marB="18288">
+                    <a:solidFill>
+                      <a:srgbClr val="FFFFFF"/>
+                    </a:solidFill>
+                  </a:tcPr>
+                </a:tc>
+              </a:tr>
+              <a:tr h="402336">
+                <a:tc>
+                  <a:txBody>
+                    <a:bodyPr wrap="square"/>
+                    <a:lstStyle/>
+                    <a:p>
+                      <a:pPr algn="l"/>
+                      <a:r>
+                        <a:rPr sz="1050" b="0" i="0">
+                          <a:solidFill>
+                            <a:srgbClr val="0E201B"/>
+                          </a:solidFill>
+                          <a:latin typeface="Calibri"/>
+                        </a:rPr>
+                        <a:t>ETL (Glue / Spark)</a:t>
+                      </a:r>
+                    </a:p>
+                  </a:txBody>
+                  <a:tcPr anchor="ctr" marL="73152" marR="73152" marT="18288" marB="18288">
+                    <a:solidFill>
+                      <a:srgbClr val="FFFFFF"/>
+                    </a:solidFill>
+                  </a:tcPr>
+                </a:tc>
+                <a:tc>
+                  <a:txBody>
+                    <a:bodyPr wrap="square"/>
+                    <a:lstStyle/>
+                    <a:p>
+                      <a:pPr algn="l"/>
+                      <a:r>
+                        <a:rPr sz="1050" b="1" i="0">
+                          <a:solidFill>
+                            <a:srgbClr val="0E201B"/>
+                          </a:solidFill>
+                          <a:latin typeface="Calibri"/>
+                        </a:rPr>
+                        <a:t>₹6,700</a:t>
+                      </a:r>
+                    </a:p>
+                  </a:txBody>
+                  <a:tcPr anchor="ctr" marL="73152" marR="73152" marT="18288" marB="18288">
+                    <a:solidFill>
+                      <a:srgbClr val="FFFFFF"/>
+                    </a:solidFill>
+                  </a:tcPr>
+                </a:tc>
+                <a:tc>
+                  <a:txBody>
+                    <a:bodyPr wrap="square"/>
+                    <a:lstStyle/>
+                    <a:p>
+                      <a:pPr algn="l"/>
+                      <a:r>
+                        <a:rPr sz="1000" b="0" i="0">
+                          <a:solidFill>
+                            <a:srgbClr val="55645F"/>
+                          </a:solidFill>
+                          <a:latin typeface="Calibri"/>
+                        </a:rPr>
+                        <a:t>Daily batch jobs</a:t>
+                      </a:r>
+                    </a:p>
+                  </a:txBody>
+                  <a:tcPr anchor="ctr" marL="73152" marR="73152" marT="18288" marB="18288">
+                    <a:solidFill>
+                      <a:srgbClr val="FFFFFF"/>
+                    </a:solidFill>
+                  </a:tcPr>
+                </a:tc>
+              </a:tr>
+              <a:tr h="402336">
+                <a:tc>
+                  <a:txBody>
+                    <a:bodyPr wrap="square"/>
+                    <a:lstStyle/>
+                    <a:p>
+                      <a:pPr algn="l"/>
+                      <a:r>
+                        <a:rPr sz="1050" b="0" i="0">
+                          <a:solidFill>
+                            <a:srgbClr val="0E201B"/>
+                          </a:solidFill>
+                          <a:latin typeface="Calibri"/>
+                        </a:rPr>
+                        <a:t>ML training (SageMaker)</a:t>
+                      </a:r>
+                    </a:p>
+                  </a:txBody>
+                  <a:tcPr anchor="ctr" marL="73152" marR="73152" marT="18288" marB="18288">
+                    <a:solidFill>
+                      <a:srgbClr val="FFFFFF"/>
+                    </a:solidFill>
+                  </a:tcPr>
+                </a:tc>
+                <a:tc>
+                  <a:txBody>
+                    <a:bodyPr wrap="square"/>
+                    <a:lstStyle/>
+                    <a:p>
+                      <a:pPr algn="l"/>
+                      <a:r>
+                        <a:rPr sz="1050" b="1" i="0">
+                          <a:solidFill>
+                            <a:srgbClr val="0E201B"/>
+                          </a:solidFill>
+                          <a:latin typeface="Calibri"/>
+                        </a:rPr>
+                        <a:t>₹10,000</a:t>
+                      </a:r>
+                    </a:p>
+                  </a:txBody>
+                  <a:tcPr anchor="ctr" marL="73152" marR="73152" marT="18288" marB="18288">
+                    <a:solidFill>
+                      <a:srgbClr val="FFFFFF"/>
+                    </a:solidFill>
+                  </a:tcPr>
+                </a:tc>
+                <a:tc>
+                  <a:txBody>
+                    <a:bodyPr wrap="square"/>
+                    <a:lstStyle/>
+                    <a:p>
+                      <a:pPr algn="l"/>
+                      <a:r>
+                        <a:rPr sz="1000" b="0" i="0">
+                          <a:solidFill>
+                            <a:srgbClr val="55645F"/>
+                          </a:solidFill>
+                          <a:latin typeface="Calibri"/>
+                        </a:rPr>
+                        <a:t>Weekly retraining, spot pricing</a:t>
+                      </a:r>
+                    </a:p>
+                  </a:txBody>
+                  <a:tcPr anchor="ctr" marL="73152" marR="73152" marT="18288" marB="18288">
+                    <a:solidFill>
+                      <a:srgbClr val="FFFFFF"/>
+                    </a:solidFill>
+                  </a:tcPr>
+                </a:tc>
+              </a:tr>
+              <a:tr h="402336">
+                <a:tc>
+                  <a:txBody>
+                    <a:bodyPr wrap="square"/>
+                    <a:lstStyle/>
+                    <a:p>
+                      <a:pPr algn="l"/>
+                      <a:r>
+                        <a:rPr sz="1050" b="0" i="0">
+                          <a:solidFill>
+                            <a:srgbClr val="0E201B"/>
+                          </a:solidFill>
+                          <a:latin typeface="Calibri"/>
+                        </a:rPr>
+                        <a:t>ML inference (batch transform)</a:t>
+                      </a:r>
+                    </a:p>
+                  </a:txBody>
+                  <a:tcPr anchor="ctr" marL="73152" marR="73152" marT="18288" marB="18288">
+                    <a:solidFill>
+                      <a:srgbClr val="FFFFFF"/>
+                    </a:solidFill>
+                  </a:tcPr>
+                </a:tc>
+                <a:tc>
+                  <a:txBody>
+                    <a:bodyPr wrap="square"/>
+                    <a:lstStyle/>
+                    <a:p>
+                      <a:pPr algn="l"/>
+                      <a:r>
+                        <a:rPr sz="1050" b="1" i="0">
+                          <a:solidFill>
+                            <a:srgbClr val="0E201B"/>
+                          </a:solidFill>
+                          <a:latin typeface="Calibri"/>
+                        </a:rPr>
+                        <a:t>₹12,500</a:t>
+                      </a:r>
+                    </a:p>
+                  </a:txBody>
+                  <a:tcPr anchor="ctr" marL="73152" marR="73152" marT="18288" marB="18288">
+                    <a:solidFill>
+                      <a:srgbClr val="FFFFFF"/>
+                    </a:solidFill>
+                  </a:tcPr>
+                </a:tc>
+                <a:tc>
+                  <a:txBody>
+                    <a:bodyPr wrap="square"/>
+                    <a:lstStyle/>
+                    <a:p>
+                      <a:pPr algn="l"/>
+                      <a:r>
+                        <a:rPr sz="1000" b="0" i="0">
+                          <a:solidFill>
+                            <a:srgbClr val="55645F"/>
+                          </a:solidFill>
+                          <a:latin typeface="Calibri"/>
+                        </a:rPr>
+                        <a:t>Nightly scoring, no real-time endpoints</a:t>
+                      </a:r>
+                    </a:p>
+                  </a:txBody>
+                  <a:tcPr anchor="ctr" marL="73152" marR="73152" marT="18288" marB="18288">
+                    <a:solidFill>
+                      <a:srgbClr val="FFFFFF"/>
+                    </a:solidFill>
+                  </a:tcPr>
+                </a:tc>
+              </a:tr>
+              <a:tr h="402336">
+                <a:tc>
+                  <a:txBody>
+                    <a:bodyPr wrap="square"/>
+                    <a:lstStyle/>
+                    <a:p>
+                      <a:pPr algn="l"/>
+                      <a:r>
+                        <a:rPr sz="1050" b="0" i="0">
+                          <a:solidFill>
+                            <a:srgbClr val="0E201B"/>
+                          </a:solidFill>
+                          <a:latin typeface="Calibri"/>
+                        </a:rPr>
+                        <a:t>Cache (ElastiCache)</a:t>
+                      </a:r>
+                    </a:p>
+                  </a:txBody>
+                  <a:tcPr anchor="ctr" marL="73152" marR="73152" marT="18288" marB="18288">
+                    <a:solidFill>
+                      <a:srgbClr val="FFFFFF"/>
+                    </a:solidFill>
+                  </a:tcPr>
+                </a:tc>
+                <a:tc>
+                  <a:txBody>
+                    <a:bodyPr wrap="square"/>
+                    <a:lstStyle/>
+                    <a:p>
+                      <a:pPr algn="l"/>
+                      <a:r>
+                        <a:rPr sz="1050" b="1" i="0">
+                          <a:solidFill>
+                            <a:srgbClr val="0E201B"/>
+                          </a:solidFill>
+                          <a:latin typeface="Calibri"/>
+                        </a:rPr>
+                        <a:t>₹3,300</a:t>
+                      </a:r>
+                    </a:p>
+                  </a:txBody>
+                  <a:tcPr anchor="ctr" marL="73152" marR="73152" marT="18288" marB="18288">
+                    <a:solidFill>
+                      <a:srgbClr val="FFFFFF"/>
+                    </a:solidFill>
+                  </a:tcPr>
+                </a:tc>
+                <a:tc>
+                  <a:txBody>
+                    <a:bodyPr wrap="square"/>
+                    <a:lstStyle/>
+                    <a:p>
+                      <a:pPr algn="l"/>
+                      <a:r>
+                        <a:rPr sz="1000" b="0" i="0">
+                          <a:solidFill>
+                            <a:srgbClr val="55645F"/>
+                          </a:solidFill>
+                          <a:latin typeface="Calibri"/>
+                        </a:rPr>
+                        <a:t>Real-time intent signals</a:t>
+                      </a:r>
+                    </a:p>
+                  </a:txBody>
+                  <a:tcPr anchor="ctr" marL="73152" marR="73152" marT="18288" marB="18288">
+                    <a:solidFill>
+                      <a:srgbClr val="FFFFFF"/>
+                    </a:solidFill>
+                  </a:tcPr>
+                </a:tc>
+              </a:tr>
+              <a:tr h="402336">
+                <a:tc>
+                  <a:txBody>
+                    <a:bodyPr wrap="square"/>
+                    <a:lstStyle/>
+                    <a:p>
+                      <a:pPr algn="l"/>
+                      <a:r>
+                        <a:rPr sz="1050" b="0" i="0">
+                          <a:solidFill>
+                            <a:srgbClr val="0E201B"/>
+                          </a:solidFill>
+                          <a:latin typeface="Calibri"/>
+                        </a:rPr>
+                        <a:t>Database (RDS / Aurora)</a:t>
+                      </a:r>
+                    </a:p>
+                  </a:txBody>
+                  <a:tcPr anchor="ctr" marL="73152" marR="73152" marT="18288" marB="18288">
+                    <a:solidFill>
+                      <a:srgbClr val="FFFFFF"/>
+                    </a:solidFill>
+                  </a:tcPr>
+                </a:tc>
+                <a:tc>
+                  <a:txBody>
+                    <a:bodyPr wrap="square"/>
+                    <a:lstStyle/>
+                    <a:p>
+                      <a:pPr algn="l"/>
+                      <a:r>
+                        <a:rPr sz="1050" b="1" i="0">
+                          <a:solidFill>
+                            <a:srgbClr val="0E201B"/>
+                          </a:solidFill>
+                          <a:latin typeface="Calibri"/>
+                        </a:rPr>
+                        <a:t>₹5,000</a:t>
+                      </a:r>
+                    </a:p>
+                  </a:txBody>
+                  <a:tcPr anchor="ctr" marL="73152" marR="73152" marT="18288" marB="18288">
+                    <a:solidFill>
+                      <a:srgbClr val="FFFFFF"/>
+                    </a:solidFill>
+                  </a:tcPr>
+                </a:tc>
+                <a:tc>
+                  <a:txBody>
+                    <a:bodyPr wrap="square"/>
+                    <a:lstStyle/>
+                    <a:p>
+                      <a:pPr algn="l"/>
+                      <a:r>
+                        <a:rPr sz="1000" b="0" i="0">
+                          <a:solidFill>
+                            <a:srgbClr val="55645F"/>
+                          </a:solidFill>
+                          <a:latin typeface="Calibri"/>
+                        </a:rPr>
+                        <a:t>Episodic + document store</a:t>
+                      </a:r>
+                    </a:p>
+                  </a:txBody>
+                  <a:tcPr anchor="ctr" marL="73152" marR="73152" marT="18288" marB="18288">
+                    <a:solidFill>
+                      <a:srgbClr val="FFFFFF"/>
+                    </a:solidFill>
+                  </a:tcPr>
+                </a:tc>
+              </a:tr>
+              <a:tr h="402336">
+                <a:tc>
+                  <a:txBody>
+                    <a:bodyPr wrap="square"/>
+                    <a:lstStyle/>
+                    <a:p>
+                      <a:pPr algn="l"/>
+                      <a:r>
+                        <a:rPr sz="1050" b="0" i="0">
+                          <a:solidFill>
+                            <a:srgbClr val="0E201B"/>
+                          </a:solidFill>
+                          <a:latin typeface="Calibri"/>
+                        </a:rPr>
+                        <a:t>Vector + graph DB</a:t>
+                      </a:r>
+                    </a:p>
+                  </a:txBody>
+                  <a:tcPr anchor="ctr" marL="73152" marR="73152" marT="18288" marB="18288">
+                    <a:solidFill>
+                      <a:srgbClr val="FFFFFF"/>
+                    </a:solidFill>
+                  </a:tcPr>
+                </a:tc>
+                <a:tc>
+                  <a:txBody>
+                    <a:bodyPr wrap="square"/>
+                    <a:lstStyle/>
+                    <a:p>
+                      <a:pPr algn="l"/>
+                      <a:r>
+                        <a:rPr sz="1050" b="1" i="0">
+                          <a:solidFill>
+                            <a:srgbClr val="0E201B"/>
+                          </a:solidFill>
+                          <a:latin typeface="Calibri"/>
+                        </a:rPr>
+                        <a:t>₹6,700</a:t>
+                      </a:r>
+                    </a:p>
+                  </a:txBody>
+                  <a:tcPr anchor="ctr" marL="73152" marR="73152" marT="18288" marB="18288">
+                    <a:solidFill>
+                      <a:srgbClr val="FFFFFF"/>
+                    </a:solidFill>
+                  </a:tcPr>
+                </a:tc>
+                <a:tc>
+                  <a:txBody>
+                    <a:bodyPr wrap="square"/>
+                    <a:lstStyle/>
+                    <a:p>
+                      <a:pPr algn="l"/>
+                      <a:r>
+                        <a:rPr sz="1000" b="0" i="0">
+                          <a:solidFill>
+                            <a:srgbClr val="55645F"/>
+                          </a:solidFill>
+                          <a:latin typeface="Calibri"/>
+                        </a:rPr>
+                        <a:t>Qdrant + Neo4j on EC2</a:t>
+                      </a:r>
+                    </a:p>
+                  </a:txBody>
+                  <a:tcPr anchor="ctr" marL="73152" marR="73152" marT="18288" marB="18288">
+                    <a:solidFill>
+                      <a:srgbClr val="FFFFFF"/>
+                    </a:solidFill>
+                  </a:tcPr>
+                </a:tc>
+              </a:tr>
+              <a:tr h="402336">
+                <a:tc>
+                  <a:txBody>
+                    <a:bodyPr wrap="square"/>
+                    <a:lstStyle/>
+                    <a:p>
+                      <a:pPr algn="l"/>
+                      <a:r>
+                        <a:rPr sz="1050" b="0" i="0">
+                          <a:solidFill>
+                            <a:srgbClr val="0E201B"/>
+                          </a:solidFill>
+                          <a:latin typeface="Calibri"/>
+                        </a:rPr>
+                        <a:t>Monitoring (CloudWatch)</a:t>
+                      </a:r>
+                    </a:p>
+                  </a:txBody>
+                  <a:tcPr anchor="ctr" marL="73152" marR="73152" marT="18288" marB="18288">
+                    <a:solidFill>
+                      <a:srgbClr val="FFFFFF"/>
+                    </a:solidFill>
+                  </a:tcPr>
+                </a:tc>
+                <a:tc>
+                  <a:txBody>
+                    <a:bodyPr wrap="square"/>
+                    <a:lstStyle/>
+                    <a:p>
+                      <a:pPr algn="l"/>
+                      <a:r>
+                        <a:rPr sz="1050" b="1" i="0">
+                          <a:solidFill>
+                            <a:srgbClr val="0E201B"/>
+                          </a:solidFill>
+                          <a:latin typeface="Calibri"/>
+                        </a:rPr>
+                        <a:t>₹2,100</a:t>
+                      </a:r>
+                    </a:p>
+                  </a:txBody>
+                  <a:tcPr anchor="ctr" marL="73152" marR="73152" marT="18288" marB="18288">
+                    <a:solidFill>
+                      <a:srgbClr val="FFFFFF"/>
+                    </a:solidFill>
+                  </a:tcPr>
+                </a:tc>
+                <a:tc>
+                  <a:txBody>
+                    <a:bodyPr wrap="square"/>
+                    <a:lstStyle/>
+                    <a:p>
+                      <a:pPr algn="l"/>
+                      <a:r>
+                        <a:rPr sz="1000" b="0" i="0">
+                          <a:solidFill>
+                            <a:srgbClr val="55645F"/>
+                          </a:solidFill>
+                          <a:latin typeface="Calibri"/>
+                        </a:rPr>
+                        <a:t>Observability stack</a:t>
+                      </a:r>
+                    </a:p>
+                  </a:txBody>
+                  <a:tcPr anchor="ctr" marL="73152" marR="73152" marT="18288" marB="18288">
+                    <a:solidFill>
+                      <a:srgbClr val="FFFFFF"/>
+                    </a:solidFill>
+                  </a:tcPr>
+                </a:tc>
+              </a:tr>
+              <a:tr h="402336">
+                <a:tc>
+                  <a:txBody>
+                    <a:bodyPr wrap="square"/>
+                    <a:lstStyle/>
+                    <a:p>
+                      <a:pPr algn="l"/>
+                      <a:r>
+                        <a:rPr sz="1050" b="1" i="0">
+                          <a:solidFill>
+                            <a:srgbClr val="0E201B"/>
+                          </a:solidFill>
+                          <a:latin typeface="Calibri"/>
+                        </a:rPr>
+                        <a:t>Total monthly</a:t>
+                      </a:r>
+                    </a:p>
+                  </a:txBody>
+                  <a:tcPr anchor="ctr" marL="73152" marR="73152" marT="18288" marB="18288">
+                    <a:solidFill>
+                      <a:srgbClr val="EAF4F1"/>
+                    </a:solidFill>
+                  </a:tcPr>
+                </a:tc>
+                <a:tc>
+                  <a:txBody>
+                    <a:bodyPr wrap="square"/>
+                    <a:lstStyle/>
+                    <a:p>
+                      <a:pPr algn="l"/>
+                      <a:r>
+                        <a:rPr sz="1050" b="1" i="0">
+                          <a:solidFill>
+                            <a:srgbClr val="00584C"/>
+                          </a:solidFill>
+                          <a:latin typeface="Calibri"/>
+                        </a:rPr>
+                        <a:t>~₹50,900</a:t>
+                      </a:r>
+                    </a:p>
+                  </a:txBody>
+                  <a:tcPr anchor="ctr" marL="73152" marR="73152" marT="18288" marB="18288">
+                    <a:solidFill>
+                      <a:srgbClr val="EAF4F1"/>
+                    </a:solidFill>
+                  </a:tcPr>
+                </a:tc>
+                <a:tc>
+                  <a:txBody>
+                    <a:bodyPr wrap="square"/>
+                    <a:lstStyle/>
+                    <a:p>
+                      <a:pPr algn="l"/>
+                      <a:r>
+                        <a:rPr sz="1000" b="0" i="1">
+                          <a:solidFill>
+                            <a:srgbClr val="55645F"/>
+                          </a:solidFill>
+                          <a:latin typeface="Calibri"/>
+                        </a:rPr>
+                        <a:t>Well within pilot budget</a:t>
+                      </a:r>
+                    </a:p>
+                  </a:txBody>
+                  <a:tcPr anchor="ctr" marL="73152" marR="73152" marT="18288" marB="18288">
+                    <a:solidFill>
+                      <a:srgbClr val="EAF4F1"/>
+                    </a:solidFill>
+                  </a:tcPr>
+                </a:tc>
+              </a:tr>
+            </a:tbl>
+          </a:graphicData>
+        </a:graphic>
+      </p:graphicFrame>
+      <p:sp>
+        <p:nvSpPr>
+          <p:cNvPr id="6" name="TextBox 5"/>
+          <p:cNvSpPr txBox="1"/>
+          <p:nvPr/>
+        </p:nvSpPr>
+        <p:spPr>
+          <a:xfrm>
+            <a:off x="7178040" y="1755648"/>
+            <a:ext cx="4480560" cy="365760"/>
+          </a:xfrm>
+          <a:prstGeom prst="rect">
+            <a:avLst/>
+          </a:prstGeom>
+          <a:noFill/>
+        </p:spPr>
+        <p:txBody>
+          <a:bodyPr wrap="square" anchor="t" lIns="0" rIns="0" tIns="0" bIns="0">
+            <a:spAutoFit/>
+          </a:bodyPr>
+          <a:lstStyle/>
+          <a:p>
+            <a:pPr algn="l">
+              <a:lnSpc>
+                <a:spcPct val="105000"/>
+              </a:lnSpc>
+            </a:pPr>
+            <a:r>
+              <a:rPr sz="1500" b="1" i="0">
+                <a:solidFill>
+                  <a:srgbClr val="C77700"/>
+                </a:solidFill>
+                <a:latin typeface="Arial"/>
+              </a:rPr>
+              <a:t>Unit economics</a:t>
+            </a:r>
+          </a:p>
+        </p:txBody>
+      </p:sp>
+      <p:graphicFrame>
+        <p:nvGraphicFramePr>
+          <p:cNvPr id="7" name="Table 6"/>
+          <p:cNvGraphicFramePr>
+            <a:graphicFrameLocks noGrp="1"/>
+          </p:cNvGraphicFramePr>
+          <p:nvPr/>
+        </p:nvGraphicFramePr>
+        <p:xfrm>
+          <a:off x="7178040" y="2176272"/>
+          <a:ext cx="4480560" cy="2414016"/>
+        </p:xfrm>
+        <a:graphic>
+          <a:graphicData uri="http://schemas.openxmlformats.org/drawingml/2006/table">
+            <a:tbl>
+              <a:tblPr firstRow="1" bandRow="0">
+                <a:tableStyleId>{5940675A-B579-460E-94D1-54222C63F5DA}</a:tableStyleId>
+              </a:tblPr>
+              <a:tblGrid>
+                <a:gridCol w="2331720"/>
+                <a:gridCol w="2148840"/>
+              </a:tblGrid>
+              <a:tr h="402336">
+                <a:tc>
+                  <a:txBody>
+                    <a:bodyPr wrap="square"/>
+                    <a:lstStyle/>
+                    <a:p>
+                      <a:pPr algn="l"/>
+                      <a:r>
+                        <a:rPr sz="1100" b="1" i="0">
+                          <a:solidFill>
+                            <a:srgbClr val="FFFFFF"/>
+                          </a:solidFill>
+                          <a:latin typeface="Calibri"/>
+                        </a:rPr>
+                        <a:t>Metric</a:t>
+                      </a:r>
+                    </a:p>
+                  </a:txBody>
+                  <a:tcPr anchor="ctr" marL="73152" marR="73152" marT="18288" marB="18288">
+                    <a:solidFill>
+                      <a:srgbClr val="00584C"/>
+                    </a:solidFill>
+                  </a:tcPr>
+                </a:tc>
+                <a:tc>
+                  <a:txBody>
+                    <a:bodyPr wrap="square"/>
+                    <a:lstStyle/>
+                    <a:p>
+                      <a:pPr algn="l"/>
+                      <a:r>
+                        <a:rPr sz="1100" b="1" i="0">
+                          <a:solidFill>
+                            <a:srgbClr val="FFFFFF"/>
+                          </a:solidFill>
+                          <a:latin typeface="Calibri"/>
+                        </a:rPr>
+                        <a:t>Value</a:t>
+                      </a:r>
+                    </a:p>
+                  </a:txBody>
+                  <a:tcPr anchor="ctr" marL="73152" marR="73152" marT="18288" marB="18288">
+                    <a:solidFill>
+                      <a:srgbClr val="00584C"/>
+                    </a:solidFill>
+                  </a:tcPr>
+                </a:tc>
+              </a:tr>
+              <a:tr h="402336">
+                <a:tc>
+                  <a:txBody>
+                    <a:bodyPr wrap="square"/>
+                    <a:lstStyle/>
+                    <a:p>
+                      <a:pPr algn="l"/>
+                      <a:r>
+                        <a:rPr sz="1050" b="0" i="0">
+                          <a:solidFill>
+                            <a:srgbClr val="0E201B"/>
+                          </a:solidFill>
+                          <a:latin typeface="Calibri"/>
+                        </a:rPr>
+                        <a:t>Cost / lead scored</a:t>
+                      </a:r>
+                    </a:p>
+                  </a:txBody>
+                  <a:tcPr anchor="ctr" marL="73152" marR="73152" marT="18288" marB="18288">
+                    <a:solidFill>
+                      <a:srgbClr val="FFFFFF"/>
+                    </a:solidFill>
+                  </a:tcPr>
+                </a:tc>
+                <a:tc>
+                  <a:txBody>
+                    <a:bodyPr wrap="square"/>
+                    <a:lstStyle/>
+                    <a:p>
+                      <a:pPr algn="l"/>
+                      <a:r>
+                        <a:rPr sz="1050" b="1" i="0">
+                          <a:solidFill>
+                            <a:srgbClr val="0E201B"/>
+                          </a:solidFill>
+                          <a:latin typeface="Calibri"/>
+                        </a:rPr>
+                        <a:t>₹0.51  (10× cheaper)</a:t>
+                      </a:r>
+                    </a:p>
+                  </a:txBody>
+                  <a:tcPr anchor="ctr" marL="73152" marR="73152" marT="18288" marB="18288">
+                    <a:solidFill>
+                      <a:srgbClr val="FFFFFF"/>
+                    </a:solidFill>
+                  </a:tcPr>
+                </a:tc>
+              </a:tr>
+              <a:tr h="402336">
+                <a:tc>
+                  <a:txBody>
+                    <a:bodyPr wrap="square"/>
+                    <a:lstStyle/>
+                    <a:p>
+                      <a:pPr algn="l"/>
+                      <a:r>
+                        <a:rPr sz="1050" b="0" i="0">
+                          <a:solidFill>
+                            <a:srgbClr val="0E201B"/>
+                          </a:solidFill>
+                          <a:latin typeface="Calibri"/>
+                        </a:rPr>
+                        <a:t>Cost / conversion</a:t>
+                      </a:r>
+                    </a:p>
+                  </a:txBody>
+                  <a:tcPr anchor="ctr" marL="73152" marR="73152" marT="18288" marB="18288">
+                    <a:solidFill>
+                      <a:srgbClr val="FFFFFF"/>
+                    </a:solidFill>
+                  </a:tcPr>
+                </a:tc>
+                <a:tc>
+                  <a:txBody>
+                    <a:bodyPr wrap="square"/>
+                    <a:lstStyle/>
+                    <a:p>
+                      <a:pPr algn="l"/>
+                      <a:r>
+                        <a:rPr sz="1050" b="1" i="0">
+                          <a:solidFill>
+                            <a:srgbClr val="0E201B"/>
+                          </a:solidFill>
+                          <a:latin typeface="Calibri"/>
+                        </a:rPr>
+                        <a:t>₹170  (3× cheaper)</a:t>
+                      </a:r>
+                    </a:p>
+                  </a:txBody>
+                  <a:tcPr anchor="ctr" marL="73152" marR="73152" marT="18288" marB="18288">
+                    <a:solidFill>
+                      <a:srgbClr val="FFFFFF"/>
+                    </a:solidFill>
+                  </a:tcPr>
+                </a:tc>
+              </a:tr>
+              <a:tr h="402336">
+                <a:tc>
+                  <a:txBody>
+                    <a:bodyPr wrap="square"/>
+                    <a:lstStyle/>
+                    <a:p>
+                      <a:pPr algn="l"/>
+                      <a:r>
+                        <a:rPr sz="1050" b="0" i="0">
+                          <a:solidFill>
+                            <a:srgbClr val="0E201B"/>
+                          </a:solidFill>
+                          <a:latin typeface="Calibri"/>
+                        </a:rPr>
+                        <a:t>Cost / loan disbursed</a:t>
+                      </a:r>
+                    </a:p>
+                  </a:txBody>
+                  <a:tcPr anchor="ctr" marL="73152" marR="73152" marT="18288" marB="18288">
+                    <a:solidFill>
+                      <a:srgbClr val="FFFFFF"/>
+                    </a:solidFill>
+                  </a:tcPr>
+                </a:tc>
+                <a:tc>
+                  <a:txBody>
+                    <a:bodyPr wrap="square"/>
+                    <a:lstStyle/>
+                    <a:p>
+                      <a:pPr algn="l"/>
+                      <a:r>
+                        <a:rPr sz="1050" b="1" i="0">
+                          <a:solidFill>
+                            <a:srgbClr val="0E201B"/>
+                          </a:solidFill>
+                          <a:latin typeface="Calibri"/>
+                        </a:rPr>
+                        <a:t>₹1,700  (3–5× cheaper)</a:t>
+                      </a:r>
+                    </a:p>
+                  </a:txBody>
+                  <a:tcPr anchor="ctr" marL="73152" marR="73152" marT="18288" marB="18288">
+                    <a:solidFill>
+                      <a:srgbClr val="FFFFFF"/>
+                    </a:solidFill>
+                  </a:tcPr>
+                </a:tc>
+              </a:tr>
+              <a:tr h="402336">
+                <a:tc>
+                  <a:txBody>
+                    <a:bodyPr wrap="square"/>
+                    <a:lstStyle/>
+                    <a:p>
+                      <a:pPr algn="l"/>
+                      <a:r>
+                        <a:rPr sz="1050" b="0" i="0">
+                          <a:solidFill>
+                            <a:srgbClr val="0E201B"/>
+                          </a:solidFill>
+                          <a:latin typeface="Calibri"/>
+                        </a:rPr>
+                        <a:t>Revenue / lead (2% margin)</a:t>
+                      </a:r>
+                    </a:p>
+                  </a:txBody>
+                  <a:tcPr anchor="ctr" marL="73152" marR="73152" marT="18288" marB="18288">
+                    <a:solidFill>
+                      <a:srgbClr val="FFFFFF"/>
+                    </a:solidFill>
+                  </a:tcPr>
+                </a:tc>
+                <a:tc>
+                  <a:txBody>
+                    <a:bodyPr wrap="square"/>
+                    <a:lstStyle/>
+                    <a:p>
+                      <a:pPr algn="l"/>
+                      <a:r>
+                        <a:rPr sz="1050" b="1" i="0">
+                          <a:solidFill>
+                            <a:srgbClr val="0E201B"/>
+                          </a:solidFill>
+                          <a:latin typeface="Calibri"/>
+                        </a:rPr>
+                        <a:t>₹4,100  (3.4× higher)</a:t>
+                      </a:r>
+                    </a:p>
+                  </a:txBody>
+                  <a:tcPr anchor="ctr" marL="73152" marR="73152" marT="18288" marB="18288">
+                    <a:solidFill>
+                      <a:srgbClr val="FFFFFF"/>
+                    </a:solidFill>
+                  </a:tcPr>
+                </a:tc>
+              </a:tr>
+              <a:tr h="402336">
+                <a:tc>
+                  <a:txBody>
+                    <a:bodyPr wrap="square"/>
+                    <a:lstStyle/>
+                    <a:p>
+                      <a:pPr algn="l"/>
+                      <a:r>
+                        <a:rPr sz="1050" b="1" i="0">
+                          <a:solidFill>
+                            <a:srgbClr val="0E201B"/>
+                          </a:solidFill>
+                          <a:latin typeface="Calibri"/>
+                        </a:rPr>
+                        <a:t>ROI</a:t>
+                      </a:r>
+                    </a:p>
+                  </a:txBody>
+                  <a:tcPr anchor="ctr" marL="73152" marR="73152" marT="18288" marB="18288">
+                    <a:solidFill>
+                      <a:srgbClr val="EAF4F1"/>
+                    </a:solidFill>
+                  </a:tcPr>
+                </a:tc>
+                <a:tc>
+                  <a:txBody>
+                    <a:bodyPr wrap="square"/>
+                    <a:lstStyle/>
+                    <a:p>
+                      <a:pPr algn="l"/>
+                      <a:r>
+                        <a:rPr sz="1050" b="1" i="0">
+                          <a:solidFill>
+                            <a:srgbClr val="00584C"/>
+                          </a:solidFill>
+                          <a:latin typeface="Calibri"/>
+                        </a:rPr>
+                        <a:t>2.4×  (10× improvement)</a:t>
+                      </a:r>
+                    </a:p>
+                  </a:txBody>
+                  <a:tcPr anchor="ctr" marL="73152" marR="73152" marT="18288" marB="18288">
+                    <a:solidFill>
+                      <a:srgbClr val="EAF4F1"/>
+                    </a:solidFill>
+                  </a:tcPr>
+                </a:tc>
+              </a:tr>
+            </a:tbl>
+          </a:graphicData>
+        </a:graphic>
+      </p:graphicFrame>
+      <p:sp>
+        <p:nvSpPr>
+          <p:cNvPr id="8" name="Rounded Rectangle 7"/>
+          <p:cNvSpPr/>
+          <p:nvPr/>
+        </p:nvSpPr>
+        <p:spPr>
+          <a:xfrm>
+            <a:off x="7178040" y="4892040"/>
+            <a:ext cx="4480560" cy="960120"/>
+          </a:xfrm>
+          <a:prstGeom prst="roundRect">
+            <a:avLst>
+              <a:gd name="adj" fmla="val 12000"/>
+            </a:avLst>
+          </a:prstGeom>
+          <a:solidFill>
+            <a:srgbClr val="EAF4F1"/>
+          </a:solidFill>
+          <a:ln>
+            <a:noFill/>
+          </a:ln>
+        </p:spPr>
+        <p:style>
+          <a:lnRef idx="1">
+            <a:schemeClr val="accent1"/>
+          </a:lnRef>
+          <a:fillRef idx="3">
+            <a:schemeClr val="accent1"/>
+          </a:fillRef>
+          <a:effectRef idx="2">
+            <a:schemeClr val="accent1"/>
+          </a:effectRef>
+          <a:fontRef idx="minor">
+            <a:schemeClr val="lt1"/>
+          </a:fontRef>
+        </p:style>
+        <p:txBody>
+          <a:bodyPr rtlCol="0" anchor="ctr" wrap="square" lIns="228600" rIns="228600"/>
+          <a:lstStyle/>
+          <a:p>
+            <a:pPr algn="ctr"/>
+            <a:r>
+              <a:rPr sz="1200" b="1">
+                <a:solidFill>
+                  <a:srgbClr val="00584C"/>
+                </a:solidFill>
+                <a:latin typeface="Calibri"/>
+              </a:rPr>
+              <a:t>One-time setup:  </a:t>
+            </a:r>
+            <a:r>
+              <a:rPr sz="1200" b="0">
+                <a:solidFill>
+                  <a:srgbClr val="55645F"/>
+                </a:solidFill>
+                <a:latin typeface="Calibri"/>
+              </a:rPr>
+              <a:t>~₹41,700 for data migration &amp; initial model training.</a:t>
+            </a:r>
+          </a:p>
+        </p:txBody>
+      </p:sp>
+      <p:sp>
+        <p:nvSpPr>
+          <p:cNvPr id="9" name="TextBox 8"/>
+          <p:cNvSpPr txBox="1"/>
+          <p:nvPr/>
+        </p:nvSpPr>
+        <p:spPr>
+          <a:xfrm>
+            <a:off x="502920" y="6291072"/>
+            <a:ext cx="11155680" cy="274320"/>
+          </a:xfrm>
+          <a:prstGeom prst="rect">
+            <a:avLst/>
+          </a:prstGeom>
+          <a:noFill/>
+        </p:spPr>
+        <p:txBody>
+          <a:bodyPr wrap="square" anchor="t" lIns="0" rIns="0" tIns="0" bIns="0">
+            <a:spAutoFit/>
+          </a:bodyPr>
+          <a:lstStyle/>
+          <a:p>
+            <a:pPr algn="l">
+              <a:lnSpc>
+                <a:spcPct val="105000"/>
+              </a:lnSpc>
+            </a:pPr>
+            <a:r>
+              <a:rPr sz="1000" b="0" i="1">
+                <a:solidFill>
+                  <a:srgbClr val="55645F"/>
+                </a:solidFill>
+                <a:latin typeface="Calibri"/>
+              </a:rPr>
+              <a:t>Figures are indicative planning estimates; the data-source seam keeps re-platforming cost near zero between phases.</a:t>
+            </a:r>
+          </a:p>
+        </p:txBody>
+      </p:sp>
+      <p:sp>
+        <p:nvSpPr>
+          <p:cNvPr id="10" name="TextBox 9"/>
+          <p:cNvSpPr txBox="1"/>
+          <p:nvPr/>
+        </p:nvSpPr>
+        <p:spPr>
+          <a:xfrm>
+            <a:off x="502920" y="6473952"/>
+            <a:ext cx="5486400" cy="274320"/>
+          </a:xfrm>
+          <a:prstGeom prst="rect">
+            <a:avLst/>
+          </a:prstGeom>
+          <a:noFill/>
+        </p:spPr>
+        <p:txBody>
+          <a:bodyPr wrap="square" anchor="t" lIns="0" rIns="0" tIns="0" bIns="0">
+            <a:spAutoFit/>
+          </a:bodyPr>
+          <a:lstStyle/>
+          <a:p>
+            <a:pPr algn="l">
+              <a:lnSpc>
+                <a:spcPct val="105000"/>
+              </a:lnSpc>
+            </a:pPr>
+            <a:r>
+              <a:rPr sz="900" b="0" i="0">
+                <a:solidFill>
+                  <a:srgbClr val="55645F"/>
+                </a:solidFill>
+                <a:latin typeface="Calibri"/>
+              </a:rPr>
+              <a:t>Prospect Assist AI · IDBI Innovate 2026 · Track 2</a:t>
+            </a:r>
           </a:p>
         </p:txBody>
       </p:sp>

--- a/Prospect_Assist_AI_Submission_Deck.pptx
+++ b/Prospect_Assist_AI_Submission_Deck.pptx
@@ -5168,15 +5168,14 @@
               <a:buNone/>
             </a:pPr>
             <a:r>
-              <a:rPr lang="en-US" sz="1300" dirty="0">
-                <a:solidFill>
-                  <a:srgbClr val="55645F"/>
-                </a:solidFill>
-                <a:latin typeface="Calibri" pitchFamily="34" charset="0"/>
-                <a:ea typeface="Calibri" pitchFamily="34" charset="-122"/>
-                <a:cs typeface="Calibri" pitchFamily="34" charset="-120"/>
-              </a:rPr>
-              <a:t>github.com/  ____________________________</a:t>
+              <a:rPr sz="1350" b="1">
+                <a:solidFill>
+                  <a:srgbClr val="00584C"/>
+                </a:solidFill>
+                <a:latin typeface="Calibri"/>
+                <a:hlinkClick r:id="rId3"/>
+              </a:rPr>
+              <a:t>github.com/KalithasG/prospect-assist-ai</a:t>
             </a:r>
             <a:endParaRPr lang="en-US" sz="1300" dirty="0"/>
           </a:p>
@@ -5392,15 +5391,14 @@
               <a:buNone/>
             </a:pPr>
             <a:r>
-              <a:rPr lang="en-US" sz="1300" dirty="0">
-                <a:solidFill>
-                  <a:srgbClr val="55645F"/>
-                </a:solidFill>
-                <a:latin typeface="Calibri" pitchFamily="34" charset="0"/>
-                <a:ea typeface="Calibri" pitchFamily="34" charset="-122"/>
-                <a:cs typeface="Calibri" pitchFamily="34" charset="-120"/>
-              </a:rPr>
-              <a:t>____________________________</a:t>
+              <a:rPr sz="1350" b="1">
+                <a:solidFill>
+                  <a:srgbClr val="00584C"/>
+                </a:solidFill>
+                <a:latin typeface="Calibri"/>
+                <a:hlinkClick r:id="rId4"/>
+              </a:rPr>
+              <a:t>prospect-assist-ai-brsg.onrender.com</a:t>
             </a:r>
             <a:endParaRPr lang="en-US" sz="1300" dirty="0"/>
           </a:p>

--- a/Prospect_Assist_AI_Submission_Deck.pptx
+++ b/Prospect_Assist_AI_Submission_Deck.pptx
@@ -257,16 +257,16 @@
                   <c:v>150</c:v>
                 </c:pt>
                 <c:pt idx="1">
-                  <c:v>54</c:v>
+                  <c:v>67</c:v>
                 </c:pt>
                 <c:pt idx="2">
-                  <c:v>116</c:v>
+                  <c:v>108</c:v>
                 </c:pt>
                 <c:pt idx="3">
                   <c:v>100</c:v>
                 </c:pt>
                 <c:pt idx="4">
-                  <c:v>280</c:v>
+                  <c:v>275</c:v>
                 </c:pt>
               </c:numCache>
             </c:numRef>
@@ -3009,7 +3009,7 @@
                           <a:ea typeface="Calibri" pitchFamily="34" charset="-122"/>
                           <a:cs typeface="Calibri" pitchFamily="34" charset="-120"/>
                         </a:rPr>
-                        <a:t>100% × 3 segments</a:t>
+                        <a:t>96 / 86 / 85%</a:t>
                       </a:r>
                       <a:endParaRPr lang="en-US" sz="1050" dirty="0">
                         <a:latin typeface="Calibri" charset="0"/>
@@ -3220,7 +3220,7 @@
                           <a:ea typeface="Calibri" pitchFamily="34" charset="-122"/>
                           <a:cs typeface="Calibri" pitchFamily="34" charset="-120"/>
                         </a:rPr>
-                        <a:t>100%</a:t>
+                        <a:t>100% · exact 84.6%</a:t>
                       </a:r>
                       <a:endParaRPr lang="en-US" sz="1050" dirty="0">
                         <a:latin typeface="Calibri" charset="0"/>
@@ -3431,7 +3431,7 @@
                           <a:ea typeface="Calibri" pitchFamily="34" charset="-122"/>
                           <a:cs typeface="Calibri" pitchFamily="34" charset="-120"/>
                         </a:rPr>
-                        <a:t>Passed</a:t>
+                        <a:t>65.4%</a:t>
                       </a:r>
                       <a:endParaRPr lang="en-US" sz="1050" dirty="0">
                         <a:latin typeface="Calibri" charset="0"/>
@@ -4192,7 +4192,7 @@
                 <a:ea typeface="Arial" pitchFamily="34" charset="-122"/>
                 <a:cs typeface="Arial" pitchFamily="34" charset="-120"/>
               </a:rPr>
-              <a:t>16 / 16</a:t>
+              <a:t>25 / 25</a:t>
             </a:r>
             <a:r>
               <a:rPr lang="en-US" sz="1150" dirty="0">
@@ -4203,7 +4203,7 @@
                 <a:ea typeface="Arial" pitchFamily="34" charset="-122"/>
                 <a:cs typeface="Arial" pitchFamily="34" charset="-120"/>
               </a:rPr>
-              <a:t>  tests pass — 9 BDD scenarios (written before implementation) + API contract tests</a:t>
+              <a:t>  tests pass — BDD scenarios (written first) + API contract + governance &amp; signal tests</a:t>
             </a:r>
             <a:endParaRPr lang="en-US" sz="2600" dirty="0"/>
           </a:p>
@@ -4242,7 +4242,7 @@
                 <a:ea typeface="Calibri" pitchFamily="34" charset="-122"/>
                 <a:cs typeface="Calibri" pitchFamily="34" charset="-120"/>
               </a:rPr>
-              <a:t>Caveat: generator and heuristics were co-designed, so Phase-1 numbers are an upper bound. Phase 2 re-runs the same harness on IDBI sandbox data.</a:t>
+              <a:t>Ground truth is drawn independently of the scoring formulas (cash income, GST underreporting, proxy noise) — sub-100% numbers are honest by design. Phase 2 re-runs the same harness on IDBI sandbox data.</a:t>
             </a:r>
             <a:endParaRPr lang="en-US" sz="1000" dirty="0"/>
           </a:p>
@@ -10647,7 +10647,7 @@
                 <a:ea typeface="Calibri" pitchFamily="34" charset="-122"/>
                 <a:cs typeface="Calibri" pitchFamily="34" charset="-120"/>
               </a:rPr>
-              <a:t>Deterministic rule-weighted ensembles with sigmoid (Platt-style) calibration — fully explainable Phase-1 scoring</a:t>
+              <a:t>Deterministic rule-weighted ensembles with heuristic sigmoid squashing (honest labeling; learned calibration in Phase 2) — fully explainable Phase-1 scoring</a:t>
             </a:r>
             <a:endParaRPr lang="en-US" sz="1200" dirty="0"/>
           </a:p>
@@ -10695,7 +10695,7 @@
                 <a:ea typeface="Calibri" pitchFamily="34" charset="-122"/>
                 <a:cs typeface="Calibri" pitchFamily="34" charset="-120"/>
               </a:rPr>
-              <a:t>pytest — 9 BDD scenarios written before implementation + API contract tests (16 tests)</a:t>
+              <a:t>pytest — BDD scenarios written before implementation + API contract + governance/signal tests (25 tests)</a:t>
             </a:r>
             <a:endParaRPr lang="en-US" sz="1200" dirty="0"/>
           </a:p>
